--- a/content/05-teaching-resources/slides/core/01-computational-thinking-and-algorithms.pptx
+++ b/content/05-teaching-resources/slides/core/01-computational-thinking-and-algorithms.pptx
@@ -8,7 +8,7 @@
     <p:sldId id="256" r:id="rId7"/>
     <p:sldId id="257" r:id="rId8"/>
     <p:sldId id="258" r:id="rId9"/>
-    <p:sldId id="259" r:id="rId11"/>
+    <p:sldId id="259" r:id="rId10"/>
     <p:sldId id="260" r:id="rId12"/>
     <p:sldId id="261" r:id="rId13"/>
     <p:sldId id="262" r:id="rId14"/>
@@ -16,6 +16,14 @@
     <p:sldId id="264" r:id="rId16"/>
     <p:sldId id="265" r:id="rId17"/>
     <p:sldId id="266" r:id="rId18"/>
+    <p:sldId id="267" r:id="rId19"/>
+    <p:sldId id="268" r:id="rId20"/>
+    <p:sldId id="269" r:id="rId21"/>
+    <p:sldId id="270" r:id="rId22"/>
+    <p:sldId id="271" r:id="rId23"/>
+    <p:sldId id="272" r:id="rId24"/>
+    <p:sldId id="273" r:id="rId25"/>
+    <p:sldId id="274" r:id="rId26"/>
   </p:sldIdLst>
   <p:sldSz cx="12191695" cy="6858000" type="screen4x3"/>
   <p:notesSz cx="6858000" cy="9144000"/>
@@ -582,7 +590,22 @@
           <a:lstStyle/>
           <a:p>
             <a:r>
-              <a:t>Flowchart symbols: terminator, process, sub-process, decision, input/output, arrows and labels. The full list is on the Flowchart and Python notation page.</a:t>
+              <a:t>Answers:</a:t>
+            </a:r>
+          </a:p>
+          <a:p>
+            <a:r>
+              <a:t>1. Removing unnecessary detail to focus on what matters.</a:t>
+            </a:r>
+          </a:p>
+          <a:p>
+            <a:r>
+              <a:t>2. It lets you reuse solutions to similar problems.</a:t>
+            </a:r>
+          </a:p>
+          <a:p>
+            <a:r>
+              <a:t>3. E.g. enter details, check details, grant or refuse access.</a:t>
             </a:r>
           </a:p>
         </p:txBody>
@@ -652,7 +675,7 @@
           <a:lstStyle/>
           <a:p>
             <a:r>
-              <a:t>Give students a few minutes to answer on mini whiteboards or paper, then reveal the answers on the next slide.</a:t>
+              <a:t>Flowchart symbols: terminator, process, sub-process, decision, input/output, arrows and labels. The full list is on the Flowchart and Python notation page.</a:t>
             </a:r>
           </a:p>
         </p:txBody>
@@ -722,7 +745,22 @@
           <a:lstStyle/>
           <a:p>
             <a:r>
-              <a:t>Talk through any answers the class found difficult.</a:t>
+              <a:t>Answers:</a:t>
+            </a:r>
+          </a:p>
+          <a:p>
+            <a:r>
+              <a:t>1. A parallelogram.</a:t>
+            </a:r>
+          </a:p>
+          <a:p>
+            <a:r>
+              <a:t>2. It can be ambiguous.</a:t>
+            </a:r>
+          </a:p>
+          <a:p>
+            <a:r>
+              <a:t>3. Code can actually be run.</a:t>
             </a:r>
           </a:p>
         </p:txBody>
@@ -748,6 +786,316 @@
 </file>
 
 <file path=ppt/notesSlides/notesSlide5.xml><?xml version="1.0" encoding="utf-8"?>
+<p:notes xmlns:a="http://schemas.openxmlformats.org/drawingml/2006/main" xmlns:p="http://schemas.openxmlformats.org/presentationml/2006/main" xmlns:r="http://schemas.openxmlformats.org/officeDocument/2006/relationships">
+  <p:cSld>
+    <p:spTree>
+      <p:nvGrpSpPr>
+        <p:cNvPr id="1" name=""/>
+        <p:cNvGrpSpPr/>
+        <p:nvPr/>
+      </p:nvGrpSpPr>
+      <p:grpSpPr>
+        <a:xfrm>
+          <a:off x="0" y="0"/>
+          <a:ext cx="0" cy="0"/>
+          <a:chOff x="0" y="0"/>
+          <a:chExt cx="0" cy="0"/>
+        </a:xfrm>
+      </p:grpSpPr>
+      <p:sp>
+        <p:nvSpPr>
+          <p:cNvPr id="2" name="Slide Image Placeholder 1"/>
+          <p:cNvSpPr>
+            <a:spLocks noGrp="1"/>
+          </p:cNvSpPr>
+          <p:nvPr>
+            <p:ph type="sldImg" idx="2"/>
+          </p:nvPr>
+        </p:nvSpPr>
+        <p:spPr/>
+      </p:sp>
+      <p:sp>
+        <p:nvSpPr>
+          <p:cNvPr id="3" name="Notes Placeholder 2"/>
+          <p:cNvSpPr>
+            <a:spLocks noGrp="1"/>
+          </p:cNvSpPr>
+          <p:nvPr>
+            <p:ph type="body" idx="3" sz="quarter"/>
+          </p:nvPr>
+        </p:nvSpPr>
+        <p:spPr/>
+        <p:txBody>
+          <a:bodyPr/>
+          <a:lstStyle/>
+          <a:p>
+            <a:r>
+              <a:t>Answers:</a:t>
+            </a:r>
+          </a:p>
+          <a:p>
+            <a:r>
+              <a:t>1. for.</a:t>
+            </a:r>
+          </a:p>
+          <a:p>
+            <a:r>
+              <a:t>2. if, elif, else, and match case.</a:t>
+            </a:r>
+          </a:p>
+          <a:p>
+            <a:r>
+              <a:t>3. An infinite loop if the condition never becomes false.</a:t>
+            </a:r>
+          </a:p>
+        </p:txBody>
+      </p:sp>
+      <p:sp>
+        <p:nvSpPr>
+          <p:cNvPr id="4" name="Slide Number Placeholder 3"/>
+          <p:cNvSpPr>
+            <a:spLocks noGrp="1"/>
+          </p:cNvSpPr>
+          <p:nvPr>
+            <p:ph type="sldNum" idx="5" sz="quarter"/>
+          </p:nvPr>
+        </p:nvSpPr>
+        <p:spPr/>
+      </p:sp>
+    </p:spTree>
+  </p:cSld>
+  <p:clrMapOvr>
+    <a:masterClrMapping/>
+  </p:clrMapOvr>
+</p:notes>
+</file>
+
+<file path=ppt/notesSlides/notesSlide6.xml><?xml version="1.0" encoding="utf-8"?>
+<p:notes xmlns:a="http://schemas.openxmlformats.org/drawingml/2006/main" xmlns:p="http://schemas.openxmlformats.org/presentationml/2006/main" xmlns:r="http://schemas.openxmlformats.org/officeDocument/2006/relationships">
+  <p:cSld>
+    <p:spTree>
+      <p:nvGrpSpPr>
+        <p:cNvPr id="1" name=""/>
+        <p:cNvGrpSpPr/>
+        <p:nvPr/>
+      </p:nvGrpSpPr>
+      <p:grpSpPr>
+        <a:xfrm>
+          <a:off x="0" y="0"/>
+          <a:ext cx="0" cy="0"/>
+          <a:chOff x="0" y="0"/>
+          <a:chExt cx="0" cy="0"/>
+        </a:xfrm>
+      </p:grpSpPr>
+      <p:sp>
+        <p:nvSpPr>
+          <p:cNvPr id="2" name="Slide Image Placeholder 1"/>
+          <p:cNvSpPr>
+            <a:spLocks noGrp="1"/>
+          </p:cNvSpPr>
+          <p:nvPr>
+            <p:ph type="sldImg" idx="2"/>
+          </p:nvPr>
+        </p:nvSpPr>
+        <p:spPr/>
+      </p:sp>
+      <p:sp>
+        <p:nvSpPr>
+          <p:cNvPr id="3" name="Notes Placeholder 2"/>
+          <p:cNvSpPr>
+            <a:spLocks noGrp="1"/>
+          </p:cNvSpPr>
+          <p:nvPr>
+            <p:ph type="body" idx="3" sz="quarter"/>
+          </p:nvPr>
+        </p:nvSpPr>
+        <p:spPr/>
+        <p:txBody>
+          <a:bodyPr/>
+          <a:lstStyle/>
+          <a:p>
+            <a:r>
+              <a:t>Answers:</a:t>
+            </a:r>
+          </a:p>
+          <a:p>
+            <a:r>
+              <a:t>1. A table recording each variable's value at every step.</a:t>
+            </a:r>
+          </a:p>
+          <a:p>
+            <a:r>
+              <a:t>2. 1, 2, 3, 4.</a:t>
+            </a:r>
+          </a:p>
+          <a:p>
+            <a:r>
+              <a:t>3. With the inputs and required outputs.</a:t>
+            </a:r>
+          </a:p>
+        </p:txBody>
+      </p:sp>
+      <p:sp>
+        <p:nvSpPr>
+          <p:cNvPr id="4" name="Slide Number Placeholder 3"/>
+          <p:cNvSpPr>
+            <a:spLocks noGrp="1"/>
+          </p:cNvSpPr>
+          <p:nvPr>
+            <p:ph type="sldNum" idx="5" sz="quarter"/>
+          </p:nvPr>
+        </p:nvSpPr>
+        <p:spPr/>
+      </p:sp>
+    </p:spTree>
+  </p:cSld>
+  <p:clrMapOvr>
+    <a:masterClrMapping/>
+  </p:clrMapOvr>
+</p:notes>
+</file>
+
+<file path=ppt/notesSlides/notesSlide7.xml><?xml version="1.0" encoding="utf-8"?>
+<p:notes xmlns:a="http://schemas.openxmlformats.org/drawingml/2006/main" xmlns:p="http://schemas.openxmlformats.org/presentationml/2006/main" xmlns:r="http://schemas.openxmlformats.org/officeDocument/2006/relationships">
+  <p:cSld>
+    <p:spTree>
+      <p:nvGrpSpPr>
+        <p:cNvPr id="1" name=""/>
+        <p:cNvGrpSpPr/>
+        <p:nvPr/>
+      </p:nvGrpSpPr>
+      <p:grpSpPr>
+        <a:xfrm>
+          <a:off x="0" y="0"/>
+          <a:ext cx="0" cy="0"/>
+          <a:chOff x="0" y="0"/>
+          <a:chExt cx="0" cy="0"/>
+        </a:xfrm>
+      </p:grpSpPr>
+      <p:sp>
+        <p:nvSpPr>
+          <p:cNvPr id="2" name="Slide Image Placeholder 1"/>
+          <p:cNvSpPr>
+            <a:spLocks noGrp="1"/>
+          </p:cNvSpPr>
+          <p:nvPr>
+            <p:ph type="sldImg" idx="2"/>
+          </p:nvPr>
+        </p:nvSpPr>
+        <p:spPr/>
+      </p:sp>
+      <p:sp>
+        <p:nvSpPr>
+          <p:cNvPr id="3" name="Notes Placeholder 2"/>
+          <p:cNvSpPr>
+            <a:spLocks noGrp="1"/>
+          </p:cNvSpPr>
+          <p:nvPr>
+            <p:ph type="body" idx="3" sz="quarter"/>
+          </p:nvPr>
+        </p:nvSpPr>
+        <p:spPr/>
+        <p:txBody>
+          <a:bodyPr/>
+          <a:lstStyle/>
+          <a:p>
+            <a:r>
+              <a:t>Give students a few minutes to answer on mini whiteboards or paper, then reveal the answers on the next slide.</a:t>
+            </a:r>
+          </a:p>
+        </p:txBody>
+      </p:sp>
+      <p:sp>
+        <p:nvSpPr>
+          <p:cNvPr id="4" name="Slide Number Placeholder 3"/>
+          <p:cNvSpPr>
+            <a:spLocks noGrp="1"/>
+          </p:cNvSpPr>
+          <p:nvPr>
+            <p:ph type="sldNum" idx="5" sz="quarter"/>
+          </p:nvPr>
+        </p:nvSpPr>
+        <p:spPr/>
+      </p:sp>
+    </p:spTree>
+  </p:cSld>
+  <p:clrMapOvr>
+    <a:masterClrMapping/>
+  </p:clrMapOvr>
+</p:notes>
+</file>
+
+<file path=ppt/notesSlides/notesSlide8.xml><?xml version="1.0" encoding="utf-8"?>
+<p:notes xmlns:a="http://schemas.openxmlformats.org/drawingml/2006/main" xmlns:p="http://schemas.openxmlformats.org/presentationml/2006/main" xmlns:r="http://schemas.openxmlformats.org/officeDocument/2006/relationships">
+  <p:cSld>
+    <p:spTree>
+      <p:nvGrpSpPr>
+        <p:cNvPr id="1" name=""/>
+        <p:cNvGrpSpPr/>
+        <p:nvPr/>
+      </p:nvGrpSpPr>
+      <p:grpSpPr>
+        <a:xfrm>
+          <a:off x="0" y="0"/>
+          <a:ext cx="0" cy="0"/>
+          <a:chOff x="0" y="0"/>
+          <a:chExt cx="0" cy="0"/>
+        </a:xfrm>
+      </p:grpSpPr>
+      <p:sp>
+        <p:nvSpPr>
+          <p:cNvPr id="2" name="Slide Image Placeholder 1"/>
+          <p:cNvSpPr>
+            <a:spLocks noGrp="1"/>
+          </p:cNvSpPr>
+          <p:nvPr>
+            <p:ph type="sldImg" idx="2"/>
+          </p:nvPr>
+        </p:nvSpPr>
+        <p:spPr/>
+      </p:sp>
+      <p:sp>
+        <p:nvSpPr>
+          <p:cNvPr id="3" name="Notes Placeholder 2"/>
+          <p:cNvSpPr>
+            <a:spLocks noGrp="1"/>
+          </p:cNvSpPr>
+          <p:nvPr>
+            <p:ph type="body" idx="3" sz="quarter"/>
+          </p:nvPr>
+        </p:nvSpPr>
+        <p:spPr/>
+        <p:txBody>
+          <a:bodyPr/>
+          <a:lstStyle/>
+          <a:p>
+            <a:r>
+              <a:t>Talk through any answers the class found difficult.</a:t>
+            </a:r>
+          </a:p>
+        </p:txBody>
+      </p:sp>
+      <p:sp>
+        <p:nvSpPr>
+          <p:cNvPr id="4" name="Slide Number Placeholder 3"/>
+          <p:cNvSpPr>
+            <a:spLocks noGrp="1"/>
+          </p:cNvSpPr>
+          <p:nvPr>
+            <p:ph type="sldNum" idx="5" sz="quarter"/>
+          </p:nvPr>
+        </p:nvSpPr>
+        <p:spPr/>
+      </p:sp>
+    </p:spTree>
+  </p:cSld>
+  <p:clrMapOvr>
+    <a:masterClrMapping/>
+  </p:clrMapOvr>
+</p:notes>
+</file>
+
+<file path=ppt/notesSlides/notesSlide9.xml><?xml version="1.0" encoding="utf-8"?>
 <p:notes xmlns:a="http://schemas.openxmlformats.org/drawingml/2006/main" xmlns:p="http://schemas.openxmlformats.org/presentationml/2006/main" xmlns:r="http://schemas.openxmlformats.org/officeDocument/2006/relationships">
   <p:cSld>
     <p:spTree>
@@ -4196,7 +4544,7 @@
                 </a:solidFill>
                 <a:latin typeface="Cambria"/>
               </a:rPr>
-              <a:t>Activity: Flowchart to Python</a:t>
+              <a:t>Actions that control the order of steps</a:t>
             </a:r>
           </a:p>
         </p:txBody>
@@ -4263,6 +4611,4171 @@
                 <a:latin typeface="Calibri"/>
               </a:rPr>
               <a:t>10</a:t>
+            </a:r>
+          </a:p>
+        </p:txBody>
+      </p:sp>
+      <p:sp>
+        <p:nvSpPr>
+          <p:cNvPr id="6" name="TextBox 5"/>
+          <p:cNvSpPr txBox="1"/>
+          <p:nvPr/>
+        </p:nvSpPr>
+        <p:spPr>
+          <a:xfrm>
+            <a:off x="548640" y="1554480"/>
+            <a:ext cx="6720840" cy="4617720"/>
+          </a:xfrm>
+          <a:prstGeom prst="rect">
+            <a:avLst/>
+          </a:prstGeom>
+          <a:noFill/>
+        </p:spPr>
+        <p:txBody>
+          <a:bodyPr wrap="square" lIns="0" rIns="0" tIns="0" bIns="0">
+            <a:spAutoFit/>
+          </a:bodyPr>
+          <a:lstStyle/>
+          <a:p>
+            <a:pPr>
+              <a:spcAft>
+                <a:spcPts val="1320"/>
+              </a:spcAft>
+            </a:pPr>
+            <a:r>
+              <a:rPr sz="2200" b="0">
+                <a:solidFill>
+                  <a:srgbClr val="202122"/>
+                </a:solidFill>
+                <a:latin typeface="Calibri"/>
+              </a:rPr>
+              <a:t>Every algorithm uses three actions to control the order of its steps.</a:t>
+            </a:r>
+          </a:p>
+          <a:p>
+            <a:pPr>
+              <a:spcAft>
+                <a:spcPts val="1320"/>
+              </a:spcAft>
+            </a:pPr>
+            <a:r>
+              <a:rPr sz="2200" b="1">
+                <a:solidFill>
+                  <a:srgbClr val="202122"/>
+                </a:solidFill>
+                <a:latin typeface="Calibri"/>
+              </a:rPr>
+              <a:t>Sequence:</a:t>
+            </a:r>
+            <a:r>
+              <a:rPr sz="2200" b="0">
+                <a:solidFill>
+                  <a:srgbClr val="202122"/>
+                </a:solidFill>
+                <a:latin typeface="Calibri"/>
+              </a:rPr>
+              <a:t> steps run one after another, top to bottom.</a:t>
+            </a:r>
+          </a:p>
+          <a:p>
+            <a:pPr>
+              <a:spcAft>
+                <a:spcPts val="1320"/>
+              </a:spcAft>
+            </a:pPr>
+            <a:r>
+              <a:rPr sz="2200" b="1">
+                <a:solidFill>
+                  <a:srgbClr val="202122"/>
+                </a:solidFill>
+                <a:latin typeface="Calibri"/>
+              </a:rPr>
+              <a:t>Selection:</a:t>
+            </a:r>
+            <a:r>
+              <a:rPr sz="2200" b="0">
+                <a:solidFill>
+                  <a:srgbClr val="202122"/>
+                </a:solidFill>
+                <a:latin typeface="Calibri"/>
+              </a:rPr>
+              <a:t> a condition decides which steps run. Python uses if, elif and else, or match case to compare one value against several options.</a:t>
+            </a:r>
+          </a:p>
+          <a:p>
+            <a:pPr>
+              <a:spcAft>
+                <a:spcPts val="1320"/>
+              </a:spcAft>
+            </a:pPr>
+            <a:r>
+              <a:rPr sz="2200" b="1">
+                <a:solidFill>
+                  <a:srgbClr val="202122"/>
+                </a:solidFill>
+                <a:latin typeface="Calibri"/>
+              </a:rPr>
+              <a:t>Iteration:</a:t>
+            </a:r>
+            <a:r>
+              <a:rPr sz="2200" b="0">
+                <a:solidFill>
+                  <a:srgbClr val="202122"/>
+                </a:solidFill>
+                <a:latin typeface="Calibri"/>
+              </a:rPr>
+              <a:t> steps repeat. A for loop repeats a set number of times or once for each item in a list (count-controlled). A while loop repeats as long as a condition is true (condition-controlled), so the condition must eventually become false.</a:t>
+            </a:r>
+          </a:p>
+        </p:txBody>
+      </p:sp>
+      <p:sp>
+        <p:nvSpPr>
+          <p:cNvPr id="7" name="Rounded Rectangle 6"/>
+          <p:cNvSpPr/>
+          <p:nvPr/>
+        </p:nvSpPr>
+        <p:spPr>
+          <a:xfrm>
+            <a:off x="7772400" y="1554480"/>
+            <a:ext cx="3867912" cy="4526280"/>
+          </a:xfrm>
+          <a:prstGeom prst="roundRect">
+            <a:avLst>
+              <a:gd name="adj" fmla="val 8000"/>
+            </a:avLst>
+          </a:prstGeom>
+          <a:solidFill>
+            <a:srgbClr val="03306E"/>
+          </a:solidFill>
+          <a:ln>
+            <a:noFill/>
+          </a:ln>
+          <a:effectLst/>
+        </p:spPr>
+        <p:style>
+          <a:lnRef idx="1">
+            <a:schemeClr val="accent1"/>
+          </a:lnRef>
+          <a:fillRef idx="3">
+            <a:schemeClr val="accent1"/>
+          </a:fillRef>
+          <a:effectRef idx="2">
+            <a:schemeClr val="accent1"/>
+          </a:effectRef>
+          <a:fontRef idx="minor">
+            <a:schemeClr val="lt1"/>
+          </a:fontRef>
+        </p:style>
+        <p:txBody>
+          <a:bodyPr rtlCol="0" anchor="ctr"/>
+          <a:lstStyle/>
+          <a:p/>
+        </p:txBody>
+      </p:sp>
+      <p:sp>
+        <p:nvSpPr>
+          <p:cNvPr id="8" name="Oval 7"/>
+          <p:cNvSpPr/>
+          <p:nvPr/>
+        </p:nvSpPr>
+        <p:spPr>
+          <a:xfrm>
+            <a:off x="8046720" y="1828800"/>
+            <a:ext cx="548640" cy="548640"/>
+          </a:xfrm>
+          <a:prstGeom prst="ellipse">
+            <a:avLst/>
+          </a:prstGeom>
+          <a:solidFill>
+            <a:srgbClr val="F2B705"/>
+          </a:solidFill>
+          <a:ln>
+            <a:noFill/>
+          </a:ln>
+          <a:effectLst/>
+        </p:spPr>
+        <p:style>
+          <a:lnRef idx="1">
+            <a:schemeClr val="accent1"/>
+          </a:lnRef>
+          <a:fillRef idx="3">
+            <a:schemeClr val="accent1"/>
+          </a:fillRef>
+          <a:effectRef idx="2">
+            <a:schemeClr val="accent1"/>
+          </a:effectRef>
+          <a:fontRef idx="minor">
+            <a:schemeClr val="lt1"/>
+          </a:fontRef>
+        </p:style>
+        <p:txBody>
+          <a:bodyPr rtlCol="0" anchor="ctr" lIns="0" rIns="0" tIns="0" bIns="0"/>
+          <a:lstStyle/>
+          <a:p>
+            <a:pPr algn="ctr"/>
+            <a:r>
+              <a:rPr sz="1300" b="1">
+                <a:solidFill>
+                  <a:srgbClr val="202122"/>
+                </a:solidFill>
+                <a:latin typeface="Calibri"/>
+              </a:rPr>
+              <a:t>e.g.</a:t>
+            </a:r>
+          </a:p>
+        </p:txBody>
+      </p:sp>
+      <p:sp>
+        <p:nvSpPr>
+          <p:cNvPr id="9" name="TextBox 8"/>
+          <p:cNvSpPr txBox="1"/>
+          <p:nvPr/>
+        </p:nvSpPr>
+        <p:spPr>
+          <a:xfrm>
+            <a:off x="8046720" y="2560320"/>
+            <a:ext cx="3291840" cy="365760"/>
+          </a:xfrm>
+          <a:prstGeom prst="rect">
+            <a:avLst/>
+          </a:prstGeom>
+          <a:noFill/>
+        </p:spPr>
+        <p:txBody>
+          <a:bodyPr wrap="square" anchor="t" lIns="0" rIns="0" tIns="0" bIns="0"/>
+          <a:lstStyle/>
+          <a:p>
+            <a:pPr algn="l"/>
+            <a:r>
+              <a:rPr sz="1300" b="1" i="0">
+                <a:solidFill>
+                  <a:srgbClr val="A9C8F0"/>
+                </a:solidFill>
+                <a:latin typeface="Calibri"/>
+              </a:rPr>
+              <a:t>EXAMPLE</a:t>
+            </a:r>
+          </a:p>
+        </p:txBody>
+      </p:sp>
+      <p:sp>
+        <p:nvSpPr>
+          <p:cNvPr id="10" name="TextBox 9"/>
+          <p:cNvSpPr txBox="1"/>
+          <p:nvPr/>
+        </p:nvSpPr>
+        <p:spPr>
+          <a:xfrm>
+            <a:off x="8046720" y="2971800"/>
+            <a:ext cx="3291840" cy="2971800"/>
+          </a:xfrm>
+          <a:prstGeom prst="rect">
+            <a:avLst/>
+          </a:prstGeom>
+          <a:noFill/>
+        </p:spPr>
+        <p:txBody>
+          <a:bodyPr wrap="square" anchor="t" lIns="0" rIns="0" tIns="0" bIns="0"/>
+          <a:lstStyle/>
+          <a:p>
+            <a:pPr algn="l"/>
+            <a:r>
+              <a:rPr sz="1900" b="0" i="0">
+                <a:solidFill>
+                  <a:srgbClr val="FFFFFF"/>
+                </a:solidFill>
+                <a:latin typeface="Cambria"/>
+              </a:rPr>
+              <a:t>A guessing game: generate a number (sequence), while the guess is wrong keep asking (iteration), if the guess is too high say 'lower' (selection).</a:t>
+            </a:r>
+          </a:p>
+        </p:txBody>
+      </p:sp>
+    </p:spTree>
+  </p:cSld>
+  <p:clrMapOvr>
+    <a:masterClrMapping/>
+  </p:clrMapOvr>
+</p:sld>
+</file>
+
+<file path=ppt/slides/slide11.xml><?xml version="1.0" encoding="utf-8"?>
+<p:sld xmlns:a="http://schemas.openxmlformats.org/drawingml/2006/main" xmlns:p="http://schemas.openxmlformats.org/presentationml/2006/main" xmlns:r="http://schemas.openxmlformats.org/officeDocument/2006/relationships">
+  <p:cSld>
+    <p:bg>
+      <p:bgPr>
+        <a:solidFill>
+          <a:srgbClr val="FFFFFF"/>
+        </a:solidFill>
+        <a:effectLst/>
+      </p:bgPr>
+    </p:bg>
+    <p:spTree>
+      <p:nvGrpSpPr>
+        <p:cNvPr id="1" name=""/>
+        <p:cNvGrpSpPr/>
+        <p:nvPr/>
+      </p:nvGrpSpPr>
+      <p:grpSpPr/>
+      <p:sp>
+        <p:nvSpPr>
+          <p:cNvPr id="2" name="TextBox 1"/>
+          <p:cNvSpPr txBox="1"/>
+          <p:nvPr/>
+        </p:nvSpPr>
+        <p:spPr>
+          <a:xfrm>
+            <a:off x="548640" y="320040"/>
+            <a:ext cx="11094415" cy="274320"/>
+          </a:xfrm>
+          <a:prstGeom prst="rect">
+            <a:avLst/>
+          </a:prstGeom>
+          <a:noFill/>
+        </p:spPr>
+        <p:txBody>
+          <a:bodyPr wrap="square" anchor="t" lIns="0" rIns="0" tIns="0" bIns="0"/>
+          <a:lstStyle/>
+          <a:p>
+            <a:pPr algn="l"/>
+            <a:r>
+              <a:rPr sz="1100" b="1" i="0">
+                <a:solidFill>
+                  <a:srgbClr val="54595D"/>
+                </a:solidFill>
+                <a:latin typeface="Calibri"/>
+              </a:rPr>
+              <a:t>CORE COMPONENT  ·  Core Paper 1</a:t>
+            </a:r>
+          </a:p>
+        </p:txBody>
+      </p:sp>
+      <p:sp>
+        <p:nvSpPr>
+          <p:cNvPr id="3" name="TextBox 2"/>
+          <p:cNvSpPr txBox="1"/>
+          <p:nvPr/>
+        </p:nvSpPr>
+        <p:spPr>
+          <a:xfrm>
+            <a:off x="548640" y="566928"/>
+            <a:ext cx="11094415" cy="822960"/>
+          </a:xfrm>
+          <a:prstGeom prst="rect">
+            <a:avLst/>
+          </a:prstGeom>
+          <a:noFill/>
+        </p:spPr>
+        <p:txBody>
+          <a:bodyPr wrap="square" anchor="ctr" lIns="0" rIns="0" tIns="0" bIns="0"/>
+          <a:lstStyle/>
+          <a:p>
+            <a:pPr algn="l"/>
+            <a:r>
+              <a:rPr sz="3200" b="1" i="0">
+                <a:solidFill>
+                  <a:srgbClr val="03306E"/>
+                </a:solidFill>
+                <a:latin typeface="Cambria"/>
+              </a:rPr>
+              <a:t>Actions that control the order of steps</a:t>
+            </a:r>
+          </a:p>
+        </p:txBody>
+      </p:sp>
+      <p:sp>
+        <p:nvSpPr>
+          <p:cNvPr id="4" name="TextBox 3"/>
+          <p:cNvSpPr txBox="1"/>
+          <p:nvPr/>
+        </p:nvSpPr>
+        <p:spPr>
+          <a:xfrm>
+            <a:off x="548640" y="6446520"/>
+            <a:ext cx="8229600" cy="274320"/>
+          </a:xfrm>
+          <a:prstGeom prst="rect">
+            <a:avLst/>
+          </a:prstGeom>
+          <a:noFill/>
+        </p:spPr>
+        <p:txBody>
+          <a:bodyPr wrap="square" anchor="t" lIns="0" rIns="0" tIns="0" bIns="0"/>
+          <a:lstStyle/>
+          <a:p>
+            <a:pPr algn="l"/>
+            <a:r>
+              <a:rPr sz="1000" b="0" i="0">
+                <a:solidFill>
+                  <a:srgbClr val="54595D"/>
+                </a:solidFill>
+                <a:latin typeface="Calibri"/>
+              </a:rPr>
+              <a:t>Digital Software Development T Level  ·  Computational Thinking and Algorithms</a:t>
+            </a:r>
+          </a:p>
+        </p:txBody>
+      </p:sp>
+      <p:sp>
+        <p:nvSpPr>
+          <p:cNvPr id="5" name="TextBox 4"/>
+          <p:cNvSpPr txBox="1"/>
+          <p:nvPr/>
+        </p:nvSpPr>
+        <p:spPr>
+          <a:xfrm>
+            <a:off x="10728655" y="6446520"/>
+            <a:ext cx="914400" cy="274320"/>
+          </a:xfrm>
+          <a:prstGeom prst="rect">
+            <a:avLst/>
+          </a:prstGeom>
+          <a:noFill/>
+        </p:spPr>
+        <p:txBody>
+          <a:bodyPr wrap="square" anchor="t" lIns="0" rIns="0" tIns="0" bIns="0"/>
+          <a:lstStyle/>
+          <a:p>
+            <a:pPr algn="r"/>
+            <a:r>
+              <a:rPr sz="1000" b="0" i="0">
+                <a:solidFill>
+                  <a:srgbClr val="54595D"/>
+                </a:solidFill>
+                <a:latin typeface="Calibri"/>
+              </a:rPr>
+              <a:t>11</a:t>
+            </a:r>
+          </a:p>
+        </p:txBody>
+      </p:sp>
+      <p:sp>
+        <p:nvSpPr>
+          <p:cNvPr id="6" name="Rounded Rectangle 5"/>
+          <p:cNvSpPr/>
+          <p:nvPr/>
+        </p:nvSpPr>
+        <p:spPr>
+          <a:xfrm>
+            <a:off x="548640" y="1600200"/>
+            <a:ext cx="3515258" cy="4572000"/>
+          </a:xfrm>
+          <a:prstGeom prst="roundRect">
+            <a:avLst>
+              <a:gd name="adj" fmla="val 6000"/>
+            </a:avLst>
+          </a:prstGeom>
+          <a:solidFill>
+            <a:srgbClr val="EAF3FF"/>
+          </a:solidFill>
+          <a:ln>
+            <a:noFill/>
+          </a:ln>
+          <a:effectLst/>
+        </p:spPr>
+        <p:style>
+          <a:lnRef idx="1">
+            <a:schemeClr val="accent1"/>
+          </a:lnRef>
+          <a:fillRef idx="3">
+            <a:schemeClr val="accent1"/>
+          </a:fillRef>
+          <a:effectRef idx="2">
+            <a:schemeClr val="accent1"/>
+          </a:effectRef>
+          <a:fontRef idx="minor">
+            <a:schemeClr val="lt1"/>
+          </a:fontRef>
+        </p:style>
+        <p:txBody>
+          <a:bodyPr rtlCol="0" anchor="ctr"/>
+          <a:lstStyle/>
+          <a:p/>
+        </p:txBody>
+      </p:sp>
+      <p:sp>
+        <p:nvSpPr>
+          <p:cNvPr id="7" name="Oval 6"/>
+          <p:cNvSpPr/>
+          <p:nvPr/>
+        </p:nvSpPr>
+        <p:spPr>
+          <a:xfrm>
+            <a:off x="777240" y="1828800"/>
+            <a:ext cx="457200" cy="457200"/>
+          </a:xfrm>
+          <a:prstGeom prst="ellipse">
+            <a:avLst/>
+          </a:prstGeom>
+          <a:solidFill>
+            <a:srgbClr val="F2B705"/>
+          </a:solidFill>
+          <a:ln>
+            <a:noFill/>
+          </a:ln>
+          <a:effectLst/>
+        </p:spPr>
+        <p:style>
+          <a:lnRef idx="1">
+            <a:schemeClr val="accent1"/>
+          </a:lnRef>
+          <a:fillRef idx="3">
+            <a:schemeClr val="accent1"/>
+          </a:fillRef>
+          <a:effectRef idx="2">
+            <a:schemeClr val="accent1"/>
+          </a:effectRef>
+          <a:fontRef idx="minor">
+            <a:schemeClr val="lt1"/>
+          </a:fontRef>
+        </p:style>
+        <p:txBody>
+          <a:bodyPr rtlCol="0" anchor="ctr" lIns="0" rIns="0" tIns="0" bIns="0"/>
+          <a:lstStyle/>
+          <a:p>
+            <a:pPr algn="ctr"/>
+            <a:r>
+              <a:rPr sz="1500" b="1">
+                <a:solidFill>
+                  <a:srgbClr val="202122"/>
+                </a:solidFill>
+                <a:latin typeface="Calibri"/>
+              </a:rPr>
+              <a:t>1</a:t>
+            </a:r>
+          </a:p>
+        </p:txBody>
+      </p:sp>
+      <p:sp>
+        <p:nvSpPr>
+          <p:cNvPr id="8" name="TextBox 7"/>
+          <p:cNvSpPr txBox="1"/>
+          <p:nvPr/>
+        </p:nvSpPr>
+        <p:spPr>
+          <a:xfrm>
+            <a:off x="1371600" y="1801368"/>
+            <a:ext cx="2509418" cy="512064"/>
+          </a:xfrm>
+          <a:prstGeom prst="rect">
+            <a:avLst/>
+          </a:prstGeom>
+          <a:noFill/>
+        </p:spPr>
+        <p:txBody>
+          <a:bodyPr wrap="square" anchor="ctr" lIns="0" rIns="0" tIns="0" bIns="0"/>
+          <a:lstStyle/>
+          <a:p>
+            <a:pPr algn="l"/>
+            <a:r>
+              <a:rPr sz="1900" b="1" i="0">
+                <a:solidFill>
+                  <a:srgbClr val="03306E"/>
+                </a:solidFill>
+                <a:latin typeface="Calibri"/>
+              </a:rPr>
+              <a:t>Sequence</a:t>
+            </a:r>
+          </a:p>
+        </p:txBody>
+      </p:sp>
+      <p:sp>
+        <p:nvSpPr>
+          <p:cNvPr id="9" name="TextBox 8"/>
+          <p:cNvSpPr txBox="1"/>
+          <p:nvPr/>
+        </p:nvSpPr>
+        <p:spPr>
+          <a:xfrm>
+            <a:off x="777240" y="2468880"/>
+            <a:ext cx="3058058" cy="3566160"/>
+          </a:xfrm>
+          <a:prstGeom prst="rect">
+            <a:avLst/>
+          </a:prstGeom>
+          <a:noFill/>
+        </p:spPr>
+        <p:txBody>
+          <a:bodyPr wrap="square" anchor="t" lIns="0" rIns="0" tIns="0" bIns="0"/>
+          <a:lstStyle/>
+          <a:p>
+            <a:pPr algn="l"/>
+            <a:r>
+              <a:rPr sz="2000" b="0" i="0">
+                <a:solidFill>
+                  <a:srgbClr val="202122"/>
+                </a:solidFill>
+                <a:latin typeface="Calibri"/>
+              </a:rPr>
+              <a:t>Steps run one after another, in order.</a:t>
+            </a:r>
+          </a:p>
+        </p:txBody>
+      </p:sp>
+      <p:sp>
+        <p:nvSpPr>
+          <p:cNvPr id="10" name="Rounded Rectangle 9"/>
+          <p:cNvSpPr/>
+          <p:nvPr/>
+        </p:nvSpPr>
+        <p:spPr>
+          <a:xfrm>
+            <a:off x="4338218" y="1600200"/>
+            <a:ext cx="3515258" cy="4572000"/>
+          </a:xfrm>
+          <a:prstGeom prst="roundRect">
+            <a:avLst>
+              <a:gd name="adj" fmla="val 6000"/>
+            </a:avLst>
+          </a:prstGeom>
+          <a:solidFill>
+            <a:srgbClr val="EAF3FF"/>
+          </a:solidFill>
+          <a:ln>
+            <a:noFill/>
+          </a:ln>
+          <a:effectLst/>
+        </p:spPr>
+        <p:style>
+          <a:lnRef idx="1">
+            <a:schemeClr val="accent1"/>
+          </a:lnRef>
+          <a:fillRef idx="3">
+            <a:schemeClr val="accent1"/>
+          </a:fillRef>
+          <a:effectRef idx="2">
+            <a:schemeClr val="accent1"/>
+          </a:effectRef>
+          <a:fontRef idx="minor">
+            <a:schemeClr val="lt1"/>
+          </a:fontRef>
+        </p:style>
+        <p:txBody>
+          <a:bodyPr rtlCol="0" anchor="ctr"/>
+          <a:lstStyle/>
+          <a:p/>
+        </p:txBody>
+      </p:sp>
+      <p:sp>
+        <p:nvSpPr>
+          <p:cNvPr id="11" name="Oval 10"/>
+          <p:cNvSpPr/>
+          <p:nvPr/>
+        </p:nvSpPr>
+        <p:spPr>
+          <a:xfrm>
+            <a:off x="4566818" y="1828800"/>
+            <a:ext cx="457200" cy="457200"/>
+          </a:xfrm>
+          <a:prstGeom prst="ellipse">
+            <a:avLst/>
+          </a:prstGeom>
+          <a:solidFill>
+            <a:srgbClr val="F2B705"/>
+          </a:solidFill>
+          <a:ln>
+            <a:noFill/>
+          </a:ln>
+          <a:effectLst/>
+        </p:spPr>
+        <p:style>
+          <a:lnRef idx="1">
+            <a:schemeClr val="accent1"/>
+          </a:lnRef>
+          <a:fillRef idx="3">
+            <a:schemeClr val="accent1"/>
+          </a:fillRef>
+          <a:effectRef idx="2">
+            <a:schemeClr val="accent1"/>
+          </a:effectRef>
+          <a:fontRef idx="minor">
+            <a:schemeClr val="lt1"/>
+          </a:fontRef>
+        </p:style>
+        <p:txBody>
+          <a:bodyPr rtlCol="0" anchor="ctr" lIns="0" rIns="0" tIns="0" bIns="0"/>
+          <a:lstStyle/>
+          <a:p>
+            <a:pPr algn="ctr"/>
+            <a:r>
+              <a:rPr sz="1500" b="1">
+                <a:solidFill>
+                  <a:srgbClr val="202122"/>
+                </a:solidFill>
+                <a:latin typeface="Calibri"/>
+              </a:rPr>
+              <a:t>2</a:t>
+            </a:r>
+          </a:p>
+        </p:txBody>
+      </p:sp>
+      <p:sp>
+        <p:nvSpPr>
+          <p:cNvPr id="12" name="TextBox 11"/>
+          <p:cNvSpPr txBox="1"/>
+          <p:nvPr/>
+        </p:nvSpPr>
+        <p:spPr>
+          <a:xfrm>
+            <a:off x="5161178" y="1801368"/>
+            <a:ext cx="2509418" cy="512064"/>
+          </a:xfrm>
+          <a:prstGeom prst="rect">
+            <a:avLst/>
+          </a:prstGeom>
+          <a:noFill/>
+        </p:spPr>
+        <p:txBody>
+          <a:bodyPr wrap="square" anchor="ctr" lIns="0" rIns="0" tIns="0" bIns="0"/>
+          <a:lstStyle/>
+          <a:p>
+            <a:pPr algn="l"/>
+            <a:r>
+              <a:rPr sz="1900" b="1" i="0">
+                <a:solidFill>
+                  <a:srgbClr val="03306E"/>
+                </a:solidFill>
+                <a:latin typeface="Calibri"/>
+              </a:rPr>
+              <a:t>Selection</a:t>
+            </a:r>
+          </a:p>
+        </p:txBody>
+      </p:sp>
+      <p:sp>
+        <p:nvSpPr>
+          <p:cNvPr id="13" name="TextBox 12"/>
+          <p:cNvSpPr txBox="1"/>
+          <p:nvPr/>
+        </p:nvSpPr>
+        <p:spPr>
+          <a:xfrm>
+            <a:off x="4566818" y="2468880"/>
+            <a:ext cx="3058058" cy="3566160"/>
+          </a:xfrm>
+          <a:prstGeom prst="rect">
+            <a:avLst/>
+          </a:prstGeom>
+          <a:noFill/>
+        </p:spPr>
+        <p:txBody>
+          <a:bodyPr wrap="square" anchor="t" lIns="0" rIns="0" tIns="0" bIns="0"/>
+          <a:lstStyle/>
+          <a:p>
+            <a:pPr algn="l"/>
+            <a:r>
+              <a:rPr sz="2000" b="0" i="0">
+                <a:solidFill>
+                  <a:srgbClr val="202122"/>
+                </a:solidFill>
+                <a:latin typeface="Calibri"/>
+              </a:rPr>
+              <a:t>A condition chooses which path to take: if, elif, else, match case.</a:t>
+            </a:r>
+          </a:p>
+        </p:txBody>
+      </p:sp>
+      <p:sp>
+        <p:nvSpPr>
+          <p:cNvPr id="14" name="Rounded Rectangle 13"/>
+          <p:cNvSpPr/>
+          <p:nvPr/>
+        </p:nvSpPr>
+        <p:spPr>
+          <a:xfrm>
+            <a:off x="8127796" y="1600200"/>
+            <a:ext cx="3515258" cy="4572000"/>
+          </a:xfrm>
+          <a:prstGeom prst="roundRect">
+            <a:avLst>
+              <a:gd name="adj" fmla="val 6000"/>
+            </a:avLst>
+          </a:prstGeom>
+          <a:solidFill>
+            <a:srgbClr val="EAF3FF"/>
+          </a:solidFill>
+          <a:ln>
+            <a:noFill/>
+          </a:ln>
+          <a:effectLst/>
+        </p:spPr>
+        <p:style>
+          <a:lnRef idx="1">
+            <a:schemeClr val="accent1"/>
+          </a:lnRef>
+          <a:fillRef idx="3">
+            <a:schemeClr val="accent1"/>
+          </a:fillRef>
+          <a:effectRef idx="2">
+            <a:schemeClr val="accent1"/>
+          </a:effectRef>
+          <a:fontRef idx="minor">
+            <a:schemeClr val="lt1"/>
+          </a:fontRef>
+        </p:style>
+        <p:txBody>
+          <a:bodyPr rtlCol="0" anchor="ctr"/>
+          <a:lstStyle/>
+          <a:p/>
+        </p:txBody>
+      </p:sp>
+      <p:sp>
+        <p:nvSpPr>
+          <p:cNvPr id="15" name="Oval 14"/>
+          <p:cNvSpPr/>
+          <p:nvPr/>
+        </p:nvSpPr>
+        <p:spPr>
+          <a:xfrm>
+            <a:off x="8356396" y="1828800"/>
+            <a:ext cx="457200" cy="457200"/>
+          </a:xfrm>
+          <a:prstGeom prst="ellipse">
+            <a:avLst/>
+          </a:prstGeom>
+          <a:solidFill>
+            <a:srgbClr val="F2B705"/>
+          </a:solidFill>
+          <a:ln>
+            <a:noFill/>
+          </a:ln>
+          <a:effectLst/>
+        </p:spPr>
+        <p:style>
+          <a:lnRef idx="1">
+            <a:schemeClr val="accent1"/>
+          </a:lnRef>
+          <a:fillRef idx="3">
+            <a:schemeClr val="accent1"/>
+          </a:fillRef>
+          <a:effectRef idx="2">
+            <a:schemeClr val="accent1"/>
+          </a:effectRef>
+          <a:fontRef idx="minor">
+            <a:schemeClr val="lt1"/>
+          </a:fontRef>
+        </p:style>
+        <p:txBody>
+          <a:bodyPr rtlCol="0" anchor="ctr" lIns="0" rIns="0" tIns="0" bIns="0"/>
+          <a:lstStyle/>
+          <a:p>
+            <a:pPr algn="ctr"/>
+            <a:r>
+              <a:rPr sz="1500" b="1">
+                <a:solidFill>
+                  <a:srgbClr val="202122"/>
+                </a:solidFill>
+                <a:latin typeface="Calibri"/>
+              </a:rPr>
+              <a:t>3</a:t>
+            </a:r>
+          </a:p>
+        </p:txBody>
+      </p:sp>
+      <p:sp>
+        <p:nvSpPr>
+          <p:cNvPr id="16" name="TextBox 15"/>
+          <p:cNvSpPr txBox="1"/>
+          <p:nvPr/>
+        </p:nvSpPr>
+        <p:spPr>
+          <a:xfrm>
+            <a:off x="8950756" y="1801368"/>
+            <a:ext cx="2509418" cy="512064"/>
+          </a:xfrm>
+          <a:prstGeom prst="rect">
+            <a:avLst/>
+          </a:prstGeom>
+          <a:noFill/>
+        </p:spPr>
+        <p:txBody>
+          <a:bodyPr wrap="square" anchor="ctr" lIns="0" rIns="0" tIns="0" bIns="0"/>
+          <a:lstStyle/>
+          <a:p>
+            <a:pPr algn="l"/>
+            <a:r>
+              <a:rPr sz="1900" b="1" i="0">
+                <a:solidFill>
+                  <a:srgbClr val="03306E"/>
+                </a:solidFill>
+                <a:latin typeface="Calibri"/>
+              </a:rPr>
+              <a:t>Iteration</a:t>
+            </a:r>
+          </a:p>
+        </p:txBody>
+      </p:sp>
+      <p:sp>
+        <p:nvSpPr>
+          <p:cNvPr id="17" name="TextBox 16"/>
+          <p:cNvSpPr txBox="1"/>
+          <p:nvPr/>
+        </p:nvSpPr>
+        <p:spPr>
+          <a:xfrm>
+            <a:off x="8356396" y="2468880"/>
+            <a:ext cx="3058058" cy="3566160"/>
+          </a:xfrm>
+          <a:prstGeom prst="rect">
+            <a:avLst/>
+          </a:prstGeom>
+          <a:noFill/>
+        </p:spPr>
+        <p:txBody>
+          <a:bodyPr wrap="square" anchor="t" lIns="0" rIns="0" tIns="0" bIns="0"/>
+          <a:lstStyle/>
+          <a:p>
+            <a:pPr algn="l"/>
+            <a:r>
+              <a:rPr sz="2000" b="0" i="0">
+                <a:solidFill>
+                  <a:srgbClr val="202122"/>
+                </a:solidFill>
+                <a:latin typeface="Calibri"/>
+              </a:rPr>
+              <a:t>Steps repeat: a for loop a set number of times, a while loop until a condition changes.</a:t>
+            </a:r>
+          </a:p>
+        </p:txBody>
+      </p:sp>
+    </p:spTree>
+  </p:cSld>
+  <p:clrMapOvr>
+    <a:masterClrMapping/>
+  </p:clrMapOvr>
+</p:sld>
+</file>
+
+<file path=ppt/slides/slide12.xml><?xml version="1.0" encoding="utf-8"?>
+<p:sld xmlns:a="http://schemas.openxmlformats.org/drawingml/2006/main" xmlns:p="http://schemas.openxmlformats.org/presentationml/2006/main" xmlns:r="http://schemas.openxmlformats.org/officeDocument/2006/relationships">
+  <p:cSld>
+    <p:bg>
+      <p:bgPr>
+        <a:solidFill>
+          <a:srgbClr val="FFFFFF"/>
+        </a:solidFill>
+        <a:effectLst/>
+      </p:bgPr>
+    </p:bg>
+    <p:spTree>
+      <p:nvGrpSpPr>
+        <p:cNvPr id="1" name=""/>
+        <p:cNvGrpSpPr/>
+        <p:nvPr/>
+      </p:nvGrpSpPr>
+      <p:grpSpPr/>
+      <p:sp>
+        <p:nvSpPr>
+          <p:cNvPr id="2" name="TextBox 1"/>
+          <p:cNvSpPr txBox="1"/>
+          <p:nvPr/>
+        </p:nvSpPr>
+        <p:spPr>
+          <a:xfrm>
+            <a:off x="548640" y="320040"/>
+            <a:ext cx="11094415" cy="274320"/>
+          </a:xfrm>
+          <a:prstGeom prst="rect">
+            <a:avLst/>
+          </a:prstGeom>
+          <a:noFill/>
+        </p:spPr>
+        <p:txBody>
+          <a:bodyPr wrap="square" anchor="t" lIns="0" rIns="0" tIns="0" bIns="0"/>
+          <a:lstStyle/>
+          <a:p>
+            <a:pPr algn="l"/>
+            <a:r>
+              <a:rPr sz="1100" b="1" i="0">
+                <a:solidFill>
+                  <a:srgbClr val="54595D"/>
+                </a:solidFill>
+                <a:latin typeface="Calibri"/>
+              </a:rPr>
+              <a:t>CORE COMPONENT  ·  Core Paper 1</a:t>
+            </a:r>
+          </a:p>
+        </p:txBody>
+      </p:sp>
+      <p:sp>
+        <p:nvSpPr>
+          <p:cNvPr id="3" name="TextBox 2"/>
+          <p:cNvSpPr txBox="1"/>
+          <p:nvPr/>
+        </p:nvSpPr>
+        <p:spPr>
+          <a:xfrm>
+            <a:off x="548640" y="566928"/>
+            <a:ext cx="11094415" cy="822960"/>
+          </a:xfrm>
+          <a:prstGeom prst="rect">
+            <a:avLst/>
+          </a:prstGeom>
+          <a:noFill/>
+        </p:spPr>
+        <p:txBody>
+          <a:bodyPr wrap="square" anchor="ctr" lIns="0" rIns="0" tIns="0" bIns="0"/>
+          <a:lstStyle/>
+          <a:p>
+            <a:pPr algn="l"/>
+            <a:r>
+              <a:rPr sz="3200" b="1" i="0">
+                <a:solidFill>
+                  <a:srgbClr val="03306E"/>
+                </a:solidFill>
+                <a:latin typeface="Cambria"/>
+              </a:rPr>
+              <a:t>Quick check: Actions that control the order of steps</a:t>
+            </a:r>
+          </a:p>
+        </p:txBody>
+      </p:sp>
+      <p:sp>
+        <p:nvSpPr>
+          <p:cNvPr id="4" name="TextBox 3"/>
+          <p:cNvSpPr txBox="1"/>
+          <p:nvPr/>
+        </p:nvSpPr>
+        <p:spPr>
+          <a:xfrm>
+            <a:off x="548640" y="6446520"/>
+            <a:ext cx="8229600" cy="274320"/>
+          </a:xfrm>
+          <a:prstGeom prst="rect">
+            <a:avLst/>
+          </a:prstGeom>
+          <a:noFill/>
+        </p:spPr>
+        <p:txBody>
+          <a:bodyPr wrap="square" anchor="t" lIns="0" rIns="0" tIns="0" bIns="0"/>
+          <a:lstStyle/>
+          <a:p>
+            <a:pPr algn="l"/>
+            <a:r>
+              <a:rPr sz="1000" b="0" i="0">
+                <a:solidFill>
+                  <a:srgbClr val="54595D"/>
+                </a:solidFill>
+                <a:latin typeface="Calibri"/>
+              </a:rPr>
+              <a:t>Digital Software Development T Level  ·  Computational Thinking and Algorithms</a:t>
+            </a:r>
+          </a:p>
+        </p:txBody>
+      </p:sp>
+      <p:sp>
+        <p:nvSpPr>
+          <p:cNvPr id="5" name="TextBox 4"/>
+          <p:cNvSpPr txBox="1"/>
+          <p:nvPr/>
+        </p:nvSpPr>
+        <p:spPr>
+          <a:xfrm>
+            <a:off x="10728655" y="6446520"/>
+            <a:ext cx="914400" cy="274320"/>
+          </a:xfrm>
+          <a:prstGeom prst="rect">
+            <a:avLst/>
+          </a:prstGeom>
+          <a:noFill/>
+        </p:spPr>
+        <p:txBody>
+          <a:bodyPr wrap="square" anchor="t" lIns="0" rIns="0" tIns="0" bIns="0"/>
+          <a:lstStyle/>
+          <a:p>
+            <a:pPr algn="r"/>
+            <a:r>
+              <a:rPr sz="1000" b="0" i="0">
+                <a:solidFill>
+                  <a:srgbClr val="54595D"/>
+                </a:solidFill>
+                <a:latin typeface="Calibri"/>
+              </a:rPr>
+              <a:t>12</a:t>
+            </a:r>
+          </a:p>
+        </p:txBody>
+      </p:sp>
+      <p:sp>
+        <p:nvSpPr>
+          <p:cNvPr id="6" name="Oval 5"/>
+          <p:cNvSpPr/>
+          <p:nvPr/>
+        </p:nvSpPr>
+        <p:spPr>
+          <a:xfrm>
+            <a:off x="548640" y="1691640"/>
+            <a:ext cx="502920" cy="502920"/>
+          </a:xfrm>
+          <a:prstGeom prst="ellipse">
+            <a:avLst/>
+          </a:prstGeom>
+          <a:solidFill>
+            <a:srgbClr val="F2B705"/>
+          </a:solidFill>
+          <a:ln>
+            <a:noFill/>
+          </a:ln>
+          <a:effectLst/>
+        </p:spPr>
+        <p:style>
+          <a:lnRef idx="1">
+            <a:schemeClr val="accent1"/>
+          </a:lnRef>
+          <a:fillRef idx="3">
+            <a:schemeClr val="accent1"/>
+          </a:fillRef>
+          <a:effectRef idx="2">
+            <a:schemeClr val="accent1"/>
+          </a:effectRef>
+          <a:fontRef idx="minor">
+            <a:schemeClr val="lt1"/>
+          </a:fontRef>
+        </p:style>
+        <p:txBody>
+          <a:bodyPr rtlCol="0" anchor="ctr" lIns="0" rIns="0" tIns="0" bIns="0"/>
+          <a:lstStyle/>
+          <a:p>
+            <a:pPr algn="ctr"/>
+            <a:r>
+              <a:rPr sz="1600" b="1">
+                <a:solidFill>
+                  <a:srgbClr val="202122"/>
+                </a:solidFill>
+                <a:latin typeface="Calibri"/>
+              </a:rPr>
+              <a:t>1</a:t>
+            </a:r>
+          </a:p>
+        </p:txBody>
+      </p:sp>
+      <p:sp>
+        <p:nvSpPr>
+          <p:cNvPr id="7" name="TextBox 6"/>
+          <p:cNvSpPr txBox="1"/>
+          <p:nvPr/>
+        </p:nvSpPr>
+        <p:spPr>
+          <a:xfrm>
+            <a:off x="1371600" y="1645920"/>
+            <a:ext cx="10271455" cy="1188720"/>
+          </a:xfrm>
+          <a:prstGeom prst="rect">
+            <a:avLst/>
+          </a:prstGeom>
+          <a:noFill/>
+        </p:spPr>
+        <p:txBody>
+          <a:bodyPr wrap="square" anchor="t" lIns="0" rIns="0" tIns="0" bIns="0"/>
+          <a:lstStyle/>
+          <a:p>
+            <a:pPr algn="l"/>
+            <a:r>
+              <a:rPr sz="2400" b="0" i="0">
+                <a:solidFill>
+                  <a:srgbClr val="202122"/>
+                </a:solidFill>
+                <a:latin typeface="Calibri"/>
+              </a:rPr>
+              <a:t>Which Python loop is count-controlled?</a:t>
+            </a:r>
+          </a:p>
+        </p:txBody>
+      </p:sp>
+      <p:sp>
+        <p:nvSpPr>
+          <p:cNvPr id="8" name="Oval 7"/>
+          <p:cNvSpPr/>
+          <p:nvPr/>
+        </p:nvSpPr>
+        <p:spPr>
+          <a:xfrm>
+            <a:off x="548640" y="3108960"/>
+            <a:ext cx="502920" cy="502920"/>
+          </a:xfrm>
+          <a:prstGeom prst="ellipse">
+            <a:avLst/>
+          </a:prstGeom>
+          <a:solidFill>
+            <a:srgbClr val="F2B705"/>
+          </a:solidFill>
+          <a:ln>
+            <a:noFill/>
+          </a:ln>
+          <a:effectLst/>
+        </p:spPr>
+        <p:style>
+          <a:lnRef idx="1">
+            <a:schemeClr val="accent1"/>
+          </a:lnRef>
+          <a:fillRef idx="3">
+            <a:schemeClr val="accent1"/>
+          </a:fillRef>
+          <a:effectRef idx="2">
+            <a:schemeClr val="accent1"/>
+          </a:effectRef>
+          <a:fontRef idx="minor">
+            <a:schemeClr val="lt1"/>
+          </a:fontRef>
+        </p:style>
+        <p:txBody>
+          <a:bodyPr rtlCol="0" anchor="ctr" lIns="0" rIns="0" tIns="0" bIns="0"/>
+          <a:lstStyle/>
+          <a:p>
+            <a:pPr algn="ctr"/>
+            <a:r>
+              <a:rPr sz="1600" b="1">
+                <a:solidFill>
+                  <a:srgbClr val="202122"/>
+                </a:solidFill>
+                <a:latin typeface="Calibri"/>
+              </a:rPr>
+              <a:t>2</a:t>
+            </a:r>
+          </a:p>
+        </p:txBody>
+      </p:sp>
+      <p:sp>
+        <p:nvSpPr>
+          <p:cNvPr id="9" name="TextBox 8"/>
+          <p:cNvSpPr txBox="1"/>
+          <p:nvPr/>
+        </p:nvSpPr>
+        <p:spPr>
+          <a:xfrm>
+            <a:off x="1371600" y="3063240"/>
+            <a:ext cx="10271455" cy="1188720"/>
+          </a:xfrm>
+          <a:prstGeom prst="rect">
+            <a:avLst/>
+          </a:prstGeom>
+          <a:noFill/>
+        </p:spPr>
+        <p:txBody>
+          <a:bodyPr wrap="square" anchor="t" lIns="0" rIns="0" tIns="0" bIns="0"/>
+          <a:lstStyle/>
+          <a:p>
+            <a:pPr algn="l"/>
+            <a:r>
+              <a:rPr sz="2400" b="0" i="0">
+                <a:solidFill>
+                  <a:srgbClr val="202122"/>
+                </a:solidFill>
+                <a:latin typeface="Calibri"/>
+              </a:rPr>
+              <a:t>What keywords does Python use for selection?</a:t>
+            </a:r>
+          </a:p>
+        </p:txBody>
+      </p:sp>
+      <p:sp>
+        <p:nvSpPr>
+          <p:cNvPr id="10" name="Oval 9"/>
+          <p:cNvSpPr/>
+          <p:nvPr/>
+        </p:nvSpPr>
+        <p:spPr>
+          <a:xfrm>
+            <a:off x="548640" y="4526280"/>
+            <a:ext cx="502920" cy="502920"/>
+          </a:xfrm>
+          <a:prstGeom prst="ellipse">
+            <a:avLst/>
+          </a:prstGeom>
+          <a:solidFill>
+            <a:srgbClr val="F2B705"/>
+          </a:solidFill>
+          <a:ln>
+            <a:noFill/>
+          </a:ln>
+          <a:effectLst/>
+        </p:spPr>
+        <p:style>
+          <a:lnRef idx="1">
+            <a:schemeClr val="accent1"/>
+          </a:lnRef>
+          <a:fillRef idx="3">
+            <a:schemeClr val="accent1"/>
+          </a:fillRef>
+          <a:effectRef idx="2">
+            <a:schemeClr val="accent1"/>
+          </a:effectRef>
+          <a:fontRef idx="minor">
+            <a:schemeClr val="lt1"/>
+          </a:fontRef>
+        </p:style>
+        <p:txBody>
+          <a:bodyPr rtlCol="0" anchor="ctr" lIns="0" rIns="0" tIns="0" bIns="0"/>
+          <a:lstStyle/>
+          <a:p>
+            <a:pPr algn="ctr"/>
+            <a:r>
+              <a:rPr sz="1600" b="1">
+                <a:solidFill>
+                  <a:srgbClr val="202122"/>
+                </a:solidFill>
+                <a:latin typeface="Calibri"/>
+              </a:rPr>
+              <a:t>3</a:t>
+            </a:r>
+          </a:p>
+        </p:txBody>
+      </p:sp>
+      <p:sp>
+        <p:nvSpPr>
+          <p:cNvPr id="11" name="TextBox 10"/>
+          <p:cNvSpPr txBox="1"/>
+          <p:nvPr/>
+        </p:nvSpPr>
+        <p:spPr>
+          <a:xfrm>
+            <a:off x="1371600" y="4480560"/>
+            <a:ext cx="10271455" cy="1188720"/>
+          </a:xfrm>
+          <a:prstGeom prst="rect">
+            <a:avLst/>
+          </a:prstGeom>
+          <a:noFill/>
+        </p:spPr>
+        <p:txBody>
+          <a:bodyPr wrap="square" anchor="t" lIns="0" rIns="0" tIns="0" bIns="0"/>
+          <a:lstStyle/>
+          <a:p>
+            <a:pPr algn="l"/>
+            <a:r>
+              <a:rPr sz="2400" b="0" i="0">
+                <a:solidFill>
+                  <a:srgbClr val="202122"/>
+                </a:solidFill>
+                <a:latin typeface="Calibri"/>
+              </a:rPr>
+              <a:t>What is the risk with a while loop?</a:t>
+            </a:r>
+          </a:p>
+        </p:txBody>
+      </p:sp>
+      <p:sp>
+        <p:nvSpPr>
+          <p:cNvPr id="12" name="TextBox 11"/>
+          <p:cNvSpPr txBox="1"/>
+          <p:nvPr/>
+        </p:nvSpPr>
+        <p:spPr>
+          <a:xfrm>
+            <a:off x="548640" y="5852160"/>
+            <a:ext cx="11094415" cy="365760"/>
+          </a:xfrm>
+          <a:prstGeom prst="rect">
+            <a:avLst/>
+          </a:prstGeom>
+          <a:noFill/>
+        </p:spPr>
+        <p:txBody>
+          <a:bodyPr wrap="square" anchor="t" lIns="0" rIns="0" tIns="0" bIns="0"/>
+          <a:lstStyle/>
+          <a:p>
+            <a:pPr algn="l"/>
+            <a:r>
+              <a:rPr sz="1300" b="0" i="1">
+                <a:solidFill>
+                  <a:srgbClr val="54595D"/>
+                </a:solidFill>
+                <a:latin typeface="Calibri"/>
+              </a:rPr>
+              <a:t>Answer on mini whiteboards or in your book. Answers are in the speaker notes.</a:t>
+            </a:r>
+          </a:p>
+        </p:txBody>
+      </p:sp>
+    </p:spTree>
+  </p:cSld>
+  <p:clrMapOvr>
+    <a:masterClrMapping/>
+  </p:clrMapOvr>
+</p:sld>
+</file>
+
+<file path=ppt/slides/slide13.xml><?xml version="1.0" encoding="utf-8"?>
+<p:sld xmlns:a="http://schemas.openxmlformats.org/drawingml/2006/main" xmlns:p="http://schemas.openxmlformats.org/presentationml/2006/main" xmlns:r="http://schemas.openxmlformats.org/officeDocument/2006/relationships">
+  <p:cSld>
+    <p:bg>
+      <p:bgPr>
+        <a:solidFill>
+          <a:srgbClr val="FFFFFF"/>
+        </a:solidFill>
+        <a:effectLst/>
+      </p:bgPr>
+    </p:bg>
+    <p:spTree>
+      <p:nvGrpSpPr>
+        <p:cNvPr id="1" name=""/>
+        <p:cNvGrpSpPr/>
+        <p:nvPr/>
+      </p:nvGrpSpPr>
+      <p:grpSpPr/>
+      <p:sp>
+        <p:nvSpPr>
+          <p:cNvPr id="2" name="TextBox 1"/>
+          <p:cNvSpPr txBox="1"/>
+          <p:nvPr/>
+        </p:nvSpPr>
+        <p:spPr>
+          <a:xfrm>
+            <a:off x="548640" y="320040"/>
+            <a:ext cx="11094415" cy="274320"/>
+          </a:xfrm>
+          <a:prstGeom prst="rect">
+            <a:avLst/>
+          </a:prstGeom>
+          <a:noFill/>
+        </p:spPr>
+        <p:txBody>
+          <a:bodyPr wrap="square" anchor="t" lIns="0" rIns="0" tIns="0" bIns="0"/>
+          <a:lstStyle/>
+          <a:p>
+            <a:pPr algn="l"/>
+            <a:r>
+              <a:rPr sz="1100" b="1" i="0">
+                <a:solidFill>
+                  <a:srgbClr val="54595D"/>
+                </a:solidFill>
+                <a:latin typeface="Calibri"/>
+              </a:rPr>
+              <a:t>CORE COMPONENT  ·  Core Paper 1</a:t>
+            </a:r>
+          </a:p>
+        </p:txBody>
+      </p:sp>
+      <p:sp>
+        <p:nvSpPr>
+          <p:cNvPr id="3" name="TextBox 2"/>
+          <p:cNvSpPr txBox="1"/>
+          <p:nvPr/>
+        </p:nvSpPr>
+        <p:spPr>
+          <a:xfrm>
+            <a:off x="548640" y="566928"/>
+            <a:ext cx="11094415" cy="822960"/>
+          </a:xfrm>
+          <a:prstGeom prst="rect">
+            <a:avLst/>
+          </a:prstGeom>
+          <a:noFill/>
+        </p:spPr>
+        <p:txBody>
+          <a:bodyPr wrap="square" anchor="ctr" lIns="0" rIns="0" tIns="0" bIns="0"/>
+          <a:lstStyle/>
+          <a:p>
+            <a:pPr algn="l"/>
+            <a:r>
+              <a:rPr sz="3200" b="1" i="0">
+                <a:solidFill>
+                  <a:srgbClr val="03306E"/>
+                </a:solidFill>
+                <a:latin typeface="Cambria"/>
+              </a:rPr>
+              <a:t>Working with algorithms</a:t>
+            </a:r>
+          </a:p>
+        </p:txBody>
+      </p:sp>
+      <p:sp>
+        <p:nvSpPr>
+          <p:cNvPr id="4" name="TextBox 3"/>
+          <p:cNvSpPr txBox="1"/>
+          <p:nvPr/>
+        </p:nvSpPr>
+        <p:spPr>
+          <a:xfrm>
+            <a:off x="548640" y="6446520"/>
+            <a:ext cx="8229600" cy="274320"/>
+          </a:xfrm>
+          <a:prstGeom prst="rect">
+            <a:avLst/>
+          </a:prstGeom>
+          <a:noFill/>
+        </p:spPr>
+        <p:txBody>
+          <a:bodyPr wrap="square" anchor="t" lIns="0" rIns="0" tIns="0" bIns="0"/>
+          <a:lstStyle/>
+          <a:p>
+            <a:pPr algn="l"/>
+            <a:r>
+              <a:rPr sz="1000" b="0" i="0">
+                <a:solidFill>
+                  <a:srgbClr val="54595D"/>
+                </a:solidFill>
+                <a:latin typeface="Calibri"/>
+              </a:rPr>
+              <a:t>Digital Software Development T Level  ·  Computational Thinking and Algorithms</a:t>
+            </a:r>
+          </a:p>
+        </p:txBody>
+      </p:sp>
+      <p:sp>
+        <p:nvSpPr>
+          <p:cNvPr id="5" name="TextBox 4"/>
+          <p:cNvSpPr txBox="1"/>
+          <p:nvPr/>
+        </p:nvSpPr>
+        <p:spPr>
+          <a:xfrm>
+            <a:off x="10728655" y="6446520"/>
+            <a:ext cx="914400" cy="274320"/>
+          </a:xfrm>
+          <a:prstGeom prst="rect">
+            <a:avLst/>
+          </a:prstGeom>
+          <a:noFill/>
+        </p:spPr>
+        <p:txBody>
+          <a:bodyPr wrap="square" anchor="t" lIns="0" rIns="0" tIns="0" bIns="0"/>
+          <a:lstStyle/>
+          <a:p>
+            <a:pPr algn="r"/>
+            <a:r>
+              <a:rPr sz="1000" b="0" i="0">
+                <a:solidFill>
+                  <a:srgbClr val="54595D"/>
+                </a:solidFill>
+                <a:latin typeface="Calibri"/>
+              </a:rPr>
+              <a:t>13</a:t>
+            </a:r>
+          </a:p>
+        </p:txBody>
+      </p:sp>
+      <p:sp>
+        <p:nvSpPr>
+          <p:cNvPr id="6" name="TextBox 5"/>
+          <p:cNvSpPr txBox="1"/>
+          <p:nvPr/>
+        </p:nvSpPr>
+        <p:spPr>
+          <a:xfrm>
+            <a:off x="548640" y="1554480"/>
+            <a:ext cx="6720840" cy="4617720"/>
+          </a:xfrm>
+          <a:prstGeom prst="rect">
+            <a:avLst/>
+          </a:prstGeom>
+          <a:noFill/>
+        </p:spPr>
+        <p:txBody>
+          <a:bodyPr wrap="square" lIns="0" rIns="0" tIns="0" bIns="0">
+            <a:spAutoFit/>
+          </a:bodyPr>
+          <a:lstStyle/>
+          <a:p>
+            <a:pPr>
+              <a:spcAft>
+                <a:spcPts val="1260"/>
+              </a:spcAft>
+            </a:pPr>
+            <a:r>
+              <a:rPr sz="2100" b="0">
+                <a:solidFill>
+                  <a:srgbClr val="202122"/>
+                </a:solidFill>
+                <a:latin typeface="Calibri"/>
+              </a:rPr>
+              <a:t>You'll need to work with algorithms in four ways.</a:t>
+            </a:r>
+          </a:p>
+          <a:p>
+            <a:pPr>
+              <a:spcAft>
+                <a:spcPts val="1260"/>
+              </a:spcAft>
+            </a:pPr>
+            <a:r>
+              <a:rPr sz="2100" b="1">
+                <a:solidFill>
+                  <a:srgbClr val="202122"/>
+                </a:solidFill>
+                <a:latin typeface="Calibri"/>
+              </a:rPr>
+              <a:t>Find the purpose and output:</a:t>
+            </a:r>
+            <a:r>
+              <a:rPr sz="2100" b="0">
+                <a:solidFill>
+                  <a:srgbClr val="202122"/>
+                </a:solidFill>
+                <a:latin typeface="Calibri"/>
+              </a:rPr>
+              <a:t> trace the algorithm with sample inputs, recording every variable in a trace table, to see what it does.</a:t>
+            </a:r>
+          </a:p>
+          <a:p>
+            <a:pPr>
+              <a:spcAft>
+                <a:spcPts val="1260"/>
+              </a:spcAft>
+            </a:pPr>
+            <a:r>
+              <a:rPr sz="2100" b="1">
+                <a:solidFill>
+                  <a:srgbClr val="202122"/>
+                </a:solidFill>
+                <a:latin typeface="Calibri"/>
+              </a:rPr>
+              <a:t>Find and correct errors:</a:t>
+            </a:r>
+            <a:r>
+              <a:rPr sz="2100" b="0">
+                <a:solidFill>
+                  <a:srgbClr val="202122"/>
+                </a:solidFill>
+                <a:latin typeface="Calibri"/>
+              </a:rPr>
+              <a:t> look for logic errors such as a wrong comparison, a loop that stops one step early, or a variable that's never updated.</a:t>
+            </a:r>
+          </a:p>
+          <a:p>
+            <a:pPr>
+              <a:spcAft>
+                <a:spcPts val="1260"/>
+              </a:spcAft>
+            </a:pPr>
+            <a:r>
+              <a:rPr sz="2100" b="1">
+                <a:solidFill>
+                  <a:srgbClr val="202122"/>
+                </a:solidFill>
+                <a:latin typeface="Calibri"/>
+              </a:rPr>
+              <a:t>Translate:</a:t>
+            </a:r>
+            <a:r>
+              <a:rPr sz="2100" b="0">
+                <a:solidFill>
+                  <a:srgbClr val="202122"/>
+                </a:solidFill>
+                <a:latin typeface="Calibri"/>
+              </a:rPr>
+              <a:t> turn a flowchart into code, or code into a written description.</a:t>
+            </a:r>
+          </a:p>
+          <a:p>
+            <a:pPr>
+              <a:spcAft>
+                <a:spcPts val="1260"/>
+              </a:spcAft>
+            </a:pPr>
+            <a:r>
+              <a:rPr sz="2100" b="1">
+                <a:solidFill>
+                  <a:srgbClr val="202122"/>
+                </a:solidFill>
+                <a:latin typeface="Calibri"/>
+              </a:rPr>
+              <a:t>Design:</a:t>
+            </a:r>
+            <a:r>
+              <a:rPr sz="2100" b="0">
+                <a:solidFill>
+                  <a:srgbClr val="202122"/>
+                </a:solidFill>
+                <a:latin typeface="Calibri"/>
+              </a:rPr>
+              <a:t> build your own algorithm from sequence, selection and iteration, starting from the inputs and outputs.</a:t>
+            </a:r>
+          </a:p>
+        </p:txBody>
+      </p:sp>
+      <p:sp>
+        <p:nvSpPr>
+          <p:cNvPr id="7" name="Rounded Rectangle 6"/>
+          <p:cNvSpPr/>
+          <p:nvPr/>
+        </p:nvSpPr>
+        <p:spPr>
+          <a:xfrm>
+            <a:off x="7772400" y="1554480"/>
+            <a:ext cx="3867912" cy="4526280"/>
+          </a:xfrm>
+          <a:prstGeom prst="roundRect">
+            <a:avLst>
+              <a:gd name="adj" fmla="val 8000"/>
+            </a:avLst>
+          </a:prstGeom>
+          <a:solidFill>
+            <a:srgbClr val="03306E"/>
+          </a:solidFill>
+          <a:ln>
+            <a:noFill/>
+          </a:ln>
+          <a:effectLst/>
+        </p:spPr>
+        <p:style>
+          <a:lnRef idx="1">
+            <a:schemeClr val="accent1"/>
+          </a:lnRef>
+          <a:fillRef idx="3">
+            <a:schemeClr val="accent1"/>
+          </a:fillRef>
+          <a:effectRef idx="2">
+            <a:schemeClr val="accent1"/>
+          </a:effectRef>
+          <a:fontRef idx="minor">
+            <a:schemeClr val="lt1"/>
+          </a:fontRef>
+        </p:style>
+        <p:txBody>
+          <a:bodyPr rtlCol="0" anchor="ctr"/>
+          <a:lstStyle/>
+          <a:p/>
+        </p:txBody>
+      </p:sp>
+      <p:sp>
+        <p:nvSpPr>
+          <p:cNvPr id="8" name="Oval 7"/>
+          <p:cNvSpPr/>
+          <p:nvPr/>
+        </p:nvSpPr>
+        <p:spPr>
+          <a:xfrm>
+            <a:off x="8046720" y="1828800"/>
+            <a:ext cx="548640" cy="548640"/>
+          </a:xfrm>
+          <a:prstGeom prst="ellipse">
+            <a:avLst/>
+          </a:prstGeom>
+          <a:solidFill>
+            <a:srgbClr val="F2B705"/>
+          </a:solidFill>
+          <a:ln>
+            <a:noFill/>
+          </a:ln>
+          <a:effectLst/>
+        </p:spPr>
+        <p:style>
+          <a:lnRef idx="1">
+            <a:schemeClr val="accent1"/>
+          </a:lnRef>
+          <a:fillRef idx="3">
+            <a:schemeClr val="accent1"/>
+          </a:fillRef>
+          <a:effectRef idx="2">
+            <a:schemeClr val="accent1"/>
+          </a:effectRef>
+          <a:fontRef idx="minor">
+            <a:schemeClr val="lt1"/>
+          </a:fontRef>
+        </p:style>
+        <p:txBody>
+          <a:bodyPr rtlCol="0" anchor="ctr" lIns="0" rIns="0" tIns="0" bIns="0"/>
+          <a:lstStyle/>
+          <a:p>
+            <a:pPr algn="ctr"/>
+            <a:r>
+              <a:rPr sz="1300" b="1">
+                <a:solidFill>
+                  <a:srgbClr val="202122"/>
+                </a:solidFill>
+                <a:latin typeface="Calibri"/>
+              </a:rPr>
+              <a:t>e.g.</a:t>
+            </a:r>
+          </a:p>
+        </p:txBody>
+      </p:sp>
+      <p:sp>
+        <p:nvSpPr>
+          <p:cNvPr id="9" name="TextBox 8"/>
+          <p:cNvSpPr txBox="1"/>
+          <p:nvPr/>
+        </p:nvSpPr>
+        <p:spPr>
+          <a:xfrm>
+            <a:off x="8046720" y="2560320"/>
+            <a:ext cx="3291840" cy="365760"/>
+          </a:xfrm>
+          <a:prstGeom prst="rect">
+            <a:avLst/>
+          </a:prstGeom>
+          <a:noFill/>
+        </p:spPr>
+        <p:txBody>
+          <a:bodyPr wrap="square" anchor="t" lIns="0" rIns="0" tIns="0" bIns="0"/>
+          <a:lstStyle/>
+          <a:p>
+            <a:pPr algn="l"/>
+            <a:r>
+              <a:rPr sz="1300" b="1" i="0">
+                <a:solidFill>
+                  <a:srgbClr val="A9C8F0"/>
+                </a:solidFill>
+                <a:latin typeface="Calibri"/>
+              </a:rPr>
+              <a:t>EXAMPLE</a:t>
+            </a:r>
+          </a:p>
+        </p:txBody>
+      </p:sp>
+      <p:sp>
+        <p:nvSpPr>
+          <p:cNvPr id="10" name="TextBox 9"/>
+          <p:cNvSpPr txBox="1"/>
+          <p:nvPr/>
+        </p:nvSpPr>
+        <p:spPr>
+          <a:xfrm>
+            <a:off x="8046720" y="2971800"/>
+            <a:ext cx="3291840" cy="2971800"/>
+          </a:xfrm>
+          <a:prstGeom prst="rect">
+            <a:avLst/>
+          </a:prstGeom>
+          <a:noFill/>
+        </p:spPr>
+        <p:txBody>
+          <a:bodyPr wrap="square" anchor="t" lIns="0" rIns="0" tIns="0" bIns="0"/>
+          <a:lstStyle/>
+          <a:p>
+            <a:pPr algn="l"/>
+            <a:r>
+              <a:rPr sz="1900" b="0" i="0">
+                <a:solidFill>
+                  <a:srgbClr val="FFFFFF"/>
+                </a:solidFill>
+                <a:latin typeface="Cambria"/>
+              </a:rPr>
+              <a:t>total = 0; for i in range(1, 5): total = total + i gives 10, not 15, because range(1, 5) stops at 4. The fix is range(1, 6).</a:t>
+            </a:r>
+          </a:p>
+        </p:txBody>
+      </p:sp>
+    </p:spTree>
+  </p:cSld>
+  <p:clrMapOvr>
+    <a:masterClrMapping/>
+  </p:clrMapOvr>
+</p:sld>
+</file>
+
+<file path=ppt/slides/slide14.xml><?xml version="1.0" encoding="utf-8"?>
+<p:sld xmlns:a="http://schemas.openxmlformats.org/drawingml/2006/main" xmlns:p="http://schemas.openxmlformats.org/presentationml/2006/main" xmlns:r="http://schemas.openxmlformats.org/officeDocument/2006/relationships">
+  <p:cSld>
+    <p:bg>
+      <p:bgPr>
+        <a:solidFill>
+          <a:srgbClr val="FFFFFF"/>
+        </a:solidFill>
+        <a:effectLst/>
+      </p:bgPr>
+    </p:bg>
+    <p:spTree>
+      <p:nvGrpSpPr>
+        <p:cNvPr id="1" name=""/>
+        <p:cNvGrpSpPr/>
+        <p:nvPr/>
+      </p:nvGrpSpPr>
+      <p:grpSpPr/>
+      <p:sp>
+        <p:nvSpPr>
+          <p:cNvPr id="2" name="TextBox 1"/>
+          <p:cNvSpPr txBox="1"/>
+          <p:nvPr/>
+        </p:nvSpPr>
+        <p:spPr>
+          <a:xfrm>
+            <a:off x="548640" y="320040"/>
+            <a:ext cx="11094415" cy="274320"/>
+          </a:xfrm>
+          <a:prstGeom prst="rect">
+            <a:avLst/>
+          </a:prstGeom>
+          <a:noFill/>
+        </p:spPr>
+        <p:txBody>
+          <a:bodyPr wrap="square" anchor="t" lIns="0" rIns="0" tIns="0" bIns="0"/>
+          <a:lstStyle/>
+          <a:p>
+            <a:pPr algn="l"/>
+            <a:r>
+              <a:rPr sz="1100" b="1" i="0">
+                <a:solidFill>
+                  <a:srgbClr val="54595D"/>
+                </a:solidFill>
+                <a:latin typeface="Calibri"/>
+              </a:rPr>
+              <a:t>CORE COMPONENT  ·  Core Paper 1</a:t>
+            </a:r>
+          </a:p>
+        </p:txBody>
+      </p:sp>
+      <p:sp>
+        <p:nvSpPr>
+          <p:cNvPr id="3" name="TextBox 2"/>
+          <p:cNvSpPr txBox="1"/>
+          <p:nvPr/>
+        </p:nvSpPr>
+        <p:spPr>
+          <a:xfrm>
+            <a:off x="548640" y="566928"/>
+            <a:ext cx="11094415" cy="822960"/>
+          </a:xfrm>
+          <a:prstGeom prst="rect">
+            <a:avLst/>
+          </a:prstGeom>
+          <a:noFill/>
+        </p:spPr>
+        <p:txBody>
+          <a:bodyPr wrap="square" anchor="ctr" lIns="0" rIns="0" tIns="0" bIns="0"/>
+          <a:lstStyle/>
+          <a:p>
+            <a:pPr algn="l"/>
+            <a:r>
+              <a:rPr sz="3200" b="1" i="0">
+                <a:solidFill>
+                  <a:srgbClr val="03306E"/>
+                </a:solidFill>
+                <a:latin typeface="Cambria"/>
+              </a:rPr>
+              <a:t>Working with algorithms</a:t>
+            </a:r>
+          </a:p>
+        </p:txBody>
+      </p:sp>
+      <p:sp>
+        <p:nvSpPr>
+          <p:cNvPr id="4" name="TextBox 3"/>
+          <p:cNvSpPr txBox="1"/>
+          <p:nvPr/>
+        </p:nvSpPr>
+        <p:spPr>
+          <a:xfrm>
+            <a:off x="548640" y="6446520"/>
+            <a:ext cx="8229600" cy="274320"/>
+          </a:xfrm>
+          <a:prstGeom prst="rect">
+            <a:avLst/>
+          </a:prstGeom>
+          <a:noFill/>
+        </p:spPr>
+        <p:txBody>
+          <a:bodyPr wrap="square" anchor="t" lIns="0" rIns="0" tIns="0" bIns="0"/>
+          <a:lstStyle/>
+          <a:p>
+            <a:pPr algn="l"/>
+            <a:r>
+              <a:rPr sz="1000" b="0" i="0">
+                <a:solidFill>
+                  <a:srgbClr val="54595D"/>
+                </a:solidFill>
+                <a:latin typeface="Calibri"/>
+              </a:rPr>
+              <a:t>Digital Software Development T Level  ·  Computational Thinking and Algorithms</a:t>
+            </a:r>
+          </a:p>
+        </p:txBody>
+      </p:sp>
+      <p:sp>
+        <p:nvSpPr>
+          <p:cNvPr id="5" name="TextBox 4"/>
+          <p:cNvSpPr txBox="1"/>
+          <p:nvPr/>
+        </p:nvSpPr>
+        <p:spPr>
+          <a:xfrm>
+            <a:off x="10728655" y="6446520"/>
+            <a:ext cx="914400" cy="274320"/>
+          </a:xfrm>
+          <a:prstGeom prst="rect">
+            <a:avLst/>
+          </a:prstGeom>
+          <a:noFill/>
+        </p:spPr>
+        <p:txBody>
+          <a:bodyPr wrap="square" anchor="t" lIns="0" rIns="0" tIns="0" bIns="0"/>
+          <a:lstStyle/>
+          <a:p>
+            <a:pPr algn="r"/>
+            <a:r>
+              <a:rPr sz="1000" b="0" i="0">
+                <a:solidFill>
+                  <a:srgbClr val="54595D"/>
+                </a:solidFill>
+                <a:latin typeface="Calibri"/>
+              </a:rPr>
+              <a:t>14</a:t>
+            </a:r>
+          </a:p>
+        </p:txBody>
+      </p:sp>
+      <p:sp>
+        <p:nvSpPr>
+          <p:cNvPr id="6" name="TextBox 5"/>
+          <p:cNvSpPr txBox="1"/>
+          <p:nvPr/>
+        </p:nvSpPr>
+        <p:spPr>
+          <a:xfrm>
+            <a:off x="548640" y="1600200"/>
+            <a:ext cx="6675120" cy="4572000"/>
+          </a:xfrm>
+          <a:prstGeom prst="rect">
+            <a:avLst/>
+          </a:prstGeom>
+          <a:noFill/>
+        </p:spPr>
+        <p:txBody>
+          <a:bodyPr wrap="square" lIns="0" rIns="0" tIns="0" bIns="0">
+            <a:spAutoFit/>
+          </a:bodyPr>
+          <a:lstStyle/>
+          <a:p>
+            <a:pPr marL="274320" indent="-274320">
+              <a:spcAft>
+                <a:spcPts val="990"/>
+              </a:spcAft>
+              <a:buClr>
+                <a:srgbClr val="0645AD"/>
+              </a:buClr>
+              <a:buFont typeface="Arial"/>
+              <a:buChar char="•"/>
+            </a:pPr>
+            <a:r>
+              <a:rPr sz="2200" b="1">
+                <a:solidFill>
+                  <a:srgbClr val="202122"/>
+                </a:solidFill>
+                <a:latin typeface="Calibri"/>
+              </a:rPr>
+              <a:t>Purpose:</a:t>
+            </a:r>
+            <a:r>
+              <a:rPr sz="2200" b="0">
+                <a:solidFill>
+                  <a:srgbClr val="202122"/>
+                </a:solidFill>
+                <a:latin typeface="Calibri"/>
+              </a:rPr>
+              <a:t> work out what an algorithm is for by tracing it with sample inputs.</a:t>
+            </a:r>
+          </a:p>
+          <a:p>
+            <a:pPr marL="274320" indent="-274320">
+              <a:spcAft>
+                <a:spcPts val="990"/>
+              </a:spcAft>
+              <a:buClr>
+                <a:srgbClr val="0645AD"/>
+              </a:buClr>
+              <a:buFont typeface="Arial"/>
+              <a:buChar char="•"/>
+            </a:pPr>
+            <a:r>
+              <a:rPr sz="2200" b="1">
+                <a:solidFill>
+                  <a:srgbClr val="202122"/>
+                </a:solidFill>
+                <a:latin typeface="Calibri"/>
+              </a:rPr>
+              <a:t>Output:</a:t>
+            </a:r>
+            <a:r>
+              <a:rPr sz="2200" b="0">
+                <a:solidFill>
+                  <a:srgbClr val="202122"/>
+                </a:solidFill>
+                <a:latin typeface="Calibri"/>
+              </a:rPr>
+              <a:t> predict exactly what it will output for a given input.</a:t>
+            </a:r>
+          </a:p>
+          <a:p>
+            <a:pPr marL="274320" indent="-274320">
+              <a:spcAft>
+                <a:spcPts val="990"/>
+              </a:spcAft>
+              <a:buClr>
+                <a:srgbClr val="0645AD"/>
+              </a:buClr>
+              <a:buFont typeface="Arial"/>
+              <a:buChar char="•"/>
+            </a:pPr>
+            <a:r>
+              <a:rPr sz="2200" b="1">
+                <a:solidFill>
+                  <a:srgbClr val="202122"/>
+                </a:solidFill>
+                <a:latin typeface="Calibri"/>
+              </a:rPr>
+              <a:t>Errors:</a:t>
+            </a:r>
+            <a:r>
+              <a:rPr sz="2200" b="0">
+                <a:solidFill>
+                  <a:srgbClr val="202122"/>
+                </a:solidFill>
+                <a:latin typeface="Calibri"/>
+              </a:rPr>
+              <a:t> find and correct logic errors, e.g. a wrong comparison or a loop that never ends.</a:t>
+            </a:r>
+          </a:p>
+          <a:p>
+            <a:pPr marL="274320" indent="-274320">
+              <a:spcAft>
+                <a:spcPts val="990"/>
+              </a:spcAft>
+              <a:buClr>
+                <a:srgbClr val="0645AD"/>
+              </a:buClr>
+              <a:buFont typeface="Arial"/>
+              <a:buChar char="•"/>
+            </a:pPr>
+            <a:r>
+              <a:rPr sz="2200" b="1">
+                <a:solidFill>
+                  <a:srgbClr val="202122"/>
+                </a:solidFill>
+                <a:latin typeface="Calibri"/>
+              </a:rPr>
+              <a:t>Translate:</a:t>
+            </a:r>
+            <a:r>
+              <a:rPr sz="2200" b="0">
+                <a:solidFill>
+                  <a:srgbClr val="202122"/>
+                </a:solidFill>
+                <a:latin typeface="Calibri"/>
+              </a:rPr>
+              <a:t> turn a flowchart into code, or code into a written description.</a:t>
+            </a:r>
+          </a:p>
+          <a:p>
+            <a:pPr marL="274320" indent="-274320">
+              <a:spcAft>
+                <a:spcPts val="990"/>
+              </a:spcAft>
+              <a:buClr>
+                <a:srgbClr val="0645AD"/>
+              </a:buClr>
+              <a:buFont typeface="Arial"/>
+              <a:buChar char="•"/>
+            </a:pPr>
+            <a:r>
+              <a:rPr sz="2200" b="1">
+                <a:solidFill>
+                  <a:srgbClr val="202122"/>
+                </a:solidFill>
+                <a:latin typeface="Calibri"/>
+              </a:rPr>
+              <a:t>Design:</a:t>
+            </a:r>
+            <a:r>
+              <a:rPr sz="2200" b="0">
+                <a:solidFill>
+                  <a:srgbClr val="202122"/>
+                </a:solidFill>
+                <a:latin typeface="Calibri"/>
+              </a:rPr>
+              <a:t> build your own algorithm using sequence, selection and iteration.</a:t>
+            </a:r>
+          </a:p>
+        </p:txBody>
+      </p:sp>
+      <p:sp>
+        <p:nvSpPr>
+          <p:cNvPr id="7" name="Rounded Rectangle 6"/>
+          <p:cNvSpPr/>
+          <p:nvPr/>
+        </p:nvSpPr>
+        <p:spPr>
+          <a:xfrm>
+            <a:off x="7772400" y="1600200"/>
+            <a:ext cx="3867912" cy="4434840"/>
+          </a:xfrm>
+          <a:prstGeom prst="roundRect">
+            <a:avLst>
+              <a:gd name="adj" fmla="val 8000"/>
+            </a:avLst>
+          </a:prstGeom>
+          <a:solidFill>
+            <a:srgbClr val="03306E"/>
+          </a:solidFill>
+          <a:ln>
+            <a:noFill/>
+          </a:ln>
+          <a:effectLst/>
+        </p:spPr>
+        <p:style>
+          <a:lnRef idx="1">
+            <a:schemeClr val="accent1"/>
+          </a:lnRef>
+          <a:fillRef idx="3">
+            <a:schemeClr val="accent1"/>
+          </a:fillRef>
+          <a:effectRef idx="2">
+            <a:schemeClr val="accent1"/>
+          </a:effectRef>
+          <a:fontRef idx="minor">
+            <a:schemeClr val="lt1"/>
+          </a:fontRef>
+        </p:style>
+        <p:txBody>
+          <a:bodyPr rtlCol="0" anchor="ctr"/>
+          <a:lstStyle/>
+          <a:p/>
+        </p:txBody>
+      </p:sp>
+      <p:sp>
+        <p:nvSpPr>
+          <p:cNvPr id="8" name="Oval 7"/>
+          <p:cNvSpPr/>
+          <p:nvPr/>
+        </p:nvSpPr>
+        <p:spPr>
+          <a:xfrm>
+            <a:off x="8046720" y="1874519"/>
+            <a:ext cx="548640" cy="548640"/>
+          </a:xfrm>
+          <a:prstGeom prst="ellipse">
+            <a:avLst/>
+          </a:prstGeom>
+          <a:solidFill>
+            <a:srgbClr val="F2B705"/>
+          </a:solidFill>
+          <a:ln>
+            <a:noFill/>
+          </a:ln>
+          <a:effectLst/>
+        </p:spPr>
+        <p:style>
+          <a:lnRef idx="1">
+            <a:schemeClr val="accent1"/>
+          </a:lnRef>
+          <a:fillRef idx="3">
+            <a:schemeClr val="accent1"/>
+          </a:fillRef>
+          <a:effectRef idx="2">
+            <a:schemeClr val="accent1"/>
+          </a:effectRef>
+          <a:fontRef idx="minor">
+            <a:schemeClr val="lt1"/>
+          </a:fontRef>
+        </p:style>
+        <p:txBody>
+          <a:bodyPr rtlCol="0" anchor="ctr" lIns="0" rIns="0" tIns="0" bIns="0"/>
+          <a:lstStyle/>
+          <a:p>
+            <a:pPr algn="ctr"/>
+            <a:r>
+              <a:rPr sz="2000" b="1">
+                <a:solidFill>
+                  <a:srgbClr val="202122"/>
+                </a:solidFill>
+                <a:latin typeface="Calibri"/>
+              </a:rPr>
+              <a:t>!</a:t>
+            </a:r>
+          </a:p>
+        </p:txBody>
+      </p:sp>
+      <p:sp>
+        <p:nvSpPr>
+          <p:cNvPr id="9" name="TextBox 8"/>
+          <p:cNvSpPr txBox="1"/>
+          <p:nvPr/>
+        </p:nvSpPr>
+        <p:spPr>
+          <a:xfrm>
+            <a:off x="8046720" y="2606040"/>
+            <a:ext cx="3291840" cy="365760"/>
+          </a:xfrm>
+          <a:prstGeom prst="rect">
+            <a:avLst/>
+          </a:prstGeom>
+          <a:noFill/>
+        </p:spPr>
+        <p:txBody>
+          <a:bodyPr wrap="square" anchor="t" lIns="0" rIns="0" tIns="0" bIns="0"/>
+          <a:lstStyle/>
+          <a:p>
+            <a:pPr algn="l"/>
+            <a:r>
+              <a:rPr sz="1300" b="1" i="0">
+                <a:solidFill>
+                  <a:srgbClr val="A9C8F0"/>
+                </a:solidFill>
+                <a:latin typeface="Calibri"/>
+              </a:rPr>
+              <a:t>KEY IDEA</a:t>
+            </a:r>
+          </a:p>
+        </p:txBody>
+      </p:sp>
+      <p:sp>
+        <p:nvSpPr>
+          <p:cNvPr id="10" name="TextBox 9"/>
+          <p:cNvSpPr txBox="1"/>
+          <p:nvPr/>
+        </p:nvSpPr>
+        <p:spPr>
+          <a:xfrm>
+            <a:off x="8046720" y="3017520"/>
+            <a:ext cx="3291840" cy="2926080"/>
+          </a:xfrm>
+          <a:prstGeom prst="rect">
+            <a:avLst/>
+          </a:prstGeom>
+          <a:noFill/>
+        </p:spPr>
+        <p:txBody>
+          <a:bodyPr wrap="square" anchor="t" lIns="0" rIns="0" tIns="0" bIns="0"/>
+          <a:lstStyle/>
+          <a:p>
+            <a:pPr algn="l"/>
+            <a:r>
+              <a:rPr sz="2200" b="0" i="0">
+                <a:solidFill>
+                  <a:srgbClr val="FFFFFF"/>
+                </a:solidFill>
+                <a:latin typeface="Cambria"/>
+              </a:rPr>
+              <a:t>Use a trace table: one column per variable, one row per step. It shows exactly where an algorithm goes wrong.</a:t>
+            </a:r>
+          </a:p>
+        </p:txBody>
+      </p:sp>
+    </p:spTree>
+  </p:cSld>
+  <p:clrMapOvr>
+    <a:masterClrMapping/>
+  </p:clrMapOvr>
+</p:sld>
+</file>
+
+<file path=ppt/slides/slide15.xml><?xml version="1.0" encoding="utf-8"?>
+<p:sld xmlns:a="http://schemas.openxmlformats.org/drawingml/2006/main" xmlns:p="http://schemas.openxmlformats.org/presentationml/2006/main" xmlns:r="http://schemas.openxmlformats.org/officeDocument/2006/relationships">
+  <p:cSld>
+    <p:bg>
+      <p:bgPr>
+        <a:solidFill>
+          <a:srgbClr val="FFFFFF"/>
+        </a:solidFill>
+        <a:effectLst/>
+      </p:bgPr>
+    </p:bg>
+    <p:spTree>
+      <p:nvGrpSpPr>
+        <p:cNvPr id="1" name=""/>
+        <p:cNvGrpSpPr/>
+        <p:nvPr/>
+      </p:nvGrpSpPr>
+      <p:grpSpPr/>
+      <p:sp>
+        <p:nvSpPr>
+          <p:cNvPr id="2" name="TextBox 1"/>
+          <p:cNvSpPr txBox="1"/>
+          <p:nvPr/>
+        </p:nvSpPr>
+        <p:spPr>
+          <a:xfrm>
+            <a:off x="548640" y="320040"/>
+            <a:ext cx="11094415" cy="274320"/>
+          </a:xfrm>
+          <a:prstGeom prst="rect">
+            <a:avLst/>
+          </a:prstGeom>
+          <a:noFill/>
+        </p:spPr>
+        <p:txBody>
+          <a:bodyPr wrap="square" anchor="t" lIns="0" rIns="0" tIns="0" bIns="0"/>
+          <a:lstStyle/>
+          <a:p>
+            <a:pPr algn="l"/>
+            <a:r>
+              <a:rPr sz="1100" b="1" i="0">
+                <a:solidFill>
+                  <a:srgbClr val="54595D"/>
+                </a:solidFill>
+                <a:latin typeface="Calibri"/>
+              </a:rPr>
+              <a:t>CORE COMPONENT  ·  Core Paper 1</a:t>
+            </a:r>
+          </a:p>
+        </p:txBody>
+      </p:sp>
+      <p:sp>
+        <p:nvSpPr>
+          <p:cNvPr id="3" name="TextBox 2"/>
+          <p:cNvSpPr txBox="1"/>
+          <p:nvPr/>
+        </p:nvSpPr>
+        <p:spPr>
+          <a:xfrm>
+            <a:off x="548640" y="566928"/>
+            <a:ext cx="11094415" cy="822960"/>
+          </a:xfrm>
+          <a:prstGeom prst="rect">
+            <a:avLst/>
+          </a:prstGeom>
+          <a:noFill/>
+        </p:spPr>
+        <p:txBody>
+          <a:bodyPr wrap="square" anchor="ctr" lIns="0" rIns="0" tIns="0" bIns="0"/>
+          <a:lstStyle/>
+          <a:p>
+            <a:pPr algn="l"/>
+            <a:r>
+              <a:rPr sz="3200" b="1" i="0">
+                <a:solidFill>
+                  <a:srgbClr val="03306E"/>
+                </a:solidFill>
+                <a:latin typeface="Cambria"/>
+              </a:rPr>
+              <a:t>Quick check: Working with algorithms</a:t>
+            </a:r>
+          </a:p>
+        </p:txBody>
+      </p:sp>
+      <p:sp>
+        <p:nvSpPr>
+          <p:cNvPr id="4" name="TextBox 3"/>
+          <p:cNvSpPr txBox="1"/>
+          <p:nvPr/>
+        </p:nvSpPr>
+        <p:spPr>
+          <a:xfrm>
+            <a:off x="548640" y="6446520"/>
+            <a:ext cx="8229600" cy="274320"/>
+          </a:xfrm>
+          <a:prstGeom prst="rect">
+            <a:avLst/>
+          </a:prstGeom>
+          <a:noFill/>
+        </p:spPr>
+        <p:txBody>
+          <a:bodyPr wrap="square" anchor="t" lIns="0" rIns="0" tIns="0" bIns="0"/>
+          <a:lstStyle/>
+          <a:p>
+            <a:pPr algn="l"/>
+            <a:r>
+              <a:rPr sz="1000" b="0" i="0">
+                <a:solidFill>
+                  <a:srgbClr val="54595D"/>
+                </a:solidFill>
+                <a:latin typeface="Calibri"/>
+              </a:rPr>
+              <a:t>Digital Software Development T Level  ·  Computational Thinking and Algorithms</a:t>
+            </a:r>
+          </a:p>
+        </p:txBody>
+      </p:sp>
+      <p:sp>
+        <p:nvSpPr>
+          <p:cNvPr id="5" name="TextBox 4"/>
+          <p:cNvSpPr txBox="1"/>
+          <p:nvPr/>
+        </p:nvSpPr>
+        <p:spPr>
+          <a:xfrm>
+            <a:off x="10728655" y="6446520"/>
+            <a:ext cx="914400" cy="274320"/>
+          </a:xfrm>
+          <a:prstGeom prst="rect">
+            <a:avLst/>
+          </a:prstGeom>
+          <a:noFill/>
+        </p:spPr>
+        <p:txBody>
+          <a:bodyPr wrap="square" anchor="t" lIns="0" rIns="0" tIns="0" bIns="0"/>
+          <a:lstStyle/>
+          <a:p>
+            <a:pPr algn="r"/>
+            <a:r>
+              <a:rPr sz="1000" b="0" i="0">
+                <a:solidFill>
+                  <a:srgbClr val="54595D"/>
+                </a:solidFill>
+                <a:latin typeface="Calibri"/>
+              </a:rPr>
+              <a:t>15</a:t>
+            </a:r>
+          </a:p>
+        </p:txBody>
+      </p:sp>
+      <p:sp>
+        <p:nvSpPr>
+          <p:cNvPr id="6" name="Oval 5"/>
+          <p:cNvSpPr/>
+          <p:nvPr/>
+        </p:nvSpPr>
+        <p:spPr>
+          <a:xfrm>
+            <a:off x="548640" y="1691640"/>
+            <a:ext cx="502920" cy="502920"/>
+          </a:xfrm>
+          <a:prstGeom prst="ellipse">
+            <a:avLst/>
+          </a:prstGeom>
+          <a:solidFill>
+            <a:srgbClr val="F2B705"/>
+          </a:solidFill>
+          <a:ln>
+            <a:noFill/>
+          </a:ln>
+          <a:effectLst/>
+        </p:spPr>
+        <p:style>
+          <a:lnRef idx="1">
+            <a:schemeClr val="accent1"/>
+          </a:lnRef>
+          <a:fillRef idx="3">
+            <a:schemeClr val="accent1"/>
+          </a:fillRef>
+          <a:effectRef idx="2">
+            <a:schemeClr val="accent1"/>
+          </a:effectRef>
+          <a:fontRef idx="minor">
+            <a:schemeClr val="lt1"/>
+          </a:fontRef>
+        </p:style>
+        <p:txBody>
+          <a:bodyPr rtlCol="0" anchor="ctr" lIns="0" rIns="0" tIns="0" bIns="0"/>
+          <a:lstStyle/>
+          <a:p>
+            <a:pPr algn="ctr"/>
+            <a:r>
+              <a:rPr sz="1600" b="1">
+                <a:solidFill>
+                  <a:srgbClr val="202122"/>
+                </a:solidFill>
+                <a:latin typeface="Calibri"/>
+              </a:rPr>
+              <a:t>1</a:t>
+            </a:r>
+          </a:p>
+        </p:txBody>
+      </p:sp>
+      <p:sp>
+        <p:nvSpPr>
+          <p:cNvPr id="7" name="TextBox 6"/>
+          <p:cNvSpPr txBox="1"/>
+          <p:nvPr/>
+        </p:nvSpPr>
+        <p:spPr>
+          <a:xfrm>
+            <a:off x="1371600" y="1645920"/>
+            <a:ext cx="10271455" cy="1188720"/>
+          </a:xfrm>
+          <a:prstGeom prst="rect">
+            <a:avLst/>
+          </a:prstGeom>
+          <a:noFill/>
+        </p:spPr>
+        <p:txBody>
+          <a:bodyPr wrap="square" anchor="t" lIns="0" rIns="0" tIns="0" bIns="0"/>
+          <a:lstStyle/>
+          <a:p>
+            <a:pPr algn="l"/>
+            <a:r>
+              <a:rPr sz="2400" b="0" i="0">
+                <a:solidFill>
+                  <a:srgbClr val="202122"/>
+                </a:solidFill>
+                <a:latin typeface="Calibri"/>
+              </a:rPr>
+              <a:t>What is a trace table?</a:t>
+            </a:r>
+          </a:p>
+        </p:txBody>
+      </p:sp>
+      <p:sp>
+        <p:nvSpPr>
+          <p:cNvPr id="8" name="Oval 7"/>
+          <p:cNvSpPr/>
+          <p:nvPr/>
+        </p:nvSpPr>
+        <p:spPr>
+          <a:xfrm>
+            <a:off x="548640" y="3108960"/>
+            <a:ext cx="502920" cy="502920"/>
+          </a:xfrm>
+          <a:prstGeom prst="ellipse">
+            <a:avLst/>
+          </a:prstGeom>
+          <a:solidFill>
+            <a:srgbClr val="F2B705"/>
+          </a:solidFill>
+          <a:ln>
+            <a:noFill/>
+          </a:ln>
+          <a:effectLst/>
+        </p:spPr>
+        <p:style>
+          <a:lnRef idx="1">
+            <a:schemeClr val="accent1"/>
+          </a:lnRef>
+          <a:fillRef idx="3">
+            <a:schemeClr val="accent1"/>
+          </a:fillRef>
+          <a:effectRef idx="2">
+            <a:schemeClr val="accent1"/>
+          </a:effectRef>
+          <a:fontRef idx="minor">
+            <a:schemeClr val="lt1"/>
+          </a:fontRef>
+        </p:style>
+        <p:txBody>
+          <a:bodyPr rtlCol="0" anchor="ctr" lIns="0" rIns="0" tIns="0" bIns="0"/>
+          <a:lstStyle/>
+          <a:p>
+            <a:pPr algn="ctr"/>
+            <a:r>
+              <a:rPr sz="1600" b="1">
+                <a:solidFill>
+                  <a:srgbClr val="202122"/>
+                </a:solidFill>
+                <a:latin typeface="Calibri"/>
+              </a:rPr>
+              <a:t>2</a:t>
+            </a:r>
+          </a:p>
+        </p:txBody>
+      </p:sp>
+      <p:sp>
+        <p:nvSpPr>
+          <p:cNvPr id="9" name="TextBox 8"/>
+          <p:cNvSpPr txBox="1"/>
+          <p:nvPr/>
+        </p:nvSpPr>
+        <p:spPr>
+          <a:xfrm>
+            <a:off x="1371600" y="3063240"/>
+            <a:ext cx="10271455" cy="1188720"/>
+          </a:xfrm>
+          <a:prstGeom prst="rect">
+            <a:avLst/>
+          </a:prstGeom>
+          <a:noFill/>
+        </p:spPr>
+        <p:txBody>
+          <a:bodyPr wrap="square" anchor="t" lIns="0" rIns="0" tIns="0" bIns="0"/>
+          <a:lstStyle/>
+          <a:p>
+            <a:pPr algn="l"/>
+            <a:r>
+              <a:rPr sz="2400" b="0" i="0">
+                <a:solidFill>
+                  <a:srgbClr val="202122"/>
+                </a:solidFill>
+                <a:latin typeface="Calibri"/>
+              </a:rPr>
+              <a:t>What does range(1, 5) produce?</a:t>
+            </a:r>
+          </a:p>
+        </p:txBody>
+      </p:sp>
+      <p:sp>
+        <p:nvSpPr>
+          <p:cNvPr id="10" name="Oval 9"/>
+          <p:cNvSpPr/>
+          <p:nvPr/>
+        </p:nvSpPr>
+        <p:spPr>
+          <a:xfrm>
+            <a:off x="548640" y="4526280"/>
+            <a:ext cx="502920" cy="502920"/>
+          </a:xfrm>
+          <a:prstGeom prst="ellipse">
+            <a:avLst/>
+          </a:prstGeom>
+          <a:solidFill>
+            <a:srgbClr val="F2B705"/>
+          </a:solidFill>
+          <a:ln>
+            <a:noFill/>
+          </a:ln>
+          <a:effectLst/>
+        </p:spPr>
+        <p:style>
+          <a:lnRef idx="1">
+            <a:schemeClr val="accent1"/>
+          </a:lnRef>
+          <a:fillRef idx="3">
+            <a:schemeClr val="accent1"/>
+          </a:fillRef>
+          <a:effectRef idx="2">
+            <a:schemeClr val="accent1"/>
+          </a:effectRef>
+          <a:fontRef idx="minor">
+            <a:schemeClr val="lt1"/>
+          </a:fontRef>
+        </p:style>
+        <p:txBody>
+          <a:bodyPr rtlCol="0" anchor="ctr" lIns="0" rIns="0" tIns="0" bIns="0"/>
+          <a:lstStyle/>
+          <a:p>
+            <a:pPr algn="ctr"/>
+            <a:r>
+              <a:rPr sz="1600" b="1">
+                <a:solidFill>
+                  <a:srgbClr val="202122"/>
+                </a:solidFill>
+                <a:latin typeface="Calibri"/>
+              </a:rPr>
+              <a:t>3</a:t>
+            </a:r>
+          </a:p>
+        </p:txBody>
+      </p:sp>
+      <p:sp>
+        <p:nvSpPr>
+          <p:cNvPr id="11" name="TextBox 10"/>
+          <p:cNvSpPr txBox="1"/>
+          <p:nvPr/>
+        </p:nvSpPr>
+        <p:spPr>
+          <a:xfrm>
+            <a:off x="1371600" y="4480560"/>
+            <a:ext cx="10271455" cy="1188720"/>
+          </a:xfrm>
+          <a:prstGeom prst="rect">
+            <a:avLst/>
+          </a:prstGeom>
+          <a:noFill/>
+        </p:spPr>
+        <p:txBody>
+          <a:bodyPr wrap="square" anchor="t" lIns="0" rIns="0" tIns="0" bIns="0"/>
+          <a:lstStyle/>
+          <a:p>
+            <a:pPr algn="l"/>
+            <a:r>
+              <a:rPr sz="2400" b="0" i="0">
+                <a:solidFill>
+                  <a:srgbClr val="202122"/>
+                </a:solidFill>
+                <a:latin typeface="Calibri"/>
+              </a:rPr>
+              <a:t>Where should you start when designing an algorithm?</a:t>
+            </a:r>
+          </a:p>
+        </p:txBody>
+      </p:sp>
+      <p:sp>
+        <p:nvSpPr>
+          <p:cNvPr id="12" name="TextBox 11"/>
+          <p:cNvSpPr txBox="1"/>
+          <p:nvPr/>
+        </p:nvSpPr>
+        <p:spPr>
+          <a:xfrm>
+            <a:off x="548640" y="5852160"/>
+            <a:ext cx="11094415" cy="365760"/>
+          </a:xfrm>
+          <a:prstGeom prst="rect">
+            <a:avLst/>
+          </a:prstGeom>
+          <a:noFill/>
+        </p:spPr>
+        <p:txBody>
+          <a:bodyPr wrap="square" anchor="t" lIns="0" rIns="0" tIns="0" bIns="0"/>
+          <a:lstStyle/>
+          <a:p>
+            <a:pPr algn="l"/>
+            <a:r>
+              <a:rPr sz="1300" b="0" i="1">
+                <a:solidFill>
+                  <a:srgbClr val="54595D"/>
+                </a:solidFill>
+                <a:latin typeface="Calibri"/>
+              </a:rPr>
+              <a:t>Answer on mini whiteboards or in your book. Answers are in the speaker notes.</a:t>
+            </a:r>
+          </a:p>
+        </p:txBody>
+      </p:sp>
+    </p:spTree>
+  </p:cSld>
+  <p:clrMapOvr>
+    <a:masterClrMapping/>
+  </p:clrMapOvr>
+</p:sld>
+</file>
+
+<file path=ppt/slides/slide16.xml><?xml version="1.0" encoding="utf-8"?>
+<p:sld xmlns:a="http://schemas.openxmlformats.org/drawingml/2006/main" xmlns:p="http://schemas.openxmlformats.org/presentationml/2006/main" xmlns:r="http://schemas.openxmlformats.org/officeDocument/2006/relationships">
+  <p:cSld>
+    <p:bg>
+      <p:bgPr>
+        <a:solidFill>
+          <a:srgbClr val="FFFFFF"/>
+        </a:solidFill>
+        <a:effectLst/>
+      </p:bgPr>
+    </p:bg>
+    <p:spTree>
+      <p:nvGrpSpPr>
+        <p:cNvPr id="1" name=""/>
+        <p:cNvGrpSpPr/>
+        <p:nvPr/>
+      </p:nvGrpSpPr>
+      <p:grpSpPr/>
+      <p:sp>
+        <p:nvSpPr>
+          <p:cNvPr id="2" name="TextBox 1"/>
+          <p:cNvSpPr txBox="1"/>
+          <p:nvPr/>
+        </p:nvSpPr>
+        <p:spPr>
+          <a:xfrm>
+            <a:off x="548640" y="320040"/>
+            <a:ext cx="11094415" cy="274320"/>
+          </a:xfrm>
+          <a:prstGeom prst="rect">
+            <a:avLst/>
+          </a:prstGeom>
+          <a:noFill/>
+        </p:spPr>
+        <p:txBody>
+          <a:bodyPr wrap="square" anchor="t" lIns="0" rIns="0" tIns="0" bIns="0"/>
+          <a:lstStyle/>
+          <a:p>
+            <a:pPr algn="l"/>
+            <a:r>
+              <a:rPr sz="1100" b="1" i="0">
+                <a:solidFill>
+                  <a:srgbClr val="54595D"/>
+                </a:solidFill>
+                <a:latin typeface="Calibri"/>
+              </a:rPr>
+              <a:t>CORE COMPONENT  ·  Core Paper 1</a:t>
+            </a:r>
+          </a:p>
+        </p:txBody>
+      </p:sp>
+      <p:sp>
+        <p:nvSpPr>
+          <p:cNvPr id="3" name="TextBox 2"/>
+          <p:cNvSpPr txBox="1"/>
+          <p:nvPr/>
+        </p:nvSpPr>
+        <p:spPr>
+          <a:xfrm>
+            <a:off x="548640" y="566928"/>
+            <a:ext cx="11094415" cy="822960"/>
+          </a:xfrm>
+          <a:prstGeom prst="rect">
+            <a:avLst/>
+          </a:prstGeom>
+          <a:noFill/>
+        </p:spPr>
+        <p:txBody>
+          <a:bodyPr wrap="square" anchor="ctr" lIns="0" rIns="0" tIns="0" bIns="0"/>
+          <a:lstStyle/>
+          <a:p>
+            <a:pPr algn="l"/>
+            <a:r>
+              <a:rPr sz="3200" b="1" i="0">
+                <a:solidFill>
+                  <a:srgbClr val="03306E"/>
+                </a:solidFill>
+                <a:latin typeface="Cambria"/>
+              </a:rPr>
+              <a:t>Check your understanding</a:t>
+            </a:r>
+          </a:p>
+        </p:txBody>
+      </p:sp>
+      <p:sp>
+        <p:nvSpPr>
+          <p:cNvPr id="4" name="TextBox 3"/>
+          <p:cNvSpPr txBox="1"/>
+          <p:nvPr/>
+        </p:nvSpPr>
+        <p:spPr>
+          <a:xfrm>
+            <a:off x="548640" y="6446520"/>
+            <a:ext cx="8229600" cy="274320"/>
+          </a:xfrm>
+          <a:prstGeom prst="rect">
+            <a:avLst/>
+          </a:prstGeom>
+          <a:noFill/>
+        </p:spPr>
+        <p:txBody>
+          <a:bodyPr wrap="square" anchor="t" lIns="0" rIns="0" tIns="0" bIns="0"/>
+          <a:lstStyle/>
+          <a:p>
+            <a:pPr algn="l"/>
+            <a:r>
+              <a:rPr sz="1000" b="0" i="0">
+                <a:solidFill>
+                  <a:srgbClr val="54595D"/>
+                </a:solidFill>
+                <a:latin typeface="Calibri"/>
+              </a:rPr>
+              <a:t>Digital Software Development T Level  ·  Computational Thinking and Algorithms</a:t>
+            </a:r>
+          </a:p>
+        </p:txBody>
+      </p:sp>
+      <p:sp>
+        <p:nvSpPr>
+          <p:cNvPr id="5" name="TextBox 4"/>
+          <p:cNvSpPr txBox="1"/>
+          <p:nvPr/>
+        </p:nvSpPr>
+        <p:spPr>
+          <a:xfrm>
+            <a:off x="10728655" y="6446520"/>
+            <a:ext cx="914400" cy="274320"/>
+          </a:xfrm>
+          <a:prstGeom prst="rect">
+            <a:avLst/>
+          </a:prstGeom>
+          <a:noFill/>
+        </p:spPr>
+        <p:txBody>
+          <a:bodyPr wrap="square" anchor="t" lIns="0" rIns="0" tIns="0" bIns="0"/>
+          <a:lstStyle/>
+          <a:p>
+            <a:pPr algn="r"/>
+            <a:r>
+              <a:rPr sz="1000" b="0" i="0">
+                <a:solidFill>
+                  <a:srgbClr val="54595D"/>
+                </a:solidFill>
+                <a:latin typeface="Calibri"/>
+              </a:rPr>
+              <a:t>16</a:t>
+            </a:r>
+          </a:p>
+        </p:txBody>
+      </p:sp>
+      <p:sp>
+        <p:nvSpPr>
+          <p:cNvPr id="6" name="Oval 5"/>
+          <p:cNvSpPr/>
+          <p:nvPr/>
+        </p:nvSpPr>
+        <p:spPr>
+          <a:xfrm>
+            <a:off x="548640" y="1618488"/>
+            <a:ext cx="411480" cy="411480"/>
+          </a:xfrm>
+          <a:prstGeom prst="ellipse">
+            <a:avLst/>
+          </a:prstGeom>
+          <a:solidFill>
+            <a:srgbClr val="F2B705"/>
+          </a:solidFill>
+          <a:ln>
+            <a:noFill/>
+          </a:ln>
+          <a:effectLst/>
+        </p:spPr>
+        <p:style>
+          <a:lnRef idx="1">
+            <a:schemeClr val="accent1"/>
+          </a:lnRef>
+          <a:fillRef idx="3">
+            <a:schemeClr val="accent1"/>
+          </a:fillRef>
+          <a:effectRef idx="2">
+            <a:schemeClr val="accent1"/>
+          </a:effectRef>
+          <a:fontRef idx="minor">
+            <a:schemeClr val="lt1"/>
+          </a:fontRef>
+        </p:style>
+        <p:txBody>
+          <a:bodyPr rtlCol="0" anchor="ctr" lIns="0" rIns="0" tIns="0" bIns="0"/>
+          <a:lstStyle/>
+          <a:p>
+            <a:pPr algn="ctr"/>
+            <a:r>
+              <a:rPr sz="1400" b="1">
+                <a:solidFill>
+                  <a:srgbClr val="202122"/>
+                </a:solidFill>
+                <a:latin typeface="Calibri"/>
+              </a:rPr>
+              <a:t>1</a:t>
+            </a:r>
+          </a:p>
+        </p:txBody>
+      </p:sp>
+      <p:sp>
+        <p:nvSpPr>
+          <p:cNvPr id="7" name="TextBox 6"/>
+          <p:cNvSpPr txBox="1"/>
+          <p:nvPr/>
+        </p:nvSpPr>
+        <p:spPr>
+          <a:xfrm>
+            <a:off x="1234440" y="1600200"/>
+            <a:ext cx="10408615" cy="791870"/>
+          </a:xfrm>
+          <a:prstGeom prst="rect">
+            <a:avLst/>
+          </a:prstGeom>
+          <a:noFill/>
+        </p:spPr>
+        <p:txBody>
+          <a:bodyPr wrap="square" anchor="t" lIns="0" rIns="0" tIns="0" bIns="0"/>
+          <a:lstStyle/>
+          <a:p>
+            <a:pPr algn="l"/>
+            <a:r>
+              <a:rPr sz="2200" b="0" i="0">
+                <a:solidFill>
+                  <a:srgbClr val="202122"/>
+                </a:solidFill>
+                <a:latin typeface="Calibri"/>
+              </a:rPr>
+              <a:t>Name the four components of computational thinking.</a:t>
+            </a:r>
+          </a:p>
+        </p:txBody>
+      </p:sp>
+      <p:sp>
+        <p:nvSpPr>
+          <p:cNvPr id="8" name="Oval 7"/>
+          <p:cNvSpPr/>
+          <p:nvPr/>
+        </p:nvSpPr>
+        <p:spPr>
+          <a:xfrm>
+            <a:off x="548640" y="2574950"/>
+            <a:ext cx="411480" cy="411480"/>
+          </a:xfrm>
+          <a:prstGeom prst="ellipse">
+            <a:avLst/>
+          </a:prstGeom>
+          <a:solidFill>
+            <a:srgbClr val="F2B705"/>
+          </a:solidFill>
+          <a:ln>
+            <a:noFill/>
+          </a:ln>
+          <a:effectLst/>
+        </p:spPr>
+        <p:style>
+          <a:lnRef idx="1">
+            <a:schemeClr val="accent1"/>
+          </a:lnRef>
+          <a:fillRef idx="3">
+            <a:schemeClr val="accent1"/>
+          </a:fillRef>
+          <a:effectRef idx="2">
+            <a:schemeClr val="accent1"/>
+          </a:effectRef>
+          <a:fontRef idx="minor">
+            <a:schemeClr val="lt1"/>
+          </a:fontRef>
+        </p:style>
+        <p:txBody>
+          <a:bodyPr rtlCol="0" anchor="ctr" lIns="0" rIns="0" tIns="0" bIns="0"/>
+          <a:lstStyle/>
+          <a:p>
+            <a:pPr algn="ctr"/>
+            <a:r>
+              <a:rPr sz="1400" b="1">
+                <a:solidFill>
+                  <a:srgbClr val="202122"/>
+                </a:solidFill>
+                <a:latin typeface="Calibri"/>
+              </a:rPr>
+              <a:t>2</a:t>
+            </a:r>
+          </a:p>
+        </p:txBody>
+      </p:sp>
+      <p:sp>
+        <p:nvSpPr>
+          <p:cNvPr id="9" name="TextBox 8"/>
+          <p:cNvSpPr txBox="1"/>
+          <p:nvPr/>
+        </p:nvSpPr>
+        <p:spPr>
+          <a:xfrm>
+            <a:off x="1234440" y="2556662"/>
+            <a:ext cx="10408615" cy="791870"/>
+          </a:xfrm>
+          <a:prstGeom prst="rect">
+            <a:avLst/>
+          </a:prstGeom>
+          <a:noFill/>
+        </p:spPr>
+        <p:txBody>
+          <a:bodyPr wrap="square" anchor="t" lIns="0" rIns="0" tIns="0" bIns="0"/>
+          <a:lstStyle/>
+          <a:p>
+            <a:pPr algn="l"/>
+            <a:r>
+              <a:rPr sz="2200" b="0" i="0">
+                <a:solidFill>
+                  <a:srgbClr val="202122"/>
+                </a:solidFill>
+                <a:latin typeface="Calibri"/>
+              </a:rPr>
+              <a:t>Which flowchart symbol shows a decision?</a:t>
+            </a:r>
+          </a:p>
+        </p:txBody>
+      </p:sp>
+      <p:sp>
+        <p:nvSpPr>
+          <p:cNvPr id="10" name="Oval 9"/>
+          <p:cNvSpPr/>
+          <p:nvPr/>
+        </p:nvSpPr>
+        <p:spPr>
+          <a:xfrm>
+            <a:off x="548640" y="3531412"/>
+            <a:ext cx="411480" cy="411480"/>
+          </a:xfrm>
+          <a:prstGeom prst="ellipse">
+            <a:avLst/>
+          </a:prstGeom>
+          <a:solidFill>
+            <a:srgbClr val="F2B705"/>
+          </a:solidFill>
+          <a:ln>
+            <a:noFill/>
+          </a:ln>
+          <a:effectLst/>
+        </p:spPr>
+        <p:style>
+          <a:lnRef idx="1">
+            <a:schemeClr val="accent1"/>
+          </a:lnRef>
+          <a:fillRef idx="3">
+            <a:schemeClr val="accent1"/>
+          </a:fillRef>
+          <a:effectRef idx="2">
+            <a:schemeClr val="accent1"/>
+          </a:effectRef>
+          <a:fontRef idx="minor">
+            <a:schemeClr val="lt1"/>
+          </a:fontRef>
+        </p:style>
+        <p:txBody>
+          <a:bodyPr rtlCol="0" anchor="ctr" lIns="0" rIns="0" tIns="0" bIns="0"/>
+          <a:lstStyle/>
+          <a:p>
+            <a:pPr algn="ctr"/>
+            <a:r>
+              <a:rPr sz="1400" b="1">
+                <a:solidFill>
+                  <a:srgbClr val="202122"/>
+                </a:solidFill>
+                <a:latin typeface="Calibri"/>
+              </a:rPr>
+              <a:t>3</a:t>
+            </a:r>
+          </a:p>
+        </p:txBody>
+      </p:sp>
+      <p:sp>
+        <p:nvSpPr>
+          <p:cNvPr id="11" name="TextBox 10"/>
+          <p:cNvSpPr txBox="1"/>
+          <p:nvPr/>
+        </p:nvSpPr>
+        <p:spPr>
+          <a:xfrm>
+            <a:off x="1234440" y="3513124"/>
+            <a:ext cx="10408615" cy="791870"/>
+          </a:xfrm>
+          <a:prstGeom prst="rect">
+            <a:avLst/>
+          </a:prstGeom>
+          <a:noFill/>
+        </p:spPr>
+        <p:txBody>
+          <a:bodyPr wrap="square" anchor="t" lIns="0" rIns="0" tIns="0" bIns="0"/>
+          <a:lstStyle/>
+          <a:p>
+            <a:pPr algn="l"/>
+            <a:r>
+              <a:rPr sz="2200" b="0" i="0">
+                <a:solidFill>
+                  <a:srgbClr val="202122"/>
+                </a:solidFill>
+                <a:latin typeface="Calibri"/>
+              </a:rPr>
+              <a:t>Which Python keyword gives condition-controlled iteration?</a:t>
+            </a:r>
+          </a:p>
+        </p:txBody>
+      </p:sp>
+      <p:sp>
+        <p:nvSpPr>
+          <p:cNvPr id="12" name="Oval 11"/>
+          <p:cNvSpPr/>
+          <p:nvPr/>
+        </p:nvSpPr>
+        <p:spPr>
+          <a:xfrm>
+            <a:off x="548640" y="4487875"/>
+            <a:ext cx="411480" cy="411480"/>
+          </a:xfrm>
+          <a:prstGeom prst="ellipse">
+            <a:avLst/>
+          </a:prstGeom>
+          <a:solidFill>
+            <a:srgbClr val="F2B705"/>
+          </a:solidFill>
+          <a:ln>
+            <a:noFill/>
+          </a:ln>
+          <a:effectLst/>
+        </p:spPr>
+        <p:style>
+          <a:lnRef idx="1">
+            <a:schemeClr val="accent1"/>
+          </a:lnRef>
+          <a:fillRef idx="3">
+            <a:schemeClr val="accent1"/>
+          </a:fillRef>
+          <a:effectRef idx="2">
+            <a:schemeClr val="accent1"/>
+          </a:effectRef>
+          <a:fontRef idx="minor">
+            <a:schemeClr val="lt1"/>
+          </a:fontRef>
+        </p:style>
+        <p:txBody>
+          <a:bodyPr rtlCol="0" anchor="ctr" lIns="0" rIns="0" tIns="0" bIns="0"/>
+          <a:lstStyle/>
+          <a:p>
+            <a:pPr algn="ctr"/>
+            <a:r>
+              <a:rPr sz="1400" b="1">
+                <a:solidFill>
+                  <a:srgbClr val="202122"/>
+                </a:solidFill>
+                <a:latin typeface="Calibri"/>
+              </a:rPr>
+              <a:t>4</a:t>
+            </a:r>
+          </a:p>
+        </p:txBody>
+      </p:sp>
+      <p:sp>
+        <p:nvSpPr>
+          <p:cNvPr id="13" name="TextBox 12"/>
+          <p:cNvSpPr txBox="1"/>
+          <p:nvPr/>
+        </p:nvSpPr>
+        <p:spPr>
+          <a:xfrm>
+            <a:off x="1234440" y="4469587"/>
+            <a:ext cx="10408615" cy="791870"/>
+          </a:xfrm>
+          <a:prstGeom prst="rect">
+            <a:avLst/>
+          </a:prstGeom>
+          <a:noFill/>
+        </p:spPr>
+        <p:txBody>
+          <a:bodyPr wrap="square" anchor="t" lIns="0" rIns="0" tIns="0" bIns="0"/>
+          <a:lstStyle/>
+          <a:p>
+            <a:pPr algn="l"/>
+            <a:r>
+              <a:rPr sz="2200" b="0" i="0">
+                <a:solidFill>
+                  <a:srgbClr val="202122"/>
+                </a:solidFill>
+                <a:latin typeface="Calibri"/>
+              </a:rPr>
+              <a:t>Give one benefit of expressing an algorithm as code.</a:t>
+            </a:r>
+          </a:p>
+        </p:txBody>
+      </p:sp>
+      <p:sp>
+        <p:nvSpPr>
+          <p:cNvPr id="14" name="Oval 13"/>
+          <p:cNvSpPr/>
+          <p:nvPr/>
+        </p:nvSpPr>
+        <p:spPr>
+          <a:xfrm>
+            <a:off x="548640" y="5444337"/>
+            <a:ext cx="411480" cy="411480"/>
+          </a:xfrm>
+          <a:prstGeom prst="ellipse">
+            <a:avLst/>
+          </a:prstGeom>
+          <a:solidFill>
+            <a:srgbClr val="F2B705"/>
+          </a:solidFill>
+          <a:ln>
+            <a:noFill/>
+          </a:ln>
+          <a:effectLst/>
+        </p:spPr>
+        <p:style>
+          <a:lnRef idx="1">
+            <a:schemeClr val="accent1"/>
+          </a:lnRef>
+          <a:fillRef idx="3">
+            <a:schemeClr val="accent1"/>
+          </a:fillRef>
+          <a:effectRef idx="2">
+            <a:schemeClr val="accent1"/>
+          </a:effectRef>
+          <a:fontRef idx="minor">
+            <a:schemeClr val="lt1"/>
+          </a:fontRef>
+        </p:style>
+        <p:txBody>
+          <a:bodyPr rtlCol="0" anchor="ctr" lIns="0" rIns="0" tIns="0" bIns="0"/>
+          <a:lstStyle/>
+          <a:p>
+            <a:pPr algn="ctr"/>
+            <a:r>
+              <a:rPr sz="1400" b="1">
+                <a:solidFill>
+                  <a:srgbClr val="202122"/>
+                </a:solidFill>
+                <a:latin typeface="Calibri"/>
+              </a:rPr>
+              <a:t>5</a:t>
+            </a:r>
+          </a:p>
+        </p:txBody>
+      </p:sp>
+      <p:sp>
+        <p:nvSpPr>
+          <p:cNvPr id="15" name="TextBox 14"/>
+          <p:cNvSpPr txBox="1"/>
+          <p:nvPr/>
+        </p:nvSpPr>
+        <p:spPr>
+          <a:xfrm>
+            <a:off x="1234440" y="5426049"/>
+            <a:ext cx="10408615" cy="791870"/>
+          </a:xfrm>
+          <a:prstGeom prst="rect">
+            <a:avLst/>
+          </a:prstGeom>
+          <a:noFill/>
+        </p:spPr>
+        <p:txBody>
+          <a:bodyPr wrap="square" anchor="t" lIns="0" rIns="0" tIns="0" bIns="0"/>
+          <a:lstStyle/>
+          <a:p>
+            <a:pPr algn="l"/>
+            <a:r>
+              <a:rPr sz="2200" b="0" i="0">
+                <a:solidFill>
+                  <a:srgbClr val="202122"/>
+                </a:solidFill>
+                <a:latin typeface="Calibri"/>
+              </a:rPr>
+              <a:t>What is a trace table used for?</a:t>
+            </a:r>
+          </a:p>
+        </p:txBody>
+      </p:sp>
+    </p:spTree>
+  </p:cSld>
+  <p:clrMapOvr>
+    <a:masterClrMapping/>
+  </p:clrMapOvr>
+</p:sld>
+</file>
+
+<file path=ppt/slides/slide17.xml><?xml version="1.0" encoding="utf-8"?>
+<p:sld xmlns:a="http://schemas.openxmlformats.org/drawingml/2006/main" xmlns:p="http://schemas.openxmlformats.org/presentationml/2006/main" xmlns:r="http://schemas.openxmlformats.org/officeDocument/2006/relationships">
+  <p:cSld>
+    <p:bg>
+      <p:bgPr>
+        <a:solidFill>
+          <a:srgbClr val="FFFFFF"/>
+        </a:solidFill>
+        <a:effectLst/>
+      </p:bgPr>
+    </p:bg>
+    <p:spTree>
+      <p:nvGrpSpPr>
+        <p:cNvPr id="1" name=""/>
+        <p:cNvGrpSpPr/>
+        <p:nvPr/>
+      </p:nvGrpSpPr>
+      <p:grpSpPr/>
+      <p:sp>
+        <p:nvSpPr>
+          <p:cNvPr id="2" name="TextBox 1"/>
+          <p:cNvSpPr txBox="1"/>
+          <p:nvPr/>
+        </p:nvSpPr>
+        <p:spPr>
+          <a:xfrm>
+            <a:off x="548640" y="320040"/>
+            <a:ext cx="11094415" cy="274320"/>
+          </a:xfrm>
+          <a:prstGeom prst="rect">
+            <a:avLst/>
+          </a:prstGeom>
+          <a:noFill/>
+        </p:spPr>
+        <p:txBody>
+          <a:bodyPr wrap="square" anchor="t" lIns="0" rIns="0" tIns="0" bIns="0"/>
+          <a:lstStyle/>
+          <a:p>
+            <a:pPr algn="l"/>
+            <a:r>
+              <a:rPr sz="1100" b="1" i="0">
+                <a:solidFill>
+                  <a:srgbClr val="54595D"/>
+                </a:solidFill>
+                <a:latin typeface="Calibri"/>
+              </a:rPr>
+              <a:t>CORE COMPONENT  ·  Core Paper 1</a:t>
+            </a:r>
+          </a:p>
+        </p:txBody>
+      </p:sp>
+      <p:sp>
+        <p:nvSpPr>
+          <p:cNvPr id="3" name="TextBox 2"/>
+          <p:cNvSpPr txBox="1"/>
+          <p:nvPr/>
+        </p:nvSpPr>
+        <p:spPr>
+          <a:xfrm>
+            <a:off x="548640" y="566928"/>
+            <a:ext cx="11094415" cy="822960"/>
+          </a:xfrm>
+          <a:prstGeom prst="rect">
+            <a:avLst/>
+          </a:prstGeom>
+          <a:noFill/>
+        </p:spPr>
+        <p:txBody>
+          <a:bodyPr wrap="square" anchor="ctr" lIns="0" rIns="0" tIns="0" bIns="0"/>
+          <a:lstStyle/>
+          <a:p>
+            <a:pPr algn="l"/>
+            <a:r>
+              <a:rPr sz="3200" b="1" i="0">
+                <a:solidFill>
+                  <a:srgbClr val="03306E"/>
+                </a:solidFill>
+                <a:latin typeface="Cambria"/>
+              </a:rPr>
+              <a:t>Answers</a:t>
+            </a:r>
+          </a:p>
+        </p:txBody>
+      </p:sp>
+      <p:sp>
+        <p:nvSpPr>
+          <p:cNvPr id="4" name="TextBox 3"/>
+          <p:cNvSpPr txBox="1"/>
+          <p:nvPr/>
+        </p:nvSpPr>
+        <p:spPr>
+          <a:xfrm>
+            <a:off x="548640" y="6446520"/>
+            <a:ext cx="8229600" cy="274320"/>
+          </a:xfrm>
+          <a:prstGeom prst="rect">
+            <a:avLst/>
+          </a:prstGeom>
+          <a:noFill/>
+        </p:spPr>
+        <p:txBody>
+          <a:bodyPr wrap="square" anchor="t" lIns="0" rIns="0" tIns="0" bIns="0"/>
+          <a:lstStyle/>
+          <a:p>
+            <a:pPr algn="l"/>
+            <a:r>
+              <a:rPr sz="1000" b="0" i="0">
+                <a:solidFill>
+                  <a:srgbClr val="54595D"/>
+                </a:solidFill>
+                <a:latin typeface="Calibri"/>
+              </a:rPr>
+              <a:t>Digital Software Development T Level  ·  Computational Thinking and Algorithms</a:t>
+            </a:r>
+          </a:p>
+        </p:txBody>
+      </p:sp>
+      <p:sp>
+        <p:nvSpPr>
+          <p:cNvPr id="5" name="TextBox 4"/>
+          <p:cNvSpPr txBox="1"/>
+          <p:nvPr/>
+        </p:nvSpPr>
+        <p:spPr>
+          <a:xfrm>
+            <a:off x="10728655" y="6446520"/>
+            <a:ext cx="914400" cy="274320"/>
+          </a:xfrm>
+          <a:prstGeom prst="rect">
+            <a:avLst/>
+          </a:prstGeom>
+          <a:noFill/>
+        </p:spPr>
+        <p:txBody>
+          <a:bodyPr wrap="square" anchor="t" lIns="0" rIns="0" tIns="0" bIns="0"/>
+          <a:lstStyle/>
+          <a:p>
+            <a:pPr algn="r"/>
+            <a:r>
+              <a:rPr sz="1000" b="0" i="0">
+                <a:solidFill>
+                  <a:srgbClr val="54595D"/>
+                </a:solidFill>
+                <a:latin typeface="Calibri"/>
+              </a:rPr>
+              <a:t>17</a:t>
+            </a:r>
+          </a:p>
+        </p:txBody>
+      </p:sp>
+      <p:sp>
+        <p:nvSpPr>
+          <p:cNvPr id="6" name="Oval 5"/>
+          <p:cNvSpPr/>
+          <p:nvPr/>
+        </p:nvSpPr>
+        <p:spPr>
+          <a:xfrm>
+            <a:off x="548640" y="1618488"/>
+            <a:ext cx="411480" cy="411480"/>
+          </a:xfrm>
+          <a:prstGeom prst="ellipse">
+            <a:avLst/>
+          </a:prstGeom>
+          <a:solidFill>
+            <a:srgbClr val="F2B705"/>
+          </a:solidFill>
+          <a:ln>
+            <a:noFill/>
+          </a:ln>
+          <a:effectLst/>
+        </p:spPr>
+        <p:style>
+          <a:lnRef idx="1">
+            <a:schemeClr val="accent1"/>
+          </a:lnRef>
+          <a:fillRef idx="3">
+            <a:schemeClr val="accent1"/>
+          </a:fillRef>
+          <a:effectRef idx="2">
+            <a:schemeClr val="accent1"/>
+          </a:effectRef>
+          <a:fontRef idx="minor">
+            <a:schemeClr val="lt1"/>
+          </a:fontRef>
+        </p:style>
+        <p:txBody>
+          <a:bodyPr rtlCol="0" anchor="ctr" lIns="0" rIns="0" tIns="0" bIns="0"/>
+          <a:lstStyle/>
+          <a:p>
+            <a:pPr algn="ctr"/>
+            <a:r>
+              <a:rPr sz="1400" b="1">
+                <a:solidFill>
+                  <a:srgbClr val="202122"/>
+                </a:solidFill>
+                <a:latin typeface="Calibri"/>
+              </a:rPr>
+              <a:t>1</a:t>
+            </a:r>
+          </a:p>
+        </p:txBody>
+      </p:sp>
+      <p:sp>
+        <p:nvSpPr>
+          <p:cNvPr id="7" name="TextBox 6"/>
+          <p:cNvSpPr txBox="1"/>
+          <p:nvPr/>
+        </p:nvSpPr>
+        <p:spPr>
+          <a:xfrm>
+            <a:off x="1234440" y="1600200"/>
+            <a:ext cx="10408615" cy="791870"/>
+          </a:xfrm>
+          <a:prstGeom prst="rect">
+            <a:avLst/>
+          </a:prstGeom>
+          <a:noFill/>
+        </p:spPr>
+        <p:txBody>
+          <a:bodyPr wrap="square" anchor="t" lIns="0" rIns="0" tIns="0" bIns="0"/>
+          <a:lstStyle/>
+          <a:p>
+            <a:pPr algn="l"/>
+            <a:r>
+              <a:rPr sz="1800" b="0" i="0">
+                <a:solidFill>
+                  <a:srgbClr val="54595D"/>
+                </a:solidFill>
+                <a:latin typeface="Calibri"/>
+              </a:rPr>
+              <a:t>Name the four components of computational thinking.</a:t>
+            </a:r>
+          </a:p>
+          <a:p>
+            <a:r>
+              <a:rPr sz="1800" b="1">
+                <a:solidFill>
+                  <a:srgbClr val="03306E"/>
+                </a:solidFill>
+                <a:latin typeface="Calibri"/>
+              </a:rPr>
+              <a:t>Decomposition, pattern recognition, abstraction, algorithmic design.</a:t>
+            </a:r>
+          </a:p>
+        </p:txBody>
+      </p:sp>
+      <p:sp>
+        <p:nvSpPr>
+          <p:cNvPr id="8" name="Oval 7"/>
+          <p:cNvSpPr/>
+          <p:nvPr/>
+        </p:nvSpPr>
+        <p:spPr>
+          <a:xfrm>
+            <a:off x="548640" y="2574950"/>
+            <a:ext cx="411480" cy="411480"/>
+          </a:xfrm>
+          <a:prstGeom prst="ellipse">
+            <a:avLst/>
+          </a:prstGeom>
+          <a:solidFill>
+            <a:srgbClr val="F2B705"/>
+          </a:solidFill>
+          <a:ln>
+            <a:noFill/>
+          </a:ln>
+          <a:effectLst/>
+        </p:spPr>
+        <p:style>
+          <a:lnRef idx="1">
+            <a:schemeClr val="accent1"/>
+          </a:lnRef>
+          <a:fillRef idx="3">
+            <a:schemeClr val="accent1"/>
+          </a:fillRef>
+          <a:effectRef idx="2">
+            <a:schemeClr val="accent1"/>
+          </a:effectRef>
+          <a:fontRef idx="minor">
+            <a:schemeClr val="lt1"/>
+          </a:fontRef>
+        </p:style>
+        <p:txBody>
+          <a:bodyPr rtlCol="0" anchor="ctr" lIns="0" rIns="0" tIns="0" bIns="0"/>
+          <a:lstStyle/>
+          <a:p>
+            <a:pPr algn="ctr"/>
+            <a:r>
+              <a:rPr sz="1400" b="1">
+                <a:solidFill>
+                  <a:srgbClr val="202122"/>
+                </a:solidFill>
+                <a:latin typeface="Calibri"/>
+              </a:rPr>
+              <a:t>2</a:t>
+            </a:r>
+          </a:p>
+        </p:txBody>
+      </p:sp>
+      <p:sp>
+        <p:nvSpPr>
+          <p:cNvPr id="9" name="TextBox 8"/>
+          <p:cNvSpPr txBox="1"/>
+          <p:nvPr/>
+        </p:nvSpPr>
+        <p:spPr>
+          <a:xfrm>
+            <a:off x="1234440" y="2556662"/>
+            <a:ext cx="10408615" cy="791870"/>
+          </a:xfrm>
+          <a:prstGeom prst="rect">
+            <a:avLst/>
+          </a:prstGeom>
+          <a:noFill/>
+        </p:spPr>
+        <p:txBody>
+          <a:bodyPr wrap="square" anchor="t" lIns="0" rIns="0" tIns="0" bIns="0"/>
+          <a:lstStyle/>
+          <a:p>
+            <a:pPr algn="l"/>
+            <a:r>
+              <a:rPr sz="1800" b="0" i="0">
+                <a:solidFill>
+                  <a:srgbClr val="54595D"/>
+                </a:solidFill>
+                <a:latin typeface="Calibri"/>
+              </a:rPr>
+              <a:t>Which flowchart symbol shows a decision?</a:t>
+            </a:r>
+          </a:p>
+          <a:p>
+            <a:r>
+              <a:rPr sz="1800" b="1">
+                <a:solidFill>
+                  <a:srgbClr val="03306E"/>
+                </a:solidFill>
+                <a:latin typeface="Calibri"/>
+              </a:rPr>
+              <a:t>A diamond.</a:t>
+            </a:r>
+          </a:p>
+        </p:txBody>
+      </p:sp>
+      <p:sp>
+        <p:nvSpPr>
+          <p:cNvPr id="10" name="Oval 9"/>
+          <p:cNvSpPr/>
+          <p:nvPr/>
+        </p:nvSpPr>
+        <p:spPr>
+          <a:xfrm>
+            <a:off x="548640" y="3531412"/>
+            <a:ext cx="411480" cy="411480"/>
+          </a:xfrm>
+          <a:prstGeom prst="ellipse">
+            <a:avLst/>
+          </a:prstGeom>
+          <a:solidFill>
+            <a:srgbClr val="F2B705"/>
+          </a:solidFill>
+          <a:ln>
+            <a:noFill/>
+          </a:ln>
+          <a:effectLst/>
+        </p:spPr>
+        <p:style>
+          <a:lnRef idx="1">
+            <a:schemeClr val="accent1"/>
+          </a:lnRef>
+          <a:fillRef idx="3">
+            <a:schemeClr val="accent1"/>
+          </a:fillRef>
+          <a:effectRef idx="2">
+            <a:schemeClr val="accent1"/>
+          </a:effectRef>
+          <a:fontRef idx="minor">
+            <a:schemeClr val="lt1"/>
+          </a:fontRef>
+        </p:style>
+        <p:txBody>
+          <a:bodyPr rtlCol="0" anchor="ctr" lIns="0" rIns="0" tIns="0" bIns="0"/>
+          <a:lstStyle/>
+          <a:p>
+            <a:pPr algn="ctr"/>
+            <a:r>
+              <a:rPr sz="1400" b="1">
+                <a:solidFill>
+                  <a:srgbClr val="202122"/>
+                </a:solidFill>
+                <a:latin typeface="Calibri"/>
+              </a:rPr>
+              <a:t>3</a:t>
+            </a:r>
+          </a:p>
+        </p:txBody>
+      </p:sp>
+      <p:sp>
+        <p:nvSpPr>
+          <p:cNvPr id="11" name="TextBox 10"/>
+          <p:cNvSpPr txBox="1"/>
+          <p:nvPr/>
+        </p:nvSpPr>
+        <p:spPr>
+          <a:xfrm>
+            <a:off x="1234440" y="3513124"/>
+            <a:ext cx="10408615" cy="791870"/>
+          </a:xfrm>
+          <a:prstGeom prst="rect">
+            <a:avLst/>
+          </a:prstGeom>
+          <a:noFill/>
+        </p:spPr>
+        <p:txBody>
+          <a:bodyPr wrap="square" anchor="t" lIns="0" rIns="0" tIns="0" bIns="0"/>
+          <a:lstStyle/>
+          <a:p>
+            <a:pPr algn="l"/>
+            <a:r>
+              <a:rPr sz="1800" b="0" i="0">
+                <a:solidFill>
+                  <a:srgbClr val="54595D"/>
+                </a:solidFill>
+                <a:latin typeface="Calibri"/>
+              </a:rPr>
+              <a:t>Which Python keyword gives condition-controlled iteration?</a:t>
+            </a:r>
+          </a:p>
+          <a:p>
+            <a:r>
+              <a:rPr sz="1800" b="1">
+                <a:solidFill>
+                  <a:srgbClr val="03306E"/>
+                </a:solidFill>
+                <a:latin typeface="Calibri"/>
+              </a:rPr>
+              <a:t>while.</a:t>
+            </a:r>
+          </a:p>
+        </p:txBody>
+      </p:sp>
+      <p:sp>
+        <p:nvSpPr>
+          <p:cNvPr id="12" name="Oval 11"/>
+          <p:cNvSpPr/>
+          <p:nvPr/>
+        </p:nvSpPr>
+        <p:spPr>
+          <a:xfrm>
+            <a:off x="548640" y="4487875"/>
+            <a:ext cx="411480" cy="411480"/>
+          </a:xfrm>
+          <a:prstGeom prst="ellipse">
+            <a:avLst/>
+          </a:prstGeom>
+          <a:solidFill>
+            <a:srgbClr val="F2B705"/>
+          </a:solidFill>
+          <a:ln>
+            <a:noFill/>
+          </a:ln>
+          <a:effectLst/>
+        </p:spPr>
+        <p:style>
+          <a:lnRef idx="1">
+            <a:schemeClr val="accent1"/>
+          </a:lnRef>
+          <a:fillRef idx="3">
+            <a:schemeClr val="accent1"/>
+          </a:fillRef>
+          <a:effectRef idx="2">
+            <a:schemeClr val="accent1"/>
+          </a:effectRef>
+          <a:fontRef idx="minor">
+            <a:schemeClr val="lt1"/>
+          </a:fontRef>
+        </p:style>
+        <p:txBody>
+          <a:bodyPr rtlCol="0" anchor="ctr" lIns="0" rIns="0" tIns="0" bIns="0"/>
+          <a:lstStyle/>
+          <a:p>
+            <a:pPr algn="ctr"/>
+            <a:r>
+              <a:rPr sz="1400" b="1">
+                <a:solidFill>
+                  <a:srgbClr val="202122"/>
+                </a:solidFill>
+                <a:latin typeface="Calibri"/>
+              </a:rPr>
+              <a:t>4</a:t>
+            </a:r>
+          </a:p>
+        </p:txBody>
+      </p:sp>
+      <p:sp>
+        <p:nvSpPr>
+          <p:cNvPr id="13" name="TextBox 12"/>
+          <p:cNvSpPr txBox="1"/>
+          <p:nvPr/>
+        </p:nvSpPr>
+        <p:spPr>
+          <a:xfrm>
+            <a:off x="1234440" y="4469587"/>
+            <a:ext cx="10408615" cy="791870"/>
+          </a:xfrm>
+          <a:prstGeom prst="rect">
+            <a:avLst/>
+          </a:prstGeom>
+          <a:noFill/>
+        </p:spPr>
+        <p:txBody>
+          <a:bodyPr wrap="square" anchor="t" lIns="0" rIns="0" tIns="0" bIns="0"/>
+          <a:lstStyle/>
+          <a:p>
+            <a:pPr algn="l"/>
+            <a:r>
+              <a:rPr sz="1800" b="0" i="0">
+                <a:solidFill>
+                  <a:srgbClr val="54595D"/>
+                </a:solidFill>
+                <a:latin typeface="Calibri"/>
+              </a:rPr>
+              <a:t>Give one benefit of expressing an algorithm as code.</a:t>
+            </a:r>
+          </a:p>
+          <a:p>
+            <a:r>
+              <a:rPr sz="1800" b="1">
+                <a:solidFill>
+                  <a:srgbClr val="03306E"/>
+                </a:solidFill>
+                <a:latin typeface="Calibri"/>
+              </a:rPr>
+              <a:t>It is precise and can be run and tested.</a:t>
+            </a:r>
+          </a:p>
+        </p:txBody>
+      </p:sp>
+      <p:sp>
+        <p:nvSpPr>
+          <p:cNvPr id="14" name="Oval 13"/>
+          <p:cNvSpPr/>
+          <p:nvPr/>
+        </p:nvSpPr>
+        <p:spPr>
+          <a:xfrm>
+            <a:off x="548640" y="5444337"/>
+            <a:ext cx="411480" cy="411480"/>
+          </a:xfrm>
+          <a:prstGeom prst="ellipse">
+            <a:avLst/>
+          </a:prstGeom>
+          <a:solidFill>
+            <a:srgbClr val="F2B705"/>
+          </a:solidFill>
+          <a:ln>
+            <a:noFill/>
+          </a:ln>
+          <a:effectLst/>
+        </p:spPr>
+        <p:style>
+          <a:lnRef idx="1">
+            <a:schemeClr val="accent1"/>
+          </a:lnRef>
+          <a:fillRef idx="3">
+            <a:schemeClr val="accent1"/>
+          </a:fillRef>
+          <a:effectRef idx="2">
+            <a:schemeClr val="accent1"/>
+          </a:effectRef>
+          <a:fontRef idx="minor">
+            <a:schemeClr val="lt1"/>
+          </a:fontRef>
+        </p:style>
+        <p:txBody>
+          <a:bodyPr rtlCol="0" anchor="ctr" lIns="0" rIns="0" tIns="0" bIns="0"/>
+          <a:lstStyle/>
+          <a:p>
+            <a:pPr algn="ctr"/>
+            <a:r>
+              <a:rPr sz="1400" b="1">
+                <a:solidFill>
+                  <a:srgbClr val="202122"/>
+                </a:solidFill>
+                <a:latin typeface="Calibri"/>
+              </a:rPr>
+              <a:t>5</a:t>
+            </a:r>
+          </a:p>
+        </p:txBody>
+      </p:sp>
+      <p:sp>
+        <p:nvSpPr>
+          <p:cNvPr id="15" name="TextBox 14"/>
+          <p:cNvSpPr txBox="1"/>
+          <p:nvPr/>
+        </p:nvSpPr>
+        <p:spPr>
+          <a:xfrm>
+            <a:off x="1234440" y="5426049"/>
+            <a:ext cx="10408615" cy="791870"/>
+          </a:xfrm>
+          <a:prstGeom prst="rect">
+            <a:avLst/>
+          </a:prstGeom>
+          <a:noFill/>
+        </p:spPr>
+        <p:txBody>
+          <a:bodyPr wrap="square" anchor="t" lIns="0" rIns="0" tIns="0" bIns="0"/>
+          <a:lstStyle/>
+          <a:p>
+            <a:pPr algn="l"/>
+            <a:r>
+              <a:rPr sz="1800" b="0" i="0">
+                <a:solidFill>
+                  <a:srgbClr val="54595D"/>
+                </a:solidFill>
+                <a:latin typeface="Calibri"/>
+              </a:rPr>
+              <a:t>What is a trace table used for?</a:t>
+            </a:r>
+          </a:p>
+          <a:p>
+            <a:r>
+              <a:rPr sz="1800" b="1">
+                <a:solidFill>
+                  <a:srgbClr val="03306E"/>
+                </a:solidFill>
+                <a:latin typeface="Calibri"/>
+              </a:rPr>
+              <a:t>Recording variable values step by step to check or debug an algorithm.</a:t>
+            </a:r>
+          </a:p>
+        </p:txBody>
+      </p:sp>
+    </p:spTree>
+  </p:cSld>
+  <p:clrMapOvr>
+    <a:masterClrMapping/>
+  </p:clrMapOvr>
+</p:sld>
+</file>
+
+<file path=ppt/slides/slide18.xml><?xml version="1.0" encoding="utf-8"?>
+<p:sld xmlns:a="http://schemas.openxmlformats.org/drawingml/2006/main" xmlns:p="http://schemas.openxmlformats.org/presentationml/2006/main" xmlns:r="http://schemas.openxmlformats.org/officeDocument/2006/relationships">
+  <p:cSld>
+    <p:bg>
+      <p:bgPr>
+        <a:solidFill>
+          <a:srgbClr val="FFFFFF"/>
+        </a:solidFill>
+        <a:effectLst/>
+      </p:bgPr>
+    </p:bg>
+    <p:spTree>
+      <p:nvGrpSpPr>
+        <p:cNvPr id="1" name=""/>
+        <p:cNvGrpSpPr/>
+        <p:nvPr/>
+      </p:nvGrpSpPr>
+      <p:grpSpPr/>
+      <p:sp>
+        <p:nvSpPr>
+          <p:cNvPr id="2" name="TextBox 1"/>
+          <p:cNvSpPr txBox="1"/>
+          <p:nvPr/>
+        </p:nvSpPr>
+        <p:spPr>
+          <a:xfrm>
+            <a:off x="548640" y="320040"/>
+            <a:ext cx="11094415" cy="274320"/>
+          </a:xfrm>
+          <a:prstGeom prst="rect">
+            <a:avLst/>
+          </a:prstGeom>
+          <a:noFill/>
+        </p:spPr>
+        <p:txBody>
+          <a:bodyPr wrap="square" anchor="t" lIns="0" rIns="0" tIns="0" bIns="0"/>
+          <a:lstStyle/>
+          <a:p>
+            <a:pPr algn="l"/>
+            <a:r>
+              <a:rPr sz="1100" b="1" i="0">
+                <a:solidFill>
+                  <a:srgbClr val="54595D"/>
+                </a:solidFill>
+                <a:latin typeface="Calibri"/>
+              </a:rPr>
+              <a:t>CORE COMPONENT  ·  Core Paper 1</a:t>
+            </a:r>
+          </a:p>
+        </p:txBody>
+      </p:sp>
+      <p:sp>
+        <p:nvSpPr>
+          <p:cNvPr id="3" name="TextBox 2"/>
+          <p:cNvSpPr txBox="1"/>
+          <p:nvPr/>
+        </p:nvSpPr>
+        <p:spPr>
+          <a:xfrm>
+            <a:off x="548640" y="566928"/>
+            <a:ext cx="11094415" cy="822960"/>
+          </a:xfrm>
+          <a:prstGeom prst="rect">
+            <a:avLst/>
+          </a:prstGeom>
+          <a:noFill/>
+        </p:spPr>
+        <p:txBody>
+          <a:bodyPr wrap="square" anchor="ctr" lIns="0" rIns="0" tIns="0" bIns="0"/>
+          <a:lstStyle/>
+          <a:p>
+            <a:pPr algn="l"/>
+            <a:r>
+              <a:rPr sz="3200" b="1" i="0">
+                <a:solidFill>
+                  <a:srgbClr val="03306E"/>
+                </a:solidFill>
+                <a:latin typeface="Cambria"/>
+              </a:rPr>
+              <a:t>Activity: Flowchart to Python</a:t>
+            </a:r>
+          </a:p>
+        </p:txBody>
+      </p:sp>
+      <p:sp>
+        <p:nvSpPr>
+          <p:cNvPr id="4" name="TextBox 3"/>
+          <p:cNvSpPr txBox="1"/>
+          <p:nvPr/>
+        </p:nvSpPr>
+        <p:spPr>
+          <a:xfrm>
+            <a:off x="548640" y="6446520"/>
+            <a:ext cx="8229600" cy="274320"/>
+          </a:xfrm>
+          <a:prstGeom prst="rect">
+            <a:avLst/>
+          </a:prstGeom>
+          <a:noFill/>
+        </p:spPr>
+        <p:txBody>
+          <a:bodyPr wrap="square" anchor="t" lIns="0" rIns="0" tIns="0" bIns="0"/>
+          <a:lstStyle/>
+          <a:p>
+            <a:pPr algn="l"/>
+            <a:r>
+              <a:rPr sz="1000" b="0" i="0">
+                <a:solidFill>
+                  <a:srgbClr val="54595D"/>
+                </a:solidFill>
+                <a:latin typeface="Calibri"/>
+              </a:rPr>
+              <a:t>Digital Software Development T Level  ·  Computational Thinking and Algorithms</a:t>
+            </a:r>
+          </a:p>
+        </p:txBody>
+      </p:sp>
+      <p:sp>
+        <p:nvSpPr>
+          <p:cNvPr id="5" name="TextBox 4"/>
+          <p:cNvSpPr txBox="1"/>
+          <p:nvPr/>
+        </p:nvSpPr>
+        <p:spPr>
+          <a:xfrm>
+            <a:off x="10728655" y="6446520"/>
+            <a:ext cx="914400" cy="274320"/>
+          </a:xfrm>
+          <a:prstGeom prst="rect">
+            <a:avLst/>
+          </a:prstGeom>
+          <a:noFill/>
+        </p:spPr>
+        <p:txBody>
+          <a:bodyPr wrap="square" anchor="t" lIns="0" rIns="0" tIns="0" bIns="0"/>
+          <a:lstStyle/>
+          <a:p>
+            <a:pPr algn="r"/>
+            <a:r>
+              <a:rPr sz="1000" b="0" i="0">
+                <a:solidFill>
+                  <a:srgbClr val="54595D"/>
+                </a:solidFill>
+                <a:latin typeface="Calibri"/>
+              </a:rPr>
+              <a:t>18</a:t>
             </a:r>
           </a:p>
         </p:txBody>
@@ -4913,7 +9426,7 @@
 </p:sld>
 </file>
 
-<file path=ppt/slides/slide11.xml><?xml version="1.0" encoding="utf-8"?>
+<file path=ppt/slides/slide19.xml><?xml version="1.0" encoding="utf-8"?>
 <p:sld xmlns:a="http://schemas.openxmlformats.org/drawingml/2006/main" xmlns:p="http://schemas.openxmlformats.org/presentationml/2006/main" xmlns:r="http://schemas.openxmlformats.org/officeDocument/2006/relationships">
   <p:cSld>
     <p:bg>
@@ -6236,22 +10749,161 @@
       </p:sp>
       <p:sp>
         <p:nvSpPr>
-          <p:cNvPr id="6" name="Rounded Rectangle 5"/>
+          <p:cNvPr id="6" name="TextBox 5"/>
+          <p:cNvSpPr txBox="1"/>
+          <p:nvPr/>
+        </p:nvSpPr>
+        <p:spPr>
+          <a:xfrm>
+            <a:off x="548640" y="1554480"/>
+            <a:ext cx="6720840" cy="4617720"/>
+          </a:xfrm>
+          <a:prstGeom prst="rect">
+            <a:avLst/>
+          </a:prstGeom>
+          <a:noFill/>
+        </p:spPr>
+        <p:txBody>
+          <a:bodyPr wrap="square" lIns="0" rIns="0" tIns="0" bIns="0">
+            <a:spAutoFit/>
+          </a:bodyPr>
+          <a:lstStyle/>
+          <a:p>
+            <a:pPr>
+              <a:spcAft>
+                <a:spcPts val="1260"/>
+              </a:spcAft>
+            </a:pPr>
+            <a:r>
+              <a:rPr sz="2100" b="0">
+                <a:solidFill>
+                  <a:srgbClr val="202122"/>
+                </a:solidFill>
+                <a:latin typeface="Calibri"/>
+              </a:rPr>
+              <a:t>Computational thinking is the thinking you do before you write code.</a:t>
+            </a:r>
+          </a:p>
+          <a:p>
+            <a:pPr>
+              <a:spcAft>
+                <a:spcPts val="1260"/>
+              </a:spcAft>
+            </a:pPr>
+            <a:r>
+              <a:rPr sz="2100" b="1">
+                <a:solidFill>
+                  <a:srgbClr val="202122"/>
+                </a:solidFill>
+                <a:latin typeface="Calibri"/>
+              </a:rPr>
+              <a:t>Decomposition:</a:t>
+            </a:r>
+            <a:r>
+              <a:rPr sz="2100" b="0">
+                <a:solidFill>
+                  <a:srgbClr val="202122"/>
+                </a:solidFill>
+                <a:latin typeface="Calibri"/>
+              </a:rPr>
+              <a:t> break a problem into smaller parts you can solve one at a time. A game becomes menus, player movement, scoring and saving.</a:t>
+            </a:r>
+          </a:p>
+          <a:p>
+            <a:pPr>
+              <a:spcAft>
+                <a:spcPts val="1260"/>
+              </a:spcAft>
+            </a:pPr>
+            <a:r>
+              <a:rPr sz="2100" b="1">
+                <a:solidFill>
+                  <a:srgbClr val="202122"/>
+                </a:solidFill>
+                <a:latin typeface="Calibri"/>
+              </a:rPr>
+              <a:t>Pattern recognition:</a:t>
+            </a:r>
+            <a:r>
+              <a:rPr sz="2100" b="0">
+                <a:solidFill>
+                  <a:srgbClr val="202122"/>
+                </a:solidFill>
+                <a:latin typeface="Calibri"/>
+              </a:rPr>
+              <a:t> spot what's similar to problems you've already solved, so you can reuse code.</a:t>
+            </a:r>
+          </a:p>
+          <a:p>
+            <a:pPr>
+              <a:spcAft>
+                <a:spcPts val="1260"/>
+              </a:spcAft>
+            </a:pPr>
+            <a:r>
+              <a:rPr sz="2100" b="1">
+                <a:solidFill>
+                  <a:srgbClr val="202122"/>
+                </a:solidFill>
+                <a:latin typeface="Calibri"/>
+              </a:rPr>
+              <a:t>Abstraction:</a:t>
+            </a:r>
+            <a:r>
+              <a:rPr sz="2100" b="0">
+                <a:solidFill>
+                  <a:srgbClr val="202122"/>
+                </a:solidFill>
+                <a:latin typeface="Calibri"/>
+              </a:rPr>
+              <a:t> ignore detail that doesn't matter and focus on the inputs, the outputs, what varies and what stays the same.</a:t>
+            </a:r>
+          </a:p>
+          <a:p>
+            <a:pPr>
+              <a:spcAft>
+                <a:spcPts val="1260"/>
+              </a:spcAft>
+            </a:pPr>
+            <a:r>
+              <a:rPr sz="2100" b="1">
+                <a:solidFill>
+                  <a:srgbClr val="202122"/>
+                </a:solidFill>
+                <a:latin typeface="Calibri"/>
+              </a:rPr>
+              <a:t>Algorithmic design:</a:t>
+            </a:r>
+            <a:r>
+              <a:rPr sz="2100" b="0">
+                <a:solidFill>
+                  <a:srgbClr val="202122"/>
+                </a:solidFill>
+                <a:latin typeface="Calibri"/>
+              </a:rPr>
+              <a:t> write the solution as precise, ordered steps a computer can follow.</a:t>
+            </a:r>
+          </a:p>
+        </p:txBody>
+      </p:sp>
+      <p:sp>
+        <p:nvSpPr>
+          <p:cNvPr id="7" name="Rounded Rectangle 6"/>
           <p:cNvSpPr/>
           <p:nvPr/>
         </p:nvSpPr>
         <p:spPr>
           <a:xfrm>
-            <a:off x="548640" y="1600200"/>
-            <a:ext cx="5410047" cy="2148840"/>
+            <a:off x="7772400" y="1554480"/>
+            <a:ext cx="3867912" cy="4526280"/>
           </a:xfrm>
           <a:prstGeom prst="roundRect">
             <a:avLst>
-              <a:gd name="adj" fmla="val 6000"/>
+              <a:gd name="adj" fmla="val 8000"/>
             </a:avLst>
           </a:prstGeom>
           <a:solidFill>
-            <a:srgbClr val="EAF3FF"/>
+            <a:srgbClr val="03306E"/>
           </a:solidFill>
           <a:ln>
             <a:noFill/>
@@ -6280,14 +10932,14 @@
       </p:sp>
       <p:sp>
         <p:nvSpPr>
-          <p:cNvPr id="7" name="Oval 6"/>
+          <p:cNvPr id="8" name="Oval 7"/>
           <p:cNvSpPr/>
           <p:nvPr/>
         </p:nvSpPr>
         <p:spPr>
           <a:xfrm>
-            <a:off x="777240" y="1828800"/>
-            <a:ext cx="457200" cy="457200"/>
+            <a:off x="8046720" y="1828800"/>
+            <a:ext cx="548640" cy="548640"/>
           </a:xfrm>
           <a:prstGeom prst="ellipse">
             <a:avLst/>
@@ -6320,60 +10972,60 @@
           <a:p>
             <a:pPr algn="ctr"/>
             <a:r>
-              <a:rPr sz="1500" b="1">
+              <a:rPr sz="1300" b="1">
                 <a:solidFill>
                   <a:srgbClr val="202122"/>
                 </a:solidFill>
                 <a:latin typeface="Calibri"/>
               </a:rPr>
-              <a:t>1</a:t>
-            </a:r>
-          </a:p>
-        </p:txBody>
-      </p:sp>
-      <p:sp>
-        <p:nvSpPr>
-          <p:cNvPr id="8" name="TextBox 7"/>
-          <p:cNvSpPr txBox="1"/>
-          <p:nvPr/>
-        </p:nvSpPr>
-        <p:spPr>
-          <a:xfrm>
-            <a:off x="1371600" y="1801368"/>
-            <a:ext cx="4404207" cy="512064"/>
-          </a:xfrm>
-          <a:prstGeom prst="rect">
-            <a:avLst/>
-          </a:prstGeom>
-          <a:noFill/>
-        </p:spPr>
-        <p:txBody>
-          <a:bodyPr wrap="square" anchor="ctr" lIns="0" rIns="0" tIns="0" bIns="0"/>
+              <a:t>e.g.</a:t>
+            </a:r>
+          </a:p>
+        </p:txBody>
+      </p:sp>
+      <p:sp>
+        <p:nvSpPr>
+          <p:cNvPr id="9" name="TextBox 8"/>
+          <p:cNvSpPr txBox="1"/>
+          <p:nvPr/>
+        </p:nvSpPr>
+        <p:spPr>
+          <a:xfrm>
+            <a:off x="8046720" y="2560320"/>
+            <a:ext cx="3291840" cy="365760"/>
+          </a:xfrm>
+          <a:prstGeom prst="rect">
+            <a:avLst/>
+          </a:prstGeom>
+          <a:noFill/>
+        </p:spPr>
+        <p:txBody>
+          <a:bodyPr wrap="square" anchor="t" lIns="0" rIns="0" tIns="0" bIns="0"/>
           <a:lstStyle/>
           <a:p>
             <a:pPr algn="l"/>
             <a:r>
-              <a:rPr sz="1900" b="1" i="0">
-                <a:solidFill>
-                  <a:srgbClr val="03306E"/>
-                </a:solidFill>
-                <a:latin typeface="Calibri"/>
-              </a:rPr>
-              <a:t>Decomposition</a:t>
-            </a:r>
-          </a:p>
-        </p:txBody>
-      </p:sp>
-      <p:sp>
-        <p:nvSpPr>
-          <p:cNvPr id="9" name="TextBox 8"/>
-          <p:cNvSpPr txBox="1"/>
-          <p:nvPr/>
-        </p:nvSpPr>
-        <p:spPr>
-          <a:xfrm>
-            <a:off x="777240" y="2468880"/>
-            <a:ext cx="4952847" cy="1143000"/>
+              <a:rPr sz="1300" b="1" i="0">
+                <a:solidFill>
+                  <a:srgbClr val="A9C8F0"/>
+                </a:solidFill>
+                <a:latin typeface="Calibri"/>
+              </a:rPr>
+              <a:t>EXAMPLE</a:t>
+            </a:r>
+          </a:p>
+        </p:txBody>
+      </p:sp>
+      <p:sp>
+        <p:nvSpPr>
+          <p:cNvPr id="10" name="TextBox 9"/>
+          <p:cNvSpPr txBox="1"/>
+          <p:nvPr/>
+        </p:nvSpPr>
+        <p:spPr>
+          <a:xfrm>
+            <a:off x="8046720" y="2971800"/>
+            <a:ext cx="3291840" cy="2971800"/>
           </a:xfrm>
           <a:prstGeom prst="rect">
             <a:avLst/>
@@ -6386,502 +11038,13 @@
           <a:p>
             <a:pPr algn="l"/>
             <a:r>
-              <a:rPr sz="1800" b="0" i="0">
-                <a:solidFill>
-                  <a:srgbClr val="202122"/>
-                </a:solidFill>
-                <a:latin typeface="Calibri"/>
-              </a:rPr>
-              <a:t>Break a problem or solution into smaller, manageable parts. Show it with block diagrams, flowcharts, code or written descriptions.</a:t>
-            </a:r>
-          </a:p>
-        </p:txBody>
-      </p:sp>
-      <p:sp>
-        <p:nvSpPr>
-          <p:cNvPr id="10" name="Rounded Rectangle 9"/>
-          <p:cNvSpPr/>
-          <p:nvPr/>
-        </p:nvSpPr>
-        <p:spPr>
-          <a:xfrm>
-            <a:off x="6233007" y="1600200"/>
-            <a:ext cx="5410047" cy="2148840"/>
-          </a:xfrm>
-          <a:prstGeom prst="roundRect">
-            <a:avLst>
-              <a:gd name="adj" fmla="val 6000"/>
-            </a:avLst>
-          </a:prstGeom>
-          <a:solidFill>
-            <a:srgbClr val="EAF3FF"/>
-          </a:solidFill>
-          <a:ln>
-            <a:noFill/>
-          </a:ln>
-          <a:effectLst/>
-        </p:spPr>
-        <p:style>
-          <a:lnRef idx="1">
-            <a:schemeClr val="accent1"/>
-          </a:lnRef>
-          <a:fillRef idx="3">
-            <a:schemeClr val="accent1"/>
-          </a:fillRef>
-          <a:effectRef idx="2">
-            <a:schemeClr val="accent1"/>
-          </a:effectRef>
-          <a:fontRef idx="minor">
-            <a:schemeClr val="lt1"/>
-          </a:fontRef>
-        </p:style>
-        <p:txBody>
-          <a:bodyPr rtlCol="0" anchor="ctr"/>
-          <a:lstStyle/>
-          <a:p/>
-        </p:txBody>
-      </p:sp>
-      <p:sp>
-        <p:nvSpPr>
-          <p:cNvPr id="11" name="Oval 10"/>
-          <p:cNvSpPr/>
-          <p:nvPr/>
-        </p:nvSpPr>
-        <p:spPr>
-          <a:xfrm>
-            <a:off x="6461607" y="1828800"/>
-            <a:ext cx="457200" cy="457200"/>
-          </a:xfrm>
-          <a:prstGeom prst="ellipse">
-            <a:avLst/>
-          </a:prstGeom>
-          <a:solidFill>
-            <a:srgbClr val="F2B705"/>
-          </a:solidFill>
-          <a:ln>
-            <a:noFill/>
-          </a:ln>
-          <a:effectLst/>
-        </p:spPr>
-        <p:style>
-          <a:lnRef idx="1">
-            <a:schemeClr val="accent1"/>
-          </a:lnRef>
-          <a:fillRef idx="3">
-            <a:schemeClr val="accent1"/>
-          </a:fillRef>
-          <a:effectRef idx="2">
-            <a:schemeClr val="accent1"/>
-          </a:effectRef>
-          <a:fontRef idx="minor">
-            <a:schemeClr val="lt1"/>
-          </a:fontRef>
-        </p:style>
-        <p:txBody>
-          <a:bodyPr rtlCol="0" anchor="ctr" lIns="0" rIns="0" tIns="0" bIns="0"/>
-          <a:lstStyle/>
-          <a:p>
-            <a:pPr algn="ctr"/>
-            <a:r>
-              <a:rPr sz="1500" b="1">
-                <a:solidFill>
-                  <a:srgbClr val="202122"/>
-                </a:solidFill>
-                <a:latin typeface="Calibri"/>
-              </a:rPr>
-              <a:t>2</a:t>
-            </a:r>
-          </a:p>
-        </p:txBody>
-      </p:sp>
-      <p:sp>
-        <p:nvSpPr>
-          <p:cNvPr id="12" name="TextBox 11"/>
-          <p:cNvSpPr txBox="1"/>
-          <p:nvPr/>
-        </p:nvSpPr>
-        <p:spPr>
-          <a:xfrm>
-            <a:off x="7055967" y="1801368"/>
-            <a:ext cx="4404207" cy="512064"/>
-          </a:xfrm>
-          <a:prstGeom prst="rect">
-            <a:avLst/>
-          </a:prstGeom>
-          <a:noFill/>
-        </p:spPr>
-        <p:txBody>
-          <a:bodyPr wrap="square" anchor="ctr" lIns="0" rIns="0" tIns="0" bIns="0"/>
-          <a:lstStyle/>
-          <a:p>
-            <a:pPr algn="l"/>
-            <a:r>
-              <a:rPr sz="1900" b="1" i="0">
-                <a:solidFill>
-                  <a:srgbClr val="03306E"/>
-                </a:solidFill>
-                <a:latin typeface="Calibri"/>
-              </a:rPr>
-              <a:t>Pattern recognition</a:t>
-            </a:r>
-          </a:p>
-        </p:txBody>
-      </p:sp>
-      <p:sp>
-        <p:nvSpPr>
-          <p:cNvPr id="13" name="TextBox 12"/>
-          <p:cNvSpPr txBox="1"/>
-          <p:nvPr/>
-        </p:nvSpPr>
-        <p:spPr>
-          <a:xfrm>
-            <a:off x="6461607" y="2468880"/>
-            <a:ext cx="4952847" cy="1143000"/>
-          </a:xfrm>
-          <a:prstGeom prst="rect">
-            <a:avLst/>
-          </a:prstGeom>
-          <a:noFill/>
-        </p:spPr>
-        <p:txBody>
-          <a:bodyPr wrap="square" anchor="t" lIns="0" rIns="0" tIns="0" bIns="0"/>
-          <a:lstStyle/>
-          <a:p>
-            <a:pPr algn="l"/>
-            <a:r>
-              <a:rPr sz="2000" b="0" i="0">
-                <a:solidFill>
-                  <a:srgbClr val="202122"/>
-                </a:solidFill>
-                <a:latin typeface="Calibri"/>
-              </a:rPr>
-              <a:t>Spot similarities within and between problems, and reuse solutions that worked before.</a:t>
-            </a:r>
-          </a:p>
-        </p:txBody>
-      </p:sp>
-      <p:sp>
-        <p:nvSpPr>
-          <p:cNvPr id="14" name="Rounded Rectangle 13"/>
-          <p:cNvSpPr/>
-          <p:nvPr/>
-        </p:nvSpPr>
-        <p:spPr>
-          <a:xfrm>
-            <a:off x="548640" y="4023360"/>
-            <a:ext cx="5410047" cy="2148840"/>
-          </a:xfrm>
-          <a:prstGeom prst="roundRect">
-            <a:avLst>
-              <a:gd name="adj" fmla="val 6000"/>
-            </a:avLst>
-          </a:prstGeom>
-          <a:solidFill>
-            <a:srgbClr val="EAF3FF"/>
-          </a:solidFill>
-          <a:ln>
-            <a:noFill/>
-          </a:ln>
-          <a:effectLst/>
-        </p:spPr>
-        <p:style>
-          <a:lnRef idx="1">
-            <a:schemeClr val="accent1"/>
-          </a:lnRef>
-          <a:fillRef idx="3">
-            <a:schemeClr val="accent1"/>
-          </a:fillRef>
-          <a:effectRef idx="2">
-            <a:schemeClr val="accent1"/>
-          </a:effectRef>
-          <a:fontRef idx="minor">
-            <a:schemeClr val="lt1"/>
-          </a:fontRef>
-        </p:style>
-        <p:txBody>
-          <a:bodyPr rtlCol="0" anchor="ctr"/>
-          <a:lstStyle/>
-          <a:p/>
-        </p:txBody>
-      </p:sp>
-      <p:sp>
-        <p:nvSpPr>
-          <p:cNvPr id="15" name="Oval 14"/>
-          <p:cNvSpPr/>
-          <p:nvPr/>
-        </p:nvSpPr>
-        <p:spPr>
-          <a:xfrm>
-            <a:off x="777240" y="4251960"/>
-            <a:ext cx="457200" cy="457200"/>
-          </a:xfrm>
-          <a:prstGeom prst="ellipse">
-            <a:avLst/>
-          </a:prstGeom>
-          <a:solidFill>
-            <a:srgbClr val="F2B705"/>
-          </a:solidFill>
-          <a:ln>
-            <a:noFill/>
-          </a:ln>
-          <a:effectLst/>
-        </p:spPr>
-        <p:style>
-          <a:lnRef idx="1">
-            <a:schemeClr val="accent1"/>
-          </a:lnRef>
-          <a:fillRef idx="3">
-            <a:schemeClr val="accent1"/>
-          </a:fillRef>
-          <a:effectRef idx="2">
-            <a:schemeClr val="accent1"/>
-          </a:effectRef>
-          <a:fontRef idx="minor">
-            <a:schemeClr val="lt1"/>
-          </a:fontRef>
-        </p:style>
-        <p:txBody>
-          <a:bodyPr rtlCol="0" anchor="ctr" lIns="0" rIns="0" tIns="0" bIns="0"/>
-          <a:lstStyle/>
-          <a:p>
-            <a:pPr algn="ctr"/>
-            <a:r>
-              <a:rPr sz="1500" b="1">
-                <a:solidFill>
-                  <a:srgbClr val="202122"/>
-                </a:solidFill>
-                <a:latin typeface="Calibri"/>
-              </a:rPr>
-              <a:t>3</a:t>
-            </a:r>
-          </a:p>
-        </p:txBody>
-      </p:sp>
-      <p:sp>
-        <p:nvSpPr>
-          <p:cNvPr id="16" name="TextBox 15"/>
-          <p:cNvSpPr txBox="1"/>
-          <p:nvPr/>
-        </p:nvSpPr>
-        <p:spPr>
-          <a:xfrm>
-            <a:off x="1371600" y="4224528"/>
-            <a:ext cx="4404207" cy="512064"/>
-          </a:xfrm>
-          <a:prstGeom prst="rect">
-            <a:avLst/>
-          </a:prstGeom>
-          <a:noFill/>
-        </p:spPr>
-        <p:txBody>
-          <a:bodyPr wrap="square" anchor="ctr" lIns="0" rIns="0" tIns="0" bIns="0"/>
-          <a:lstStyle/>
-          <a:p>
-            <a:pPr algn="l"/>
-            <a:r>
-              <a:rPr sz="1900" b="1" i="0">
-                <a:solidFill>
-                  <a:srgbClr val="03306E"/>
-                </a:solidFill>
-                <a:latin typeface="Calibri"/>
-              </a:rPr>
-              <a:t>Abstraction</a:t>
-            </a:r>
-          </a:p>
-        </p:txBody>
-      </p:sp>
-      <p:sp>
-        <p:nvSpPr>
-          <p:cNvPr id="17" name="TextBox 16"/>
-          <p:cNvSpPr txBox="1"/>
-          <p:nvPr/>
-        </p:nvSpPr>
-        <p:spPr>
-          <a:xfrm>
-            <a:off x="777240" y="4892040"/>
-            <a:ext cx="4952847" cy="1143000"/>
-          </a:xfrm>
-          <a:prstGeom prst="rect">
-            <a:avLst/>
-          </a:prstGeom>
-          <a:noFill/>
-        </p:spPr>
-        <p:txBody>
-          <a:bodyPr wrap="square" anchor="t" lIns="0" rIns="0" tIns="0" bIns="0"/>
-          <a:lstStyle/>
-          <a:p>
-            <a:pPr algn="l"/>
-            <a:r>
-              <a:rPr sz="2000" b="0" i="0">
-                <a:solidFill>
-                  <a:srgbClr val="202122"/>
-                </a:solidFill>
-                <a:latin typeface="Calibri"/>
-              </a:rPr>
-              <a:t>Keep only what matters: the inputs, outputs, what varies, what stays constant and the key repeated actions.</a:t>
-            </a:r>
-          </a:p>
-        </p:txBody>
-      </p:sp>
-      <p:sp>
-        <p:nvSpPr>
-          <p:cNvPr id="18" name="Rounded Rectangle 17"/>
-          <p:cNvSpPr/>
-          <p:nvPr/>
-        </p:nvSpPr>
-        <p:spPr>
-          <a:xfrm>
-            <a:off x="6233007" y="4023360"/>
-            <a:ext cx="5410047" cy="2148840"/>
-          </a:xfrm>
-          <a:prstGeom prst="roundRect">
-            <a:avLst>
-              <a:gd name="adj" fmla="val 6000"/>
-            </a:avLst>
-          </a:prstGeom>
-          <a:solidFill>
-            <a:srgbClr val="EAF3FF"/>
-          </a:solidFill>
-          <a:ln>
-            <a:noFill/>
-          </a:ln>
-          <a:effectLst/>
-        </p:spPr>
-        <p:style>
-          <a:lnRef idx="1">
-            <a:schemeClr val="accent1"/>
-          </a:lnRef>
-          <a:fillRef idx="3">
-            <a:schemeClr val="accent1"/>
-          </a:fillRef>
-          <a:effectRef idx="2">
-            <a:schemeClr val="accent1"/>
-          </a:effectRef>
-          <a:fontRef idx="minor">
-            <a:schemeClr val="lt1"/>
-          </a:fontRef>
-        </p:style>
-        <p:txBody>
-          <a:bodyPr rtlCol="0" anchor="ctr"/>
-          <a:lstStyle/>
-          <a:p/>
-        </p:txBody>
-      </p:sp>
-      <p:sp>
-        <p:nvSpPr>
-          <p:cNvPr id="19" name="Oval 18"/>
-          <p:cNvSpPr/>
-          <p:nvPr/>
-        </p:nvSpPr>
-        <p:spPr>
-          <a:xfrm>
-            <a:off x="6461607" y="4251960"/>
-            <a:ext cx="457200" cy="457200"/>
-          </a:xfrm>
-          <a:prstGeom prst="ellipse">
-            <a:avLst/>
-          </a:prstGeom>
-          <a:solidFill>
-            <a:srgbClr val="F2B705"/>
-          </a:solidFill>
-          <a:ln>
-            <a:noFill/>
-          </a:ln>
-          <a:effectLst/>
-        </p:spPr>
-        <p:style>
-          <a:lnRef idx="1">
-            <a:schemeClr val="accent1"/>
-          </a:lnRef>
-          <a:fillRef idx="3">
-            <a:schemeClr val="accent1"/>
-          </a:fillRef>
-          <a:effectRef idx="2">
-            <a:schemeClr val="accent1"/>
-          </a:effectRef>
-          <a:fontRef idx="minor">
-            <a:schemeClr val="lt1"/>
-          </a:fontRef>
-        </p:style>
-        <p:txBody>
-          <a:bodyPr rtlCol="0" anchor="ctr" lIns="0" rIns="0" tIns="0" bIns="0"/>
-          <a:lstStyle/>
-          <a:p>
-            <a:pPr algn="ctr"/>
-            <a:r>
-              <a:rPr sz="1500" b="1">
-                <a:solidFill>
-                  <a:srgbClr val="202122"/>
-                </a:solidFill>
-                <a:latin typeface="Calibri"/>
-              </a:rPr>
-              <a:t>4</a:t>
-            </a:r>
-          </a:p>
-        </p:txBody>
-      </p:sp>
-      <p:sp>
-        <p:nvSpPr>
-          <p:cNvPr id="20" name="TextBox 19"/>
-          <p:cNvSpPr txBox="1"/>
-          <p:nvPr/>
-        </p:nvSpPr>
-        <p:spPr>
-          <a:xfrm>
-            <a:off x="7055967" y="4224528"/>
-            <a:ext cx="4404207" cy="512064"/>
-          </a:xfrm>
-          <a:prstGeom prst="rect">
-            <a:avLst/>
-          </a:prstGeom>
-          <a:noFill/>
-        </p:spPr>
-        <p:txBody>
-          <a:bodyPr wrap="square" anchor="ctr" lIns="0" rIns="0" tIns="0" bIns="0"/>
-          <a:lstStyle/>
-          <a:p>
-            <a:pPr algn="l"/>
-            <a:r>
-              <a:rPr sz="1900" b="1" i="0">
-                <a:solidFill>
-                  <a:srgbClr val="03306E"/>
-                </a:solidFill>
-                <a:latin typeface="Calibri"/>
-              </a:rPr>
-              <a:t>Algorithmic design</a:t>
-            </a:r>
-          </a:p>
-        </p:txBody>
-      </p:sp>
-      <p:sp>
-        <p:nvSpPr>
-          <p:cNvPr id="21" name="TextBox 20"/>
-          <p:cNvSpPr txBox="1"/>
-          <p:nvPr/>
-        </p:nvSpPr>
-        <p:spPr>
-          <a:xfrm>
-            <a:off x="6461607" y="4892040"/>
-            <a:ext cx="4952847" cy="1143000"/>
-          </a:xfrm>
-          <a:prstGeom prst="rect">
-            <a:avLst/>
-          </a:prstGeom>
-          <a:noFill/>
-        </p:spPr>
-        <p:txBody>
-          <a:bodyPr wrap="square" anchor="t" lIns="0" rIns="0" tIns="0" bIns="0"/>
-          <a:lstStyle/>
-          <a:p>
-            <a:pPr algn="l"/>
-            <a:r>
-              <a:rPr sz="2000" b="0" i="0">
-                <a:solidFill>
-                  <a:srgbClr val="202122"/>
-                </a:solidFill>
-                <a:latin typeface="Calibri"/>
-              </a:rPr>
-              <a:t>Express the solution as clear, ordered steps a computer can follow.</a:t>
+              <a:rPr sz="1900" b="0" i="0">
+                <a:solidFill>
+                  <a:srgbClr val="FFFFFF"/>
+                </a:solidFill>
+                <a:latin typeface="Cambria"/>
+              </a:rPr>
+              <a:t>A cinema booking system: decompose (choose film, pick seats, pay), recognise a pattern (seat choosing is like any grid), abstract (a seat is just row, number, taken or free), then design the algorithm.</a:t>
             </a:r>
           </a:p>
         </p:txBody>
@@ -6973,7 +11136,7 @@
                 </a:solidFill>
                 <a:latin typeface="Cambria"/>
               </a:rPr>
-              <a:t>Weighing up computational thinking</a:t>
+              <a:t>The four components of computational thinking</a:t>
             </a:r>
           </a:p>
         </p:txBody>
@@ -7053,88 +11216,11 @@
         <p:spPr>
           <a:xfrm>
             <a:off x="548640" y="1600200"/>
-            <a:ext cx="5364327" cy="640080"/>
+            <a:ext cx="5410047" cy="2148840"/>
           </a:xfrm>
           <a:prstGeom prst="roundRect">
             <a:avLst>
-              <a:gd name="adj" fmla="val 15000"/>
-            </a:avLst>
-          </a:prstGeom>
-          <a:solidFill>
-            <a:srgbClr val="03306E"/>
-          </a:solidFill>
-          <a:ln>
-            <a:noFill/>
-          </a:ln>
-          <a:effectLst/>
-        </p:spPr>
-        <p:style>
-          <a:lnRef idx="1">
-            <a:schemeClr val="accent1"/>
-          </a:lnRef>
-          <a:fillRef idx="3">
-            <a:schemeClr val="accent1"/>
-          </a:fillRef>
-          <a:effectRef idx="2">
-            <a:schemeClr val="accent1"/>
-          </a:effectRef>
-          <a:fontRef idx="minor">
-            <a:schemeClr val="lt1"/>
-          </a:fontRef>
-        </p:style>
-        <p:txBody>
-          <a:bodyPr rtlCol="0" anchor="ctr"/>
-          <a:lstStyle/>
-          <a:p/>
-        </p:txBody>
-      </p:sp>
-      <p:sp>
-        <p:nvSpPr>
-          <p:cNvPr id="7" name="TextBox 6"/>
-          <p:cNvSpPr txBox="1"/>
-          <p:nvPr/>
-        </p:nvSpPr>
-        <p:spPr>
-          <a:xfrm>
-            <a:off x="777240" y="1600200"/>
-            <a:ext cx="4907127" cy="640080"/>
-          </a:xfrm>
-          <a:prstGeom prst="rect">
-            <a:avLst/>
-          </a:prstGeom>
-          <a:noFill/>
-        </p:spPr>
-        <p:txBody>
-          <a:bodyPr wrap="square" anchor="ctr" lIns="0" rIns="0" tIns="0" bIns="0"/>
-          <a:lstStyle/>
-          <a:p>
-            <a:pPr algn="l"/>
-            <a:r>
-              <a:rPr sz="2000" b="1" i="0">
-                <a:solidFill>
-                  <a:srgbClr val="FFFFFF"/>
-                </a:solidFill>
-                <a:latin typeface="Calibri"/>
-              </a:rPr>
-              <a:t>Benefits</a:t>
-            </a:r>
-          </a:p>
-        </p:txBody>
-      </p:sp>
-      <p:sp>
-        <p:nvSpPr>
-          <p:cNvPr id="8" name="Rounded Rectangle 7"/>
-          <p:cNvSpPr/>
-          <p:nvPr/>
-        </p:nvSpPr>
-        <p:spPr>
-          <a:xfrm>
-            <a:off x="548640" y="2377440"/>
-            <a:ext cx="5364327" cy="3794760"/>
-          </a:xfrm>
-          <a:prstGeom prst="roundRect">
-            <a:avLst>
-              <a:gd name="adj" fmla="val 4000"/>
+              <a:gd name="adj" fmla="val 6000"/>
             </a:avLst>
           </a:prstGeom>
           <a:solidFill>
@@ -7167,129 +11253,20 @@
       </p:sp>
       <p:sp>
         <p:nvSpPr>
-          <p:cNvPr id="9" name="TextBox 8"/>
-          <p:cNvSpPr txBox="1"/>
-          <p:nvPr/>
-        </p:nvSpPr>
-        <p:spPr>
-          <a:xfrm>
-            <a:off x="822959" y="2606040"/>
-            <a:ext cx="4815687" cy="3337560"/>
-          </a:xfrm>
-          <a:prstGeom prst="rect">
-            <a:avLst/>
-          </a:prstGeom>
-          <a:noFill/>
-        </p:spPr>
-        <p:txBody>
-          <a:bodyPr wrap="square" lIns="0" rIns="0" tIns="0" bIns="0">
-            <a:spAutoFit/>
-          </a:bodyPr>
-          <a:lstStyle/>
-          <a:p>
-            <a:pPr marL="274320" indent="-274320">
-              <a:spcAft>
-                <a:spcPts val="990"/>
-              </a:spcAft>
-              <a:buClr>
-                <a:srgbClr val="0645AD"/>
-              </a:buClr>
-              <a:buFont typeface="Arial"/>
-              <a:buChar char="•"/>
-            </a:pPr>
-            <a:r>
-              <a:rPr sz="2200" b="0">
-                <a:solidFill>
-                  <a:srgbClr val="202122"/>
-                </a:solidFill>
-                <a:latin typeface="Calibri"/>
-              </a:rPr>
-              <a:t>Large problems become manageable pieces</a:t>
-            </a:r>
-          </a:p>
-          <a:p>
-            <a:pPr marL="274320" indent="-274320">
-              <a:spcAft>
-                <a:spcPts val="990"/>
-              </a:spcAft>
-              <a:buClr>
-                <a:srgbClr val="0645AD"/>
-              </a:buClr>
-              <a:buFont typeface="Arial"/>
-              <a:buChar char="•"/>
-            </a:pPr>
-            <a:r>
-              <a:rPr sz="2200" b="0">
-                <a:solidFill>
-                  <a:srgbClr val="202122"/>
-                </a:solidFill>
-                <a:latin typeface="Calibri"/>
-              </a:rPr>
-              <a:t>Parts can be built and tested separately</a:t>
-            </a:r>
-          </a:p>
-          <a:p>
-            <a:pPr marL="274320" indent="-274320">
-              <a:spcAft>
-                <a:spcPts val="990"/>
-              </a:spcAft>
-              <a:buClr>
-                <a:srgbClr val="0645AD"/>
-              </a:buClr>
-              <a:buFont typeface="Arial"/>
-              <a:buChar char="•"/>
-            </a:pPr>
-            <a:r>
-              <a:rPr sz="2200" b="0">
-                <a:solidFill>
-                  <a:srgbClr val="202122"/>
-                </a:solidFill>
-                <a:latin typeface="Calibri"/>
-              </a:rPr>
-              <a:t>Reusing patterns saves development time</a:t>
-            </a:r>
-          </a:p>
-          <a:p>
-            <a:pPr marL="274320" indent="-274320">
-              <a:spcAft>
-                <a:spcPts val="990"/>
-              </a:spcAft>
-              <a:buClr>
-                <a:srgbClr val="0645AD"/>
-              </a:buClr>
-              <a:buFont typeface="Arial"/>
-              <a:buChar char="•"/>
-            </a:pPr>
-            <a:r>
-              <a:rPr sz="2200" b="0">
-                <a:solidFill>
-                  <a:srgbClr val="202122"/>
-                </a:solidFill>
-                <a:latin typeface="Calibri"/>
-              </a:rPr>
-              <a:t>Abstraction focuses effort on what matters</a:t>
-            </a:r>
-          </a:p>
-        </p:txBody>
-      </p:sp>
-      <p:sp>
-        <p:nvSpPr>
-          <p:cNvPr id="10" name="Rounded Rectangle 9"/>
+          <p:cNvPr id="7" name="Oval 6"/>
           <p:cNvSpPr/>
           <p:nvPr/>
         </p:nvSpPr>
         <p:spPr>
           <a:xfrm>
-            <a:off x="6278727" y="1600200"/>
-            <a:ext cx="5364327" cy="640080"/>
-          </a:xfrm>
-          <a:prstGeom prst="roundRect">
-            <a:avLst>
-              <a:gd name="adj" fmla="val 15000"/>
-            </a:avLst>
+            <a:off x="777240" y="1828800"/>
+            <a:ext cx="457200" cy="457200"/>
+          </a:xfrm>
+          <a:prstGeom prst="ellipse">
+            <a:avLst/>
           </a:prstGeom>
           <a:solidFill>
-            <a:srgbClr val="0645AD"/>
+            <a:srgbClr val="F2B705"/>
           </a:solidFill>
           <a:ln>
             <a:noFill/>
@@ -7311,21 +11288,32 @@
           </a:fontRef>
         </p:style>
         <p:txBody>
-          <a:bodyPr rtlCol="0" anchor="ctr"/>
-          <a:lstStyle/>
-          <a:p/>
-        </p:txBody>
-      </p:sp>
-      <p:sp>
-        <p:nvSpPr>
-          <p:cNvPr id="11" name="TextBox 10"/>
-          <p:cNvSpPr txBox="1"/>
-          <p:nvPr/>
-        </p:nvSpPr>
-        <p:spPr>
-          <a:xfrm>
-            <a:off x="6507327" y="1600200"/>
-            <a:ext cx="4907127" cy="640080"/>
+          <a:bodyPr rtlCol="0" anchor="ctr" lIns="0" rIns="0" tIns="0" bIns="0"/>
+          <a:lstStyle/>
+          <a:p>
+            <a:pPr algn="ctr"/>
+            <a:r>
+              <a:rPr sz="1500" b="1">
+                <a:solidFill>
+                  <a:srgbClr val="202122"/>
+                </a:solidFill>
+                <a:latin typeface="Calibri"/>
+              </a:rPr>
+              <a:t>1</a:t>
+            </a:r>
+          </a:p>
+        </p:txBody>
+      </p:sp>
+      <p:sp>
+        <p:nvSpPr>
+          <p:cNvPr id="8" name="TextBox 7"/>
+          <p:cNvSpPr txBox="1"/>
+          <p:nvPr/>
+        </p:nvSpPr>
+        <p:spPr>
+          <a:xfrm>
+            <a:off x="1371600" y="1801368"/>
+            <a:ext cx="4404207" cy="512064"/>
           </a:xfrm>
           <a:prstGeom prst="rect">
             <a:avLst/>
@@ -7338,31 +11326,64 @@
           <a:p>
             <a:pPr algn="l"/>
             <a:r>
-              <a:rPr sz="2000" b="1" i="0">
-                <a:solidFill>
-                  <a:srgbClr val="FFFFFF"/>
-                </a:solidFill>
-                <a:latin typeface="Calibri"/>
-              </a:rPr>
-              <a:t>Drawbacks</a:t>
-            </a:r>
-          </a:p>
-        </p:txBody>
-      </p:sp>
-      <p:sp>
-        <p:nvSpPr>
-          <p:cNvPr id="12" name="Rounded Rectangle 11"/>
+              <a:rPr sz="1900" b="1" i="0">
+                <a:solidFill>
+                  <a:srgbClr val="03306E"/>
+                </a:solidFill>
+                <a:latin typeface="Calibri"/>
+              </a:rPr>
+              <a:t>Decomposition</a:t>
+            </a:r>
+          </a:p>
+        </p:txBody>
+      </p:sp>
+      <p:sp>
+        <p:nvSpPr>
+          <p:cNvPr id="9" name="TextBox 8"/>
+          <p:cNvSpPr txBox="1"/>
+          <p:nvPr/>
+        </p:nvSpPr>
+        <p:spPr>
+          <a:xfrm>
+            <a:off x="777240" y="2468880"/>
+            <a:ext cx="4952847" cy="1143000"/>
+          </a:xfrm>
+          <a:prstGeom prst="rect">
+            <a:avLst/>
+          </a:prstGeom>
+          <a:noFill/>
+        </p:spPr>
+        <p:txBody>
+          <a:bodyPr wrap="square" anchor="t" lIns="0" rIns="0" tIns="0" bIns="0"/>
+          <a:lstStyle/>
+          <a:p>
+            <a:pPr algn="l"/>
+            <a:r>
+              <a:rPr sz="1800" b="0" i="0">
+                <a:solidFill>
+                  <a:srgbClr val="202122"/>
+                </a:solidFill>
+                <a:latin typeface="Calibri"/>
+              </a:rPr>
+              <a:t>Break a problem or solution into smaller, manageable parts. Show it with block diagrams, flowcharts, code or written descriptions.</a:t>
+            </a:r>
+          </a:p>
+        </p:txBody>
+      </p:sp>
+      <p:sp>
+        <p:nvSpPr>
+          <p:cNvPr id="10" name="Rounded Rectangle 9"/>
           <p:cNvSpPr/>
           <p:nvPr/>
         </p:nvSpPr>
         <p:spPr>
           <a:xfrm>
-            <a:off x="6278727" y="2377440"/>
-            <a:ext cx="5364327" cy="3794760"/>
+            <a:off x="6233007" y="1600200"/>
+            <a:ext cx="5410047" cy="2148840"/>
           </a:xfrm>
           <a:prstGeom prst="roundRect">
             <a:avLst>
-              <a:gd name="adj" fmla="val 4000"/>
+              <a:gd name="adj" fmla="val 6000"/>
             </a:avLst>
           </a:prstGeom>
           <a:solidFill>
@@ -7395,107 +11416,445 @@
       </p:sp>
       <p:sp>
         <p:nvSpPr>
+          <p:cNvPr id="11" name="Oval 10"/>
+          <p:cNvSpPr/>
+          <p:nvPr/>
+        </p:nvSpPr>
+        <p:spPr>
+          <a:xfrm>
+            <a:off x="6461607" y="1828800"/>
+            <a:ext cx="457200" cy="457200"/>
+          </a:xfrm>
+          <a:prstGeom prst="ellipse">
+            <a:avLst/>
+          </a:prstGeom>
+          <a:solidFill>
+            <a:srgbClr val="F2B705"/>
+          </a:solidFill>
+          <a:ln>
+            <a:noFill/>
+          </a:ln>
+          <a:effectLst/>
+        </p:spPr>
+        <p:style>
+          <a:lnRef idx="1">
+            <a:schemeClr val="accent1"/>
+          </a:lnRef>
+          <a:fillRef idx="3">
+            <a:schemeClr val="accent1"/>
+          </a:fillRef>
+          <a:effectRef idx="2">
+            <a:schemeClr val="accent1"/>
+          </a:effectRef>
+          <a:fontRef idx="minor">
+            <a:schemeClr val="lt1"/>
+          </a:fontRef>
+        </p:style>
+        <p:txBody>
+          <a:bodyPr rtlCol="0" anchor="ctr" lIns="0" rIns="0" tIns="0" bIns="0"/>
+          <a:lstStyle/>
+          <a:p>
+            <a:pPr algn="ctr"/>
+            <a:r>
+              <a:rPr sz="1500" b="1">
+                <a:solidFill>
+                  <a:srgbClr val="202122"/>
+                </a:solidFill>
+                <a:latin typeface="Calibri"/>
+              </a:rPr>
+              <a:t>2</a:t>
+            </a:r>
+          </a:p>
+        </p:txBody>
+      </p:sp>
+      <p:sp>
+        <p:nvSpPr>
+          <p:cNvPr id="12" name="TextBox 11"/>
+          <p:cNvSpPr txBox="1"/>
+          <p:nvPr/>
+        </p:nvSpPr>
+        <p:spPr>
+          <a:xfrm>
+            <a:off x="7055967" y="1801368"/>
+            <a:ext cx="4404207" cy="512064"/>
+          </a:xfrm>
+          <a:prstGeom prst="rect">
+            <a:avLst/>
+          </a:prstGeom>
+          <a:noFill/>
+        </p:spPr>
+        <p:txBody>
+          <a:bodyPr wrap="square" anchor="ctr" lIns="0" rIns="0" tIns="0" bIns="0"/>
+          <a:lstStyle/>
+          <a:p>
+            <a:pPr algn="l"/>
+            <a:r>
+              <a:rPr sz="1900" b="1" i="0">
+                <a:solidFill>
+                  <a:srgbClr val="03306E"/>
+                </a:solidFill>
+                <a:latin typeface="Calibri"/>
+              </a:rPr>
+              <a:t>Pattern recognition</a:t>
+            </a:r>
+          </a:p>
+        </p:txBody>
+      </p:sp>
+      <p:sp>
+        <p:nvSpPr>
           <p:cNvPr id="13" name="TextBox 12"/>
           <p:cNvSpPr txBox="1"/>
           <p:nvPr/>
         </p:nvSpPr>
         <p:spPr>
           <a:xfrm>
-            <a:off x="6553047" y="2606040"/>
-            <a:ext cx="4815687" cy="3337560"/>
-          </a:xfrm>
-          <a:prstGeom prst="rect">
-            <a:avLst/>
-          </a:prstGeom>
-          <a:noFill/>
-        </p:spPr>
-        <p:txBody>
-          <a:bodyPr wrap="square" lIns="0" rIns="0" tIns="0" bIns="0">
-            <a:spAutoFit/>
-          </a:bodyPr>
-          <a:lstStyle/>
-          <a:p>
-            <a:pPr marL="274320" indent="-274320">
-              <a:spcAft>
-                <a:spcPts val="990"/>
-              </a:spcAft>
-              <a:buClr>
-                <a:srgbClr val="0645AD"/>
-              </a:buClr>
-              <a:buFont typeface="Arial"/>
-              <a:buChar char="•"/>
-            </a:pPr>
-            <a:r>
-              <a:rPr sz="2200" b="0">
+            <a:off x="6461607" y="2468880"/>
+            <a:ext cx="4952847" cy="1143000"/>
+          </a:xfrm>
+          <a:prstGeom prst="rect">
+            <a:avLst/>
+          </a:prstGeom>
+          <a:noFill/>
+        </p:spPr>
+        <p:txBody>
+          <a:bodyPr wrap="square" anchor="t" lIns="0" rIns="0" tIns="0" bIns="0"/>
+          <a:lstStyle/>
+          <a:p>
+            <a:pPr algn="l"/>
+            <a:r>
+              <a:rPr sz="2000" b="0" i="0">
                 <a:solidFill>
                   <a:srgbClr val="202122"/>
                 </a:solidFill>
                 <a:latin typeface="Calibri"/>
               </a:rPr>
-              <a:t>Decomposing takes time up front</a:t>
-            </a:r>
-          </a:p>
-          <a:p>
-            <a:pPr marL="274320" indent="-274320">
-              <a:spcAft>
-                <a:spcPts val="990"/>
-              </a:spcAft>
-              <a:buClr>
-                <a:srgbClr val="0645AD"/>
-              </a:buClr>
-              <a:buFont typeface="Arial"/>
-              <a:buChar char="•"/>
-            </a:pPr>
-            <a:r>
-              <a:rPr sz="2200" b="0">
+              <a:t>Spot similarities within and between problems, and reuse solutions that worked before.</a:t>
+            </a:r>
+          </a:p>
+        </p:txBody>
+      </p:sp>
+      <p:sp>
+        <p:nvSpPr>
+          <p:cNvPr id="14" name="Rounded Rectangle 13"/>
+          <p:cNvSpPr/>
+          <p:nvPr/>
+        </p:nvSpPr>
+        <p:spPr>
+          <a:xfrm>
+            <a:off x="548640" y="4023360"/>
+            <a:ext cx="5410047" cy="2148840"/>
+          </a:xfrm>
+          <a:prstGeom prst="roundRect">
+            <a:avLst>
+              <a:gd name="adj" fmla="val 6000"/>
+            </a:avLst>
+          </a:prstGeom>
+          <a:solidFill>
+            <a:srgbClr val="EAF3FF"/>
+          </a:solidFill>
+          <a:ln>
+            <a:noFill/>
+          </a:ln>
+          <a:effectLst/>
+        </p:spPr>
+        <p:style>
+          <a:lnRef idx="1">
+            <a:schemeClr val="accent1"/>
+          </a:lnRef>
+          <a:fillRef idx="3">
+            <a:schemeClr val="accent1"/>
+          </a:fillRef>
+          <a:effectRef idx="2">
+            <a:schemeClr val="accent1"/>
+          </a:effectRef>
+          <a:fontRef idx="minor">
+            <a:schemeClr val="lt1"/>
+          </a:fontRef>
+        </p:style>
+        <p:txBody>
+          <a:bodyPr rtlCol="0" anchor="ctr"/>
+          <a:lstStyle/>
+          <a:p/>
+        </p:txBody>
+      </p:sp>
+      <p:sp>
+        <p:nvSpPr>
+          <p:cNvPr id="15" name="Oval 14"/>
+          <p:cNvSpPr/>
+          <p:nvPr/>
+        </p:nvSpPr>
+        <p:spPr>
+          <a:xfrm>
+            <a:off x="777240" y="4251960"/>
+            <a:ext cx="457200" cy="457200"/>
+          </a:xfrm>
+          <a:prstGeom prst="ellipse">
+            <a:avLst/>
+          </a:prstGeom>
+          <a:solidFill>
+            <a:srgbClr val="F2B705"/>
+          </a:solidFill>
+          <a:ln>
+            <a:noFill/>
+          </a:ln>
+          <a:effectLst/>
+        </p:spPr>
+        <p:style>
+          <a:lnRef idx="1">
+            <a:schemeClr val="accent1"/>
+          </a:lnRef>
+          <a:fillRef idx="3">
+            <a:schemeClr val="accent1"/>
+          </a:fillRef>
+          <a:effectRef idx="2">
+            <a:schemeClr val="accent1"/>
+          </a:effectRef>
+          <a:fontRef idx="minor">
+            <a:schemeClr val="lt1"/>
+          </a:fontRef>
+        </p:style>
+        <p:txBody>
+          <a:bodyPr rtlCol="0" anchor="ctr" lIns="0" rIns="0" tIns="0" bIns="0"/>
+          <a:lstStyle/>
+          <a:p>
+            <a:pPr algn="ctr"/>
+            <a:r>
+              <a:rPr sz="1500" b="1">
                 <a:solidFill>
                   <a:srgbClr val="202122"/>
                 </a:solidFill>
                 <a:latin typeface="Calibri"/>
               </a:rPr>
-              <a:t>Over-abstraction can hide an important detail</a:t>
-            </a:r>
-          </a:p>
-          <a:p>
-            <a:pPr marL="274320" indent="-274320">
-              <a:spcAft>
-                <a:spcPts val="990"/>
-              </a:spcAft>
-              <a:buClr>
-                <a:srgbClr val="0645AD"/>
-              </a:buClr>
-              <a:buFont typeface="Arial"/>
-              <a:buChar char="•"/>
-            </a:pPr>
-            <a:r>
-              <a:rPr sz="2200" b="0">
+              <a:t>3</a:t>
+            </a:r>
+          </a:p>
+        </p:txBody>
+      </p:sp>
+      <p:sp>
+        <p:nvSpPr>
+          <p:cNvPr id="16" name="TextBox 15"/>
+          <p:cNvSpPr txBox="1"/>
+          <p:nvPr/>
+        </p:nvSpPr>
+        <p:spPr>
+          <a:xfrm>
+            <a:off x="1371600" y="4224528"/>
+            <a:ext cx="4404207" cy="512064"/>
+          </a:xfrm>
+          <a:prstGeom prst="rect">
+            <a:avLst/>
+          </a:prstGeom>
+          <a:noFill/>
+        </p:spPr>
+        <p:txBody>
+          <a:bodyPr wrap="square" anchor="ctr" lIns="0" rIns="0" tIns="0" bIns="0"/>
+          <a:lstStyle/>
+          <a:p>
+            <a:pPr algn="l"/>
+            <a:r>
+              <a:rPr sz="1900" b="1" i="0">
+                <a:solidFill>
+                  <a:srgbClr val="03306E"/>
+                </a:solidFill>
+                <a:latin typeface="Calibri"/>
+              </a:rPr>
+              <a:t>Abstraction</a:t>
+            </a:r>
+          </a:p>
+        </p:txBody>
+      </p:sp>
+      <p:sp>
+        <p:nvSpPr>
+          <p:cNvPr id="17" name="TextBox 16"/>
+          <p:cNvSpPr txBox="1"/>
+          <p:nvPr/>
+        </p:nvSpPr>
+        <p:spPr>
+          <a:xfrm>
+            <a:off x="777240" y="4892040"/>
+            <a:ext cx="4952847" cy="1143000"/>
+          </a:xfrm>
+          <a:prstGeom prst="rect">
+            <a:avLst/>
+          </a:prstGeom>
+          <a:noFill/>
+        </p:spPr>
+        <p:txBody>
+          <a:bodyPr wrap="square" anchor="t" lIns="0" rIns="0" tIns="0" bIns="0"/>
+          <a:lstStyle/>
+          <a:p>
+            <a:pPr algn="l"/>
+            <a:r>
+              <a:rPr sz="2000" b="0" i="0">
                 <a:solidFill>
                   <a:srgbClr val="202122"/>
                 </a:solidFill>
                 <a:latin typeface="Calibri"/>
               </a:rPr>
-              <a:t>A false pattern leads to the wrong solution</a:t>
-            </a:r>
-          </a:p>
-          <a:p>
-            <a:pPr marL="274320" indent="-274320">
-              <a:spcAft>
-                <a:spcPts val="990"/>
-              </a:spcAft>
-              <a:buClr>
-                <a:srgbClr val="0645AD"/>
-              </a:buClr>
-              <a:buFont typeface="Arial"/>
-              <a:buChar char="•"/>
-            </a:pPr>
-            <a:r>
-              <a:rPr sz="2200" b="0">
+              <a:t>Keep only what matters: the inputs, outputs, what varies, what stays constant and the key repeated actions.</a:t>
+            </a:r>
+          </a:p>
+        </p:txBody>
+      </p:sp>
+      <p:sp>
+        <p:nvSpPr>
+          <p:cNvPr id="18" name="Rounded Rectangle 17"/>
+          <p:cNvSpPr/>
+          <p:nvPr/>
+        </p:nvSpPr>
+        <p:spPr>
+          <a:xfrm>
+            <a:off x="6233007" y="4023360"/>
+            <a:ext cx="5410047" cy="2148840"/>
+          </a:xfrm>
+          <a:prstGeom prst="roundRect">
+            <a:avLst>
+              <a:gd name="adj" fmla="val 6000"/>
+            </a:avLst>
+          </a:prstGeom>
+          <a:solidFill>
+            <a:srgbClr val="EAF3FF"/>
+          </a:solidFill>
+          <a:ln>
+            <a:noFill/>
+          </a:ln>
+          <a:effectLst/>
+        </p:spPr>
+        <p:style>
+          <a:lnRef idx="1">
+            <a:schemeClr val="accent1"/>
+          </a:lnRef>
+          <a:fillRef idx="3">
+            <a:schemeClr val="accent1"/>
+          </a:fillRef>
+          <a:effectRef idx="2">
+            <a:schemeClr val="accent1"/>
+          </a:effectRef>
+          <a:fontRef idx="minor">
+            <a:schemeClr val="lt1"/>
+          </a:fontRef>
+        </p:style>
+        <p:txBody>
+          <a:bodyPr rtlCol="0" anchor="ctr"/>
+          <a:lstStyle/>
+          <a:p/>
+        </p:txBody>
+      </p:sp>
+      <p:sp>
+        <p:nvSpPr>
+          <p:cNvPr id="19" name="Oval 18"/>
+          <p:cNvSpPr/>
+          <p:nvPr/>
+        </p:nvSpPr>
+        <p:spPr>
+          <a:xfrm>
+            <a:off x="6461607" y="4251960"/>
+            <a:ext cx="457200" cy="457200"/>
+          </a:xfrm>
+          <a:prstGeom prst="ellipse">
+            <a:avLst/>
+          </a:prstGeom>
+          <a:solidFill>
+            <a:srgbClr val="F2B705"/>
+          </a:solidFill>
+          <a:ln>
+            <a:noFill/>
+          </a:ln>
+          <a:effectLst/>
+        </p:spPr>
+        <p:style>
+          <a:lnRef idx="1">
+            <a:schemeClr val="accent1"/>
+          </a:lnRef>
+          <a:fillRef idx="3">
+            <a:schemeClr val="accent1"/>
+          </a:fillRef>
+          <a:effectRef idx="2">
+            <a:schemeClr val="accent1"/>
+          </a:effectRef>
+          <a:fontRef idx="minor">
+            <a:schemeClr val="lt1"/>
+          </a:fontRef>
+        </p:style>
+        <p:txBody>
+          <a:bodyPr rtlCol="0" anchor="ctr" lIns="0" rIns="0" tIns="0" bIns="0"/>
+          <a:lstStyle/>
+          <a:p>
+            <a:pPr algn="ctr"/>
+            <a:r>
+              <a:rPr sz="1500" b="1">
                 <a:solidFill>
                   <a:srgbClr val="202122"/>
                 </a:solidFill>
                 <a:latin typeface="Calibri"/>
               </a:rPr>
-              <a:t>Parts still have to be integrated</a:t>
+              <a:t>4</a:t>
+            </a:r>
+          </a:p>
+        </p:txBody>
+      </p:sp>
+      <p:sp>
+        <p:nvSpPr>
+          <p:cNvPr id="20" name="TextBox 19"/>
+          <p:cNvSpPr txBox="1"/>
+          <p:nvPr/>
+        </p:nvSpPr>
+        <p:spPr>
+          <a:xfrm>
+            <a:off x="7055967" y="4224528"/>
+            <a:ext cx="4404207" cy="512064"/>
+          </a:xfrm>
+          <a:prstGeom prst="rect">
+            <a:avLst/>
+          </a:prstGeom>
+          <a:noFill/>
+        </p:spPr>
+        <p:txBody>
+          <a:bodyPr wrap="square" anchor="ctr" lIns="0" rIns="0" tIns="0" bIns="0"/>
+          <a:lstStyle/>
+          <a:p>
+            <a:pPr algn="l"/>
+            <a:r>
+              <a:rPr sz="1900" b="1" i="0">
+                <a:solidFill>
+                  <a:srgbClr val="03306E"/>
+                </a:solidFill>
+                <a:latin typeface="Calibri"/>
+              </a:rPr>
+              <a:t>Algorithmic design</a:t>
+            </a:r>
+          </a:p>
+        </p:txBody>
+      </p:sp>
+      <p:sp>
+        <p:nvSpPr>
+          <p:cNvPr id="21" name="TextBox 20"/>
+          <p:cNvSpPr txBox="1"/>
+          <p:nvPr/>
+        </p:nvSpPr>
+        <p:spPr>
+          <a:xfrm>
+            <a:off x="6461607" y="4892040"/>
+            <a:ext cx="4952847" cy="1143000"/>
+          </a:xfrm>
+          <a:prstGeom prst="rect">
+            <a:avLst/>
+          </a:prstGeom>
+          <a:noFill/>
+        </p:spPr>
+        <p:txBody>
+          <a:bodyPr wrap="square" anchor="t" lIns="0" rIns="0" tIns="0" bIns="0"/>
+          <a:lstStyle/>
+          <a:p>
+            <a:pPr algn="l"/>
+            <a:r>
+              <a:rPr sz="2000" b="0" i="0">
+                <a:solidFill>
+                  <a:srgbClr val="202122"/>
+                </a:solidFill>
+                <a:latin typeface="Calibri"/>
+              </a:rPr>
+              <a:t>Express the solution as clear, ordered steps a computer can follow.</a:t>
             </a:r>
           </a:p>
         </p:txBody>
@@ -7581,13 +11940,13 @@
           <a:p>
             <a:pPr algn="l"/>
             <a:r>
-              <a:rPr sz="3200" b="1" i="0">
+              <a:rPr sz="2800" b="1" i="0">
                 <a:solidFill>
                   <a:srgbClr val="03306E"/>
                 </a:solidFill>
                 <a:latin typeface="Cambria"/>
               </a:rPr>
-              <a:t>Three ways to express an algorithm</a:t>
+              <a:t>Quick check: The four components of computational thinking</a:t>
             </a:r>
           </a:p>
         </p:txBody>
@@ -7654,6 +12013,1486 @@
                 <a:latin typeface="Calibri"/>
               </a:rPr>
               <a:t>5</a:t>
+            </a:r>
+          </a:p>
+        </p:txBody>
+      </p:sp>
+      <p:sp>
+        <p:nvSpPr>
+          <p:cNvPr id="6" name="Oval 5"/>
+          <p:cNvSpPr/>
+          <p:nvPr/>
+        </p:nvSpPr>
+        <p:spPr>
+          <a:xfrm>
+            <a:off x="548640" y="1691640"/>
+            <a:ext cx="502920" cy="502920"/>
+          </a:xfrm>
+          <a:prstGeom prst="ellipse">
+            <a:avLst/>
+          </a:prstGeom>
+          <a:solidFill>
+            <a:srgbClr val="F2B705"/>
+          </a:solidFill>
+          <a:ln>
+            <a:noFill/>
+          </a:ln>
+          <a:effectLst/>
+        </p:spPr>
+        <p:style>
+          <a:lnRef idx="1">
+            <a:schemeClr val="accent1"/>
+          </a:lnRef>
+          <a:fillRef idx="3">
+            <a:schemeClr val="accent1"/>
+          </a:fillRef>
+          <a:effectRef idx="2">
+            <a:schemeClr val="accent1"/>
+          </a:effectRef>
+          <a:fontRef idx="minor">
+            <a:schemeClr val="lt1"/>
+          </a:fontRef>
+        </p:style>
+        <p:txBody>
+          <a:bodyPr rtlCol="0" anchor="ctr" lIns="0" rIns="0" tIns="0" bIns="0"/>
+          <a:lstStyle/>
+          <a:p>
+            <a:pPr algn="ctr"/>
+            <a:r>
+              <a:rPr sz="1600" b="1">
+                <a:solidFill>
+                  <a:srgbClr val="202122"/>
+                </a:solidFill>
+                <a:latin typeface="Calibri"/>
+              </a:rPr>
+              <a:t>1</a:t>
+            </a:r>
+          </a:p>
+        </p:txBody>
+      </p:sp>
+      <p:sp>
+        <p:nvSpPr>
+          <p:cNvPr id="7" name="TextBox 6"/>
+          <p:cNvSpPr txBox="1"/>
+          <p:nvPr/>
+        </p:nvSpPr>
+        <p:spPr>
+          <a:xfrm>
+            <a:off x="1371600" y="1645920"/>
+            <a:ext cx="10271455" cy="1188720"/>
+          </a:xfrm>
+          <a:prstGeom prst="rect">
+            <a:avLst/>
+          </a:prstGeom>
+          <a:noFill/>
+        </p:spPr>
+        <p:txBody>
+          <a:bodyPr wrap="square" anchor="t" lIns="0" rIns="0" tIns="0" bIns="0"/>
+          <a:lstStyle/>
+          <a:p>
+            <a:pPr algn="l"/>
+            <a:r>
+              <a:rPr sz="2400" b="0" i="0">
+                <a:solidFill>
+                  <a:srgbClr val="202122"/>
+                </a:solidFill>
+                <a:latin typeface="Calibri"/>
+              </a:rPr>
+              <a:t>What is abstraction?</a:t>
+            </a:r>
+          </a:p>
+        </p:txBody>
+      </p:sp>
+      <p:sp>
+        <p:nvSpPr>
+          <p:cNvPr id="8" name="Oval 7"/>
+          <p:cNvSpPr/>
+          <p:nvPr/>
+        </p:nvSpPr>
+        <p:spPr>
+          <a:xfrm>
+            <a:off x="548640" y="3108960"/>
+            <a:ext cx="502920" cy="502920"/>
+          </a:xfrm>
+          <a:prstGeom prst="ellipse">
+            <a:avLst/>
+          </a:prstGeom>
+          <a:solidFill>
+            <a:srgbClr val="F2B705"/>
+          </a:solidFill>
+          <a:ln>
+            <a:noFill/>
+          </a:ln>
+          <a:effectLst/>
+        </p:spPr>
+        <p:style>
+          <a:lnRef idx="1">
+            <a:schemeClr val="accent1"/>
+          </a:lnRef>
+          <a:fillRef idx="3">
+            <a:schemeClr val="accent1"/>
+          </a:fillRef>
+          <a:effectRef idx="2">
+            <a:schemeClr val="accent1"/>
+          </a:effectRef>
+          <a:fontRef idx="minor">
+            <a:schemeClr val="lt1"/>
+          </a:fontRef>
+        </p:style>
+        <p:txBody>
+          <a:bodyPr rtlCol="0" anchor="ctr" lIns="0" rIns="0" tIns="0" bIns="0"/>
+          <a:lstStyle/>
+          <a:p>
+            <a:pPr algn="ctr"/>
+            <a:r>
+              <a:rPr sz="1600" b="1">
+                <a:solidFill>
+                  <a:srgbClr val="202122"/>
+                </a:solidFill>
+                <a:latin typeface="Calibri"/>
+              </a:rPr>
+              <a:t>2</a:t>
+            </a:r>
+          </a:p>
+        </p:txBody>
+      </p:sp>
+      <p:sp>
+        <p:nvSpPr>
+          <p:cNvPr id="9" name="TextBox 8"/>
+          <p:cNvSpPr txBox="1"/>
+          <p:nvPr/>
+        </p:nvSpPr>
+        <p:spPr>
+          <a:xfrm>
+            <a:off x="1371600" y="3063240"/>
+            <a:ext cx="10271455" cy="1188720"/>
+          </a:xfrm>
+          <a:prstGeom prst="rect">
+            <a:avLst/>
+          </a:prstGeom>
+          <a:noFill/>
+        </p:spPr>
+        <p:txBody>
+          <a:bodyPr wrap="square" anchor="t" lIns="0" rIns="0" tIns="0" bIns="0"/>
+          <a:lstStyle/>
+          <a:p>
+            <a:pPr algn="l"/>
+            <a:r>
+              <a:rPr sz="2400" b="0" i="0">
+                <a:solidFill>
+                  <a:srgbClr val="202122"/>
+                </a:solidFill>
+                <a:latin typeface="Calibri"/>
+              </a:rPr>
+              <a:t>How does pattern recognition save time?</a:t>
+            </a:r>
+          </a:p>
+        </p:txBody>
+      </p:sp>
+      <p:sp>
+        <p:nvSpPr>
+          <p:cNvPr id="10" name="Oval 9"/>
+          <p:cNvSpPr/>
+          <p:nvPr/>
+        </p:nvSpPr>
+        <p:spPr>
+          <a:xfrm>
+            <a:off x="548640" y="4526280"/>
+            <a:ext cx="502920" cy="502920"/>
+          </a:xfrm>
+          <a:prstGeom prst="ellipse">
+            <a:avLst/>
+          </a:prstGeom>
+          <a:solidFill>
+            <a:srgbClr val="F2B705"/>
+          </a:solidFill>
+          <a:ln>
+            <a:noFill/>
+          </a:ln>
+          <a:effectLst/>
+        </p:spPr>
+        <p:style>
+          <a:lnRef idx="1">
+            <a:schemeClr val="accent1"/>
+          </a:lnRef>
+          <a:fillRef idx="3">
+            <a:schemeClr val="accent1"/>
+          </a:fillRef>
+          <a:effectRef idx="2">
+            <a:schemeClr val="accent1"/>
+          </a:effectRef>
+          <a:fontRef idx="minor">
+            <a:schemeClr val="lt1"/>
+          </a:fontRef>
+        </p:style>
+        <p:txBody>
+          <a:bodyPr rtlCol="0" anchor="ctr" lIns="0" rIns="0" tIns="0" bIns="0"/>
+          <a:lstStyle/>
+          <a:p>
+            <a:pPr algn="ctr"/>
+            <a:r>
+              <a:rPr sz="1600" b="1">
+                <a:solidFill>
+                  <a:srgbClr val="202122"/>
+                </a:solidFill>
+                <a:latin typeface="Calibri"/>
+              </a:rPr>
+              <a:t>3</a:t>
+            </a:r>
+          </a:p>
+        </p:txBody>
+      </p:sp>
+      <p:sp>
+        <p:nvSpPr>
+          <p:cNvPr id="11" name="TextBox 10"/>
+          <p:cNvSpPr txBox="1"/>
+          <p:nvPr/>
+        </p:nvSpPr>
+        <p:spPr>
+          <a:xfrm>
+            <a:off x="1371600" y="4480560"/>
+            <a:ext cx="10271455" cy="1188720"/>
+          </a:xfrm>
+          <a:prstGeom prst="rect">
+            <a:avLst/>
+          </a:prstGeom>
+          <a:noFill/>
+        </p:spPr>
+        <p:txBody>
+          <a:bodyPr wrap="square" anchor="t" lIns="0" rIns="0" tIns="0" bIns="0"/>
+          <a:lstStyle/>
+          <a:p>
+            <a:pPr algn="l"/>
+            <a:r>
+              <a:rPr sz="2400" b="0" i="0">
+                <a:solidFill>
+                  <a:srgbClr val="202122"/>
+                </a:solidFill>
+                <a:latin typeface="Calibri"/>
+              </a:rPr>
+              <a:t>Decompose a login system into three parts.</a:t>
+            </a:r>
+          </a:p>
+        </p:txBody>
+      </p:sp>
+      <p:sp>
+        <p:nvSpPr>
+          <p:cNvPr id="12" name="TextBox 11"/>
+          <p:cNvSpPr txBox="1"/>
+          <p:nvPr/>
+        </p:nvSpPr>
+        <p:spPr>
+          <a:xfrm>
+            <a:off x="548640" y="5852160"/>
+            <a:ext cx="11094415" cy="365760"/>
+          </a:xfrm>
+          <a:prstGeom prst="rect">
+            <a:avLst/>
+          </a:prstGeom>
+          <a:noFill/>
+        </p:spPr>
+        <p:txBody>
+          <a:bodyPr wrap="square" anchor="t" lIns="0" rIns="0" tIns="0" bIns="0"/>
+          <a:lstStyle/>
+          <a:p>
+            <a:pPr algn="l"/>
+            <a:r>
+              <a:rPr sz="1300" b="0" i="1">
+                <a:solidFill>
+                  <a:srgbClr val="54595D"/>
+                </a:solidFill>
+                <a:latin typeface="Calibri"/>
+              </a:rPr>
+              <a:t>Answer on mini whiteboards or in your book. Answers are in the speaker notes.</a:t>
+            </a:r>
+          </a:p>
+        </p:txBody>
+      </p:sp>
+    </p:spTree>
+  </p:cSld>
+  <p:clrMapOvr>
+    <a:masterClrMapping/>
+  </p:clrMapOvr>
+</p:sld>
+</file>
+
+<file path=ppt/slides/slide6.xml><?xml version="1.0" encoding="utf-8"?>
+<p:sld xmlns:a="http://schemas.openxmlformats.org/drawingml/2006/main" xmlns:p="http://schemas.openxmlformats.org/presentationml/2006/main" xmlns:r="http://schemas.openxmlformats.org/officeDocument/2006/relationships">
+  <p:cSld>
+    <p:bg>
+      <p:bgPr>
+        <a:solidFill>
+          <a:srgbClr val="FFFFFF"/>
+        </a:solidFill>
+        <a:effectLst/>
+      </p:bgPr>
+    </p:bg>
+    <p:spTree>
+      <p:nvGrpSpPr>
+        <p:cNvPr id="1" name=""/>
+        <p:cNvGrpSpPr/>
+        <p:nvPr/>
+      </p:nvGrpSpPr>
+      <p:grpSpPr/>
+      <p:sp>
+        <p:nvSpPr>
+          <p:cNvPr id="2" name="TextBox 1"/>
+          <p:cNvSpPr txBox="1"/>
+          <p:nvPr/>
+        </p:nvSpPr>
+        <p:spPr>
+          <a:xfrm>
+            <a:off x="548640" y="320040"/>
+            <a:ext cx="11094415" cy="274320"/>
+          </a:xfrm>
+          <a:prstGeom prst="rect">
+            <a:avLst/>
+          </a:prstGeom>
+          <a:noFill/>
+        </p:spPr>
+        <p:txBody>
+          <a:bodyPr wrap="square" anchor="t" lIns="0" rIns="0" tIns="0" bIns="0"/>
+          <a:lstStyle/>
+          <a:p>
+            <a:pPr algn="l"/>
+            <a:r>
+              <a:rPr sz="1100" b="1" i="0">
+                <a:solidFill>
+                  <a:srgbClr val="54595D"/>
+                </a:solidFill>
+                <a:latin typeface="Calibri"/>
+              </a:rPr>
+              <a:t>CORE COMPONENT  ·  Core Paper 1</a:t>
+            </a:r>
+          </a:p>
+        </p:txBody>
+      </p:sp>
+      <p:sp>
+        <p:nvSpPr>
+          <p:cNvPr id="3" name="TextBox 2"/>
+          <p:cNvSpPr txBox="1"/>
+          <p:nvPr/>
+        </p:nvSpPr>
+        <p:spPr>
+          <a:xfrm>
+            <a:off x="548640" y="566928"/>
+            <a:ext cx="11094415" cy="822960"/>
+          </a:xfrm>
+          <a:prstGeom prst="rect">
+            <a:avLst/>
+          </a:prstGeom>
+          <a:noFill/>
+        </p:spPr>
+        <p:txBody>
+          <a:bodyPr wrap="square" anchor="ctr" lIns="0" rIns="0" tIns="0" bIns="0"/>
+          <a:lstStyle/>
+          <a:p>
+            <a:pPr algn="l"/>
+            <a:r>
+              <a:rPr sz="3200" b="1" i="0">
+                <a:solidFill>
+                  <a:srgbClr val="03306E"/>
+                </a:solidFill>
+                <a:latin typeface="Cambria"/>
+              </a:rPr>
+              <a:t>Weighing up computational thinking</a:t>
+            </a:r>
+          </a:p>
+        </p:txBody>
+      </p:sp>
+      <p:sp>
+        <p:nvSpPr>
+          <p:cNvPr id="4" name="TextBox 3"/>
+          <p:cNvSpPr txBox="1"/>
+          <p:nvPr/>
+        </p:nvSpPr>
+        <p:spPr>
+          <a:xfrm>
+            <a:off x="548640" y="6446520"/>
+            <a:ext cx="8229600" cy="274320"/>
+          </a:xfrm>
+          <a:prstGeom prst="rect">
+            <a:avLst/>
+          </a:prstGeom>
+          <a:noFill/>
+        </p:spPr>
+        <p:txBody>
+          <a:bodyPr wrap="square" anchor="t" lIns="0" rIns="0" tIns="0" bIns="0"/>
+          <a:lstStyle/>
+          <a:p>
+            <a:pPr algn="l"/>
+            <a:r>
+              <a:rPr sz="1000" b="0" i="0">
+                <a:solidFill>
+                  <a:srgbClr val="54595D"/>
+                </a:solidFill>
+                <a:latin typeface="Calibri"/>
+              </a:rPr>
+              <a:t>Digital Software Development T Level  ·  Computational Thinking and Algorithms</a:t>
+            </a:r>
+          </a:p>
+        </p:txBody>
+      </p:sp>
+      <p:sp>
+        <p:nvSpPr>
+          <p:cNvPr id="5" name="TextBox 4"/>
+          <p:cNvSpPr txBox="1"/>
+          <p:nvPr/>
+        </p:nvSpPr>
+        <p:spPr>
+          <a:xfrm>
+            <a:off x="10728655" y="6446520"/>
+            <a:ext cx="914400" cy="274320"/>
+          </a:xfrm>
+          <a:prstGeom prst="rect">
+            <a:avLst/>
+          </a:prstGeom>
+          <a:noFill/>
+        </p:spPr>
+        <p:txBody>
+          <a:bodyPr wrap="square" anchor="t" lIns="0" rIns="0" tIns="0" bIns="0"/>
+          <a:lstStyle/>
+          <a:p>
+            <a:pPr algn="r"/>
+            <a:r>
+              <a:rPr sz="1000" b="0" i="0">
+                <a:solidFill>
+                  <a:srgbClr val="54595D"/>
+                </a:solidFill>
+                <a:latin typeface="Calibri"/>
+              </a:rPr>
+              <a:t>6</a:t>
+            </a:r>
+          </a:p>
+        </p:txBody>
+      </p:sp>
+      <p:sp>
+        <p:nvSpPr>
+          <p:cNvPr id="6" name="Rounded Rectangle 5"/>
+          <p:cNvSpPr/>
+          <p:nvPr/>
+        </p:nvSpPr>
+        <p:spPr>
+          <a:xfrm>
+            <a:off x="548640" y="1600200"/>
+            <a:ext cx="5364327" cy="640080"/>
+          </a:xfrm>
+          <a:prstGeom prst="roundRect">
+            <a:avLst>
+              <a:gd name="adj" fmla="val 15000"/>
+            </a:avLst>
+          </a:prstGeom>
+          <a:solidFill>
+            <a:srgbClr val="03306E"/>
+          </a:solidFill>
+          <a:ln>
+            <a:noFill/>
+          </a:ln>
+          <a:effectLst/>
+        </p:spPr>
+        <p:style>
+          <a:lnRef idx="1">
+            <a:schemeClr val="accent1"/>
+          </a:lnRef>
+          <a:fillRef idx="3">
+            <a:schemeClr val="accent1"/>
+          </a:fillRef>
+          <a:effectRef idx="2">
+            <a:schemeClr val="accent1"/>
+          </a:effectRef>
+          <a:fontRef idx="minor">
+            <a:schemeClr val="lt1"/>
+          </a:fontRef>
+        </p:style>
+        <p:txBody>
+          <a:bodyPr rtlCol="0" anchor="ctr"/>
+          <a:lstStyle/>
+          <a:p/>
+        </p:txBody>
+      </p:sp>
+      <p:sp>
+        <p:nvSpPr>
+          <p:cNvPr id="7" name="TextBox 6"/>
+          <p:cNvSpPr txBox="1"/>
+          <p:nvPr/>
+        </p:nvSpPr>
+        <p:spPr>
+          <a:xfrm>
+            <a:off x="777240" y="1600200"/>
+            <a:ext cx="4907127" cy="640080"/>
+          </a:xfrm>
+          <a:prstGeom prst="rect">
+            <a:avLst/>
+          </a:prstGeom>
+          <a:noFill/>
+        </p:spPr>
+        <p:txBody>
+          <a:bodyPr wrap="square" anchor="ctr" lIns="0" rIns="0" tIns="0" bIns="0"/>
+          <a:lstStyle/>
+          <a:p>
+            <a:pPr algn="l"/>
+            <a:r>
+              <a:rPr sz="2000" b="1" i="0">
+                <a:solidFill>
+                  <a:srgbClr val="FFFFFF"/>
+                </a:solidFill>
+                <a:latin typeface="Calibri"/>
+              </a:rPr>
+              <a:t>Benefits</a:t>
+            </a:r>
+          </a:p>
+        </p:txBody>
+      </p:sp>
+      <p:sp>
+        <p:nvSpPr>
+          <p:cNvPr id="8" name="Rounded Rectangle 7"/>
+          <p:cNvSpPr/>
+          <p:nvPr/>
+        </p:nvSpPr>
+        <p:spPr>
+          <a:xfrm>
+            <a:off x="548640" y="2377440"/>
+            <a:ext cx="5364327" cy="3794760"/>
+          </a:xfrm>
+          <a:prstGeom prst="roundRect">
+            <a:avLst>
+              <a:gd name="adj" fmla="val 4000"/>
+            </a:avLst>
+          </a:prstGeom>
+          <a:solidFill>
+            <a:srgbClr val="EAF3FF"/>
+          </a:solidFill>
+          <a:ln>
+            <a:noFill/>
+          </a:ln>
+          <a:effectLst/>
+        </p:spPr>
+        <p:style>
+          <a:lnRef idx="1">
+            <a:schemeClr val="accent1"/>
+          </a:lnRef>
+          <a:fillRef idx="3">
+            <a:schemeClr val="accent1"/>
+          </a:fillRef>
+          <a:effectRef idx="2">
+            <a:schemeClr val="accent1"/>
+          </a:effectRef>
+          <a:fontRef idx="minor">
+            <a:schemeClr val="lt1"/>
+          </a:fontRef>
+        </p:style>
+        <p:txBody>
+          <a:bodyPr rtlCol="0" anchor="ctr"/>
+          <a:lstStyle/>
+          <a:p/>
+        </p:txBody>
+      </p:sp>
+      <p:sp>
+        <p:nvSpPr>
+          <p:cNvPr id="9" name="TextBox 8"/>
+          <p:cNvSpPr txBox="1"/>
+          <p:nvPr/>
+        </p:nvSpPr>
+        <p:spPr>
+          <a:xfrm>
+            <a:off x="822959" y="2606040"/>
+            <a:ext cx="4815687" cy="3337560"/>
+          </a:xfrm>
+          <a:prstGeom prst="rect">
+            <a:avLst/>
+          </a:prstGeom>
+          <a:noFill/>
+        </p:spPr>
+        <p:txBody>
+          <a:bodyPr wrap="square" lIns="0" rIns="0" tIns="0" bIns="0">
+            <a:spAutoFit/>
+          </a:bodyPr>
+          <a:lstStyle/>
+          <a:p>
+            <a:pPr marL="274320" indent="-274320">
+              <a:spcAft>
+                <a:spcPts val="990"/>
+              </a:spcAft>
+              <a:buClr>
+                <a:srgbClr val="0645AD"/>
+              </a:buClr>
+              <a:buFont typeface="Arial"/>
+              <a:buChar char="•"/>
+            </a:pPr>
+            <a:r>
+              <a:rPr sz="2200" b="0">
+                <a:solidFill>
+                  <a:srgbClr val="202122"/>
+                </a:solidFill>
+                <a:latin typeface="Calibri"/>
+              </a:rPr>
+              <a:t>Large problems become manageable pieces</a:t>
+            </a:r>
+          </a:p>
+          <a:p>
+            <a:pPr marL="274320" indent="-274320">
+              <a:spcAft>
+                <a:spcPts val="990"/>
+              </a:spcAft>
+              <a:buClr>
+                <a:srgbClr val="0645AD"/>
+              </a:buClr>
+              <a:buFont typeface="Arial"/>
+              <a:buChar char="•"/>
+            </a:pPr>
+            <a:r>
+              <a:rPr sz="2200" b="0">
+                <a:solidFill>
+                  <a:srgbClr val="202122"/>
+                </a:solidFill>
+                <a:latin typeface="Calibri"/>
+              </a:rPr>
+              <a:t>Parts can be built and tested separately</a:t>
+            </a:r>
+          </a:p>
+          <a:p>
+            <a:pPr marL="274320" indent="-274320">
+              <a:spcAft>
+                <a:spcPts val="990"/>
+              </a:spcAft>
+              <a:buClr>
+                <a:srgbClr val="0645AD"/>
+              </a:buClr>
+              <a:buFont typeface="Arial"/>
+              <a:buChar char="•"/>
+            </a:pPr>
+            <a:r>
+              <a:rPr sz="2200" b="0">
+                <a:solidFill>
+                  <a:srgbClr val="202122"/>
+                </a:solidFill>
+                <a:latin typeface="Calibri"/>
+              </a:rPr>
+              <a:t>Reusing patterns saves development time</a:t>
+            </a:r>
+          </a:p>
+          <a:p>
+            <a:pPr marL="274320" indent="-274320">
+              <a:spcAft>
+                <a:spcPts val="990"/>
+              </a:spcAft>
+              <a:buClr>
+                <a:srgbClr val="0645AD"/>
+              </a:buClr>
+              <a:buFont typeface="Arial"/>
+              <a:buChar char="•"/>
+            </a:pPr>
+            <a:r>
+              <a:rPr sz="2200" b="0">
+                <a:solidFill>
+                  <a:srgbClr val="202122"/>
+                </a:solidFill>
+                <a:latin typeface="Calibri"/>
+              </a:rPr>
+              <a:t>Abstraction focuses effort on what matters</a:t>
+            </a:r>
+          </a:p>
+        </p:txBody>
+      </p:sp>
+      <p:sp>
+        <p:nvSpPr>
+          <p:cNvPr id="10" name="Rounded Rectangle 9"/>
+          <p:cNvSpPr/>
+          <p:nvPr/>
+        </p:nvSpPr>
+        <p:spPr>
+          <a:xfrm>
+            <a:off x="6278727" y="1600200"/>
+            <a:ext cx="5364327" cy="640080"/>
+          </a:xfrm>
+          <a:prstGeom prst="roundRect">
+            <a:avLst>
+              <a:gd name="adj" fmla="val 15000"/>
+            </a:avLst>
+          </a:prstGeom>
+          <a:solidFill>
+            <a:srgbClr val="0645AD"/>
+          </a:solidFill>
+          <a:ln>
+            <a:noFill/>
+          </a:ln>
+          <a:effectLst/>
+        </p:spPr>
+        <p:style>
+          <a:lnRef idx="1">
+            <a:schemeClr val="accent1"/>
+          </a:lnRef>
+          <a:fillRef idx="3">
+            <a:schemeClr val="accent1"/>
+          </a:fillRef>
+          <a:effectRef idx="2">
+            <a:schemeClr val="accent1"/>
+          </a:effectRef>
+          <a:fontRef idx="minor">
+            <a:schemeClr val="lt1"/>
+          </a:fontRef>
+        </p:style>
+        <p:txBody>
+          <a:bodyPr rtlCol="0" anchor="ctr"/>
+          <a:lstStyle/>
+          <a:p/>
+        </p:txBody>
+      </p:sp>
+      <p:sp>
+        <p:nvSpPr>
+          <p:cNvPr id="11" name="TextBox 10"/>
+          <p:cNvSpPr txBox="1"/>
+          <p:nvPr/>
+        </p:nvSpPr>
+        <p:spPr>
+          <a:xfrm>
+            <a:off x="6507327" y="1600200"/>
+            <a:ext cx="4907127" cy="640080"/>
+          </a:xfrm>
+          <a:prstGeom prst="rect">
+            <a:avLst/>
+          </a:prstGeom>
+          <a:noFill/>
+        </p:spPr>
+        <p:txBody>
+          <a:bodyPr wrap="square" anchor="ctr" lIns="0" rIns="0" tIns="0" bIns="0"/>
+          <a:lstStyle/>
+          <a:p>
+            <a:pPr algn="l"/>
+            <a:r>
+              <a:rPr sz="2000" b="1" i="0">
+                <a:solidFill>
+                  <a:srgbClr val="FFFFFF"/>
+                </a:solidFill>
+                <a:latin typeface="Calibri"/>
+              </a:rPr>
+              <a:t>Drawbacks</a:t>
+            </a:r>
+          </a:p>
+        </p:txBody>
+      </p:sp>
+      <p:sp>
+        <p:nvSpPr>
+          <p:cNvPr id="12" name="Rounded Rectangle 11"/>
+          <p:cNvSpPr/>
+          <p:nvPr/>
+        </p:nvSpPr>
+        <p:spPr>
+          <a:xfrm>
+            <a:off x="6278727" y="2377440"/>
+            <a:ext cx="5364327" cy="3794760"/>
+          </a:xfrm>
+          <a:prstGeom prst="roundRect">
+            <a:avLst>
+              <a:gd name="adj" fmla="val 4000"/>
+            </a:avLst>
+          </a:prstGeom>
+          <a:solidFill>
+            <a:srgbClr val="EAF3FF"/>
+          </a:solidFill>
+          <a:ln>
+            <a:noFill/>
+          </a:ln>
+          <a:effectLst/>
+        </p:spPr>
+        <p:style>
+          <a:lnRef idx="1">
+            <a:schemeClr val="accent1"/>
+          </a:lnRef>
+          <a:fillRef idx="3">
+            <a:schemeClr val="accent1"/>
+          </a:fillRef>
+          <a:effectRef idx="2">
+            <a:schemeClr val="accent1"/>
+          </a:effectRef>
+          <a:fontRef idx="minor">
+            <a:schemeClr val="lt1"/>
+          </a:fontRef>
+        </p:style>
+        <p:txBody>
+          <a:bodyPr rtlCol="0" anchor="ctr"/>
+          <a:lstStyle/>
+          <a:p/>
+        </p:txBody>
+      </p:sp>
+      <p:sp>
+        <p:nvSpPr>
+          <p:cNvPr id="13" name="TextBox 12"/>
+          <p:cNvSpPr txBox="1"/>
+          <p:nvPr/>
+        </p:nvSpPr>
+        <p:spPr>
+          <a:xfrm>
+            <a:off x="6553047" y="2606040"/>
+            <a:ext cx="4815687" cy="3337560"/>
+          </a:xfrm>
+          <a:prstGeom prst="rect">
+            <a:avLst/>
+          </a:prstGeom>
+          <a:noFill/>
+        </p:spPr>
+        <p:txBody>
+          <a:bodyPr wrap="square" lIns="0" rIns="0" tIns="0" bIns="0">
+            <a:spAutoFit/>
+          </a:bodyPr>
+          <a:lstStyle/>
+          <a:p>
+            <a:pPr marL="274320" indent="-274320">
+              <a:spcAft>
+                <a:spcPts val="990"/>
+              </a:spcAft>
+              <a:buClr>
+                <a:srgbClr val="0645AD"/>
+              </a:buClr>
+              <a:buFont typeface="Arial"/>
+              <a:buChar char="•"/>
+            </a:pPr>
+            <a:r>
+              <a:rPr sz="2200" b="0">
+                <a:solidFill>
+                  <a:srgbClr val="202122"/>
+                </a:solidFill>
+                <a:latin typeface="Calibri"/>
+              </a:rPr>
+              <a:t>Decomposing takes time up front</a:t>
+            </a:r>
+          </a:p>
+          <a:p>
+            <a:pPr marL="274320" indent="-274320">
+              <a:spcAft>
+                <a:spcPts val="990"/>
+              </a:spcAft>
+              <a:buClr>
+                <a:srgbClr val="0645AD"/>
+              </a:buClr>
+              <a:buFont typeface="Arial"/>
+              <a:buChar char="•"/>
+            </a:pPr>
+            <a:r>
+              <a:rPr sz="2200" b="0">
+                <a:solidFill>
+                  <a:srgbClr val="202122"/>
+                </a:solidFill>
+                <a:latin typeface="Calibri"/>
+              </a:rPr>
+              <a:t>Over-abstraction can hide an important detail</a:t>
+            </a:r>
+          </a:p>
+          <a:p>
+            <a:pPr marL="274320" indent="-274320">
+              <a:spcAft>
+                <a:spcPts val="990"/>
+              </a:spcAft>
+              <a:buClr>
+                <a:srgbClr val="0645AD"/>
+              </a:buClr>
+              <a:buFont typeface="Arial"/>
+              <a:buChar char="•"/>
+            </a:pPr>
+            <a:r>
+              <a:rPr sz="2200" b="0">
+                <a:solidFill>
+                  <a:srgbClr val="202122"/>
+                </a:solidFill>
+                <a:latin typeface="Calibri"/>
+              </a:rPr>
+              <a:t>A false pattern leads to the wrong solution</a:t>
+            </a:r>
+          </a:p>
+          <a:p>
+            <a:pPr marL="274320" indent="-274320">
+              <a:spcAft>
+                <a:spcPts val="990"/>
+              </a:spcAft>
+              <a:buClr>
+                <a:srgbClr val="0645AD"/>
+              </a:buClr>
+              <a:buFont typeface="Arial"/>
+              <a:buChar char="•"/>
+            </a:pPr>
+            <a:r>
+              <a:rPr sz="2200" b="0">
+                <a:solidFill>
+                  <a:srgbClr val="202122"/>
+                </a:solidFill>
+                <a:latin typeface="Calibri"/>
+              </a:rPr>
+              <a:t>Parts still have to be integrated</a:t>
+            </a:r>
+          </a:p>
+        </p:txBody>
+      </p:sp>
+    </p:spTree>
+  </p:cSld>
+  <p:clrMapOvr>
+    <a:masterClrMapping/>
+  </p:clrMapOvr>
+</p:sld>
+</file>
+
+<file path=ppt/slides/slide7.xml><?xml version="1.0" encoding="utf-8"?>
+<p:sld xmlns:a="http://schemas.openxmlformats.org/drawingml/2006/main" xmlns:p="http://schemas.openxmlformats.org/presentationml/2006/main" xmlns:r="http://schemas.openxmlformats.org/officeDocument/2006/relationships">
+  <p:cSld>
+    <p:bg>
+      <p:bgPr>
+        <a:solidFill>
+          <a:srgbClr val="FFFFFF"/>
+        </a:solidFill>
+        <a:effectLst/>
+      </p:bgPr>
+    </p:bg>
+    <p:spTree>
+      <p:nvGrpSpPr>
+        <p:cNvPr id="1" name=""/>
+        <p:cNvGrpSpPr/>
+        <p:nvPr/>
+      </p:nvGrpSpPr>
+      <p:grpSpPr/>
+      <p:sp>
+        <p:nvSpPr>
+          <p:cNvPr id="2" name="TextBox 1"/>
+          <p:cNvSpPr txBox="1"/>
+          <p:nvPr/>
+        </p:nvSpPr>
+        <p:spPr>
+          <a:xfrm>
+            <a:off x="548640" y="320040"/>
+            <a:ext cx="11094415" cy="274320"/>
+          </a:xfrm>
+          <a:prstGeom prst="rect">
+            <a:avLst/>
+          </a:prstGeom>
+          <a:noFill/>
+        </p:spPr>
+        <p:txBody>
+          <a:bodyPr wrap="square" anchor="t" lIns="0" rIns="0" tIns="0" bIns="0"/>
+          <a:lstStyle/>
+          <a:p>
+            <a:pPr algn="l"/>
+            <a:r>
+              <a:rPr sz="1100" b="1" i="0">
+                <a:solidFill>
+                  <a:srgbClr val="54595D"/>
+                </a:solidFill>
+                <a:latin typeface="Calibri"/>
+              </a:rPr>
+              <a:t>CORE COMPONENT  ·  Core Paper 1</a:t>
+            </a:r>
+          </a:p>
+        </p:txBody>
+      </p:sp>
+      <p:sp>
+        <p:nvSpPr>
+          <p:cNvPr id="3" name="TextBox 2"/>
+          <p:cNvSpPr txBox="1"/>
+          <p:nvPr/>
+        </p:nvSpPr>
+        <p:spPr>
+          <a:xfrm>
+            <a:off x="548640" y="566928"/>
+            <a:ext cx="11094415" cy="822960"/>
+          </a:xfrm>
+          <a:prstGeom prst="rect">
+            <a:avLst/>
+          </a:prstGeom>
+          <a:noFill/>
+        </p:spPr>
+        <p:txBody>
+          <a:bodyPr wrap="square" anchor="ctr" lIns="0" rIns="0" tIns="0" bIns="0"/>
+          <a:lstStyle/>
+          <a:p>
+            <a:pPr algn="l"/>
+            <a:r>
+              <a:rPr sz="3200" b="1" i="0">
+                <a:solidFill>
+                  <a:srgbClr val="03306E"/>
+                </a:solidFill>
+                <a:latin typeface="Cambria"/>
+              </a:rPr>
+              <a:t>Three ways to express an algorithm</a:t>
+            </a:r>
+          </a:p>
+        </p:txBody>
+      </p:sp>
+      <p:sp>
+        <p:nvSpPr>
+          <p:cNvPr id="4" name="TextBox 3"/>
+          <p:cNvSpPr txBox="1"/>
+          <p:nvPr/>
+        </p:nvSpPr>
+        <p:spPr>
+          <a:xfrm>
+            <a:off x="548640" y="6446520"/>
+            <a:ext cx="8229600" cy="274320"/>
+          </a:xfrm>
+          <a:prstGeom prst="rect">
+            <a:avLst/>
+          </a:prstGeom>
+          <a:noFill/>
+        </p:spPr>
+        <p:txBody>
+          <a:bodyPr wrap="square" anchor="t" lIns="0" rIns="0" tIns="0" bIns="0"/>
+          <a:lstStyle/>
+          <a:p>
+            <a:pPr algn="l"/>
+            <a:r>
+              <a:rPr sz="1000" b="0" i="0">
+                <a:solidFill>
+                  <a:srgbClr val="54595D"/>
+                </a:solidFill>
+                <a:latin typeface="Calibri"/>
+              </a:rPr>
+              <a:t>Digital Software Development T Level  ·  Computational Thinking and Algorithms</a:t>
+            </a:r>
+          </a:p>
+        </p:txBody>
+      </p:sp>
+      <p:sp>
+        <p:nvSpPr>
+          <p:cNvPr id="5" name="TextBox 4"/>
+          <p:cNvSpPr txBox="1"/>
+          <p:nvPr/>
+        </p:nvSpPr>
+        <p:spPr>
+          <a:xfrm>
+            <a:off x="10728655" y="6446520"/>
+            <a:ext cx="914400" cy="274320"/>
+          </a:xfrm>
+          <a:prstGeom prst="rect">
+            <a:avLst/>
+          </a:prstGeom>
+          <a:noFill/>
+        </p:spPr>
+        <p:txBody>
+          <a:bodyPr wrap="square" anchor="t" lIns="0" rIns="0" tIns="0" bIns="0"/>
+          <a:lstStyle/>
+          <a:p>
+            <a:pPr algn="r"/>
+            <a:r>
+              <a:rPr sz="1000" b="0" i="0">
+                <a:solidFill>
+                  <a:srgbClr val="54595D"/>
+                </a:solidFill>
+                <a:latin typeface="Calibri"/>
+              </a:rPr>
+              <a:t>7</a:t>
+            </a:r>
+          </a:p>
+        </p:txBody>
+      </p:sp>
+      <p:sp>
+        <p:nvSpPr>
+          <p:cNvPr id="6" name="TextBox 5"/>
+          <p:cNvSpPr txBox="1"/>
+          <p:nvPr/>
+        </p:nvSpPr>
+        <p:spPr>
+          <a:xfrm>
+            <a:off x="548640" y="1554480"/>
+            <a:ext cx="6720840" cy="4617720"/>
+          </a:xfrm>
+          <a:prstGeom prst="rect">
+            <a:avLst/>
+          </a:prstGeom>
+          <a:noFill/>
+        </p:spPr>
+        <p:txBody>
+          <a:bodyPr wrap="square" lIns="0" rIns="0" tIns="0" bIns="0">
+            <a:spAutoFit/>
+          </a:bodyPr>
+          <a:lstStyle/>
+          <a:p>
+            <a:pPr>
+              <a:spcAft>
+                <a:spcPts val="1260"/>
+              </a:spcAft>
+            </a:pPr>
+            <a:r>
+              <a:rPr sz="2100" b="0">
+                <a:solidFill>
+                  <a:srgbClr val="202122"/>
+                </a:solidFill>
+                <a:latin typeface="Calibri"/>
+              </a:rPr>
+              <a:t>The same algorithm can be written in three ways.</a:t>
+            </a:r>
+          </a:p>
+          <a:p>
+            <a:pPr>
+              <a:spcAft>
+                <a:spcPts val="1260"/>
+              </a:spcAft>
+            </a:pPr>
+            <a:r>
+              <a:rPr sz="2100" b="1">
+                <a:solidFill>
+                  <a:srgbClr val="202122"/>
+                </a:solidFill>
+                <a:latin typeface="Calibri"/>
+              </a:rPr>
+              <a:t>A flowchart uses standard symbols:</a:t>
+            </a:r>
+            <a:r>
+              <a:rPr sz="2100" b="0">
+                <a:solidFill>
+                  <a:srgbClr val="202122"/>
+                </a:solidFill>
+                <a:latin typeface="Calibri"/>
+              </a:rPr>
+              <a:t> terminators for start and end, rectangles for processes, diamonds for decisions, parallelograms for input and output, joined by arrows. It shows the flow visually but is slow to draw for big problems.</a:t>
+            </a:r>
+          </a:p>
+          <a:p>
+            <a:pPr>
+              <a:spcAft>
+                <a:spcPts val="1260"/>
+              </a:spcAft>
+            </a:pPr>
+            <a:r>
+              <a:rPr sz="2100" b="0">
+                <a:solidFill>
+                  <a:srgbClr val="202122"/>
+                </a:solidFill>
+                <a:latin typeface="Calibri"/>
+              </a:rPr>
+              <a:t>A written description lists the steps in order, using numbered or hierarchical markers (1, 1.1, 1.2). It's quick to write but can be ambiguous.</a:t>
+            </a:r>
+          </a:p>
+          <a:p>
+            <a:pPr>
+              <a:spcAft>
+                <a:spcPts val="1260"/>
+              </a:spcAft>
+            </a:pPr>
+            <a:r>
+              <a:rPr sz="2100" b="0">
+                <a:solidFill>
+                  <a:srgbClr val="202122"/>
+                </a:solidFill>
+                <a:latin typeface="Calibri"/>
+              </a:rPr>
+              <a:t>Code is precise and can actually be run and tested, but you need to know the language to read it. You must be able to translate between all three.</a:t>
+            </a:r>
+          </a:p>
+        </p:txBody>
+      </p:sp>
+      <p:sp>
+        <p:nvSpPr>
+          <p:cNvPr id="7" name="Rounded Rectangle 6"/>
+          <p:cNvSpPr/>
+          <p:nvPr/>
+        </p:nvSpPr>
+        <p:spPr>
+          <a:xfrm>
+            <a:off x="7772400" y="1554480"/>
+            <a:ext cx="3867912" cy="4526280"/>
+          </a:xfrm>
+          <a:prstGeom prst="roundRect">
+            <a:avLst>
+              <a:gd name="adj" fmla="val 8000"/>
+            </a:avLst>
+          </a:prstGeom>
+          <a:solidFill>
+            <a:srgbClr val="03306E"/>
+          </a:solidFill>
+          <a:ln>
+            <a:noFill/>
+          </a:ln>
+          <a:effectLst/>
+        </p:spPr>
+        <p:style>
+          <a:lnRef idx="1">
+            <a:schemeClr val="accent1"/>
+          </a:lnRef>
+          <a:fillRef idx="3">
+            <a:schemeClr val="accent1"/>
+          </a:fillRef>
+          <a:effectRef idx="2">
+            <a:schemeClr val="accent1"/>
+          </a:effectRef>
+          <a:fontRef idx="minor">
+            <a:schemeClr val="lt1"/>
+          </a:fontRef>
+        </p:style>
+        <p:txBody>
+          <a:bodyPr rtlCol="0" anchor="ctr"/>
+          <a:lstStyle/>
+          <a:p/>
+        </p:txBody>
+      </p:sp>
+      <p:sp>
+        <p:nvSpPr>
+          <p:cNvPr id="8" name="Oval 7"/>
+          <p:cNvSpPr/>
+          <p:nvPr/>
+        </p:nvSpPr>
+        <p:spPr>
+          <a:xfrm>
+            <a:off x="8046720" y="1828800"/>
+            <a:ext cx="548640" cy="548640"/>
+          </a:xfrm>
+          <a:prstGeom prst="ellipse">
+            <a:avLst/>
+          </a:prstGeom>
+          <a:solidFill>
+            <a:srgbClr val="F2B705"/>
+          </a:solidFill>
+          <a:ln>
+            <a:noFill/>
+          </a:ln>
+          <a:effectLst/>
+        </p:spPr>
+        <p:style>
+          <a:lnRef idx="1">
+            <a:schemeClr val="accent1"/>
+          </a:lnRef>
+          <a:fillRef idx="3">
+            <a:schemeClr val="accent1"/>
+          </a:fillRef>
+          <a:effectRef idx="2">
+            <a:schemeClr val="accent1"/>
+          </a:effectRef>
+          <a:fontRef idx="minor">
+            <a:schemeClr val="lt1"/>
+          </a:fontRef>
+        </p:style>
+        <p:txBody>
+          <a:bodyPr rtlCol="0" anchor="ctr" lIns="0" rIns="0" tIns="0" bIns="0"/>
+          <a:lstStyle/>
+          <a:p>
+            <a:pPr algn="ctr"/>
+            <a:r>
+              <a:rPr sz="1300" b="1">
+                <a:solidFill>
+                  <a:srgbClr val="202122"/>
+                </a:solidFill>
+                <a:latin typeface="Calibri"/>
+              </a:rPr>
+              <a:t>e.g.</a:t>
+            </a:r>
+          </a:p>
+        </p:txBody>
+      </p:sp>
+      <p:sp>
+        <p:nvSpPr>
+          <p:cNvPr id="9" name="TextBox 8"/>
+          <p:cNvSpPr txBox="1"/>
+          <p:nvPr/>
+        </p:nvSpPr>
+        <p:spPr>
+          <a:xfrm>
+            <a:off x="8046720" y="2560320"/>
+            <a:ext cx="3291840" cy="365760"/>
+          </a:xfrm>
+          <a:prstGeom prst="rect">
+            <a:avLst/>
+          </a:prstGeom>
+          <a:noFill/>
+        </p:spPr>
+        <p:txBody>
+          <a:bodyPr wrap="square" anchor="t" lIns="0" rIns="0" tIns="0" bIns="0"/>
+          <a:lstStyle/>
+          <a:p>
+            <a:pPr algn="l"/>
+            <a:r>
+              <a:rPr sz="1300" b="1" i="0">
+                <a:solidFill>
+                  <a:srgbClr val="A9C8F0"/>
+                </a:solidFill>
+                <a:latin typeface="Calibri"/>
+              </a:rPr>
+              <a:t>EXAMPLE</a:t>
+            </a:r>
+          </a:p>
+        </p:txBody>
+      </p:sp>
+      <p:sp>
+        <p:nvSpPr>
+          <p:cNvPr id="10" name="TextBox 9"/>
+          <p:cNvSpPr txBox="1"/>
+          <p:nvPr/>
+        </p:nvSpPr>
+        <p:spPr>
+          <a:xfrm>
+            <a:off x="8046720" y="2971800"/>
+            <a:ext cx="3291840" cy="2971800"/>
+          </a:xfrm>
+          <a:prstGeom prst="rect">
+            <a:avLst/>
+          </a:prstGeom>
+          <a:noFill/>
+        </p:spPr>
+        <p:txBody>
+          <a:bodyPr wrap="square" anchor="t" lIns="0" rIns="0" tIns="0" bIns="0"/>
+          <a:lstStyle/>
+          <a:p>
+            <a:pPr algn="l"/>
+            <a:r>
+              <a:rPr sz="1900" b="0" i="0">
+                <a:solidFill>
+                  <a:srgbClr val="FFFFFF"/>
+                </a:solidFill>
+                <a:latin typeface="Cambria"/>
+              </a:rPr>
+              <a:t>'Ask for a number; if it's even, print Even, otherwise print Odd' becomes a flowchart with one diamond, or Python using if n % 2 == 0.</a:t>
+            </a:r>
+          </a:p>
+        </p:txBody>
+      </p:sp>
+    </p:spTree>
+  </p:cSld>
+  <p:clrMapOvr>
+    <a:masterClrMapping/>
+  </p:clrMapOvr>
+</p:sld>
+</file>
+
+<file path=ppt/slides/slide8.xml><?xml version="1.0" encoding="utf-8"?>
+<p:sld xmlns:a="http://schemas.openxmlformats.org/drawingml/2006/main" xmlns:p="http://schemas.openxmlformats.org/presentationml/2006/main" xmlns:r="http://schemas.openxmlformats.org/officeDocument/2006/relationships">
+  <p:cSld>
+    <p:bg>
+      <p:bgPr>
+        <a:solidFill>
+          <a:srgbClr val="FFFFFF"/>
+        </a:solidFill>
+        <a:effectLst/>
+      </p:bgPr>
+    </p:bg>
+    <p:spTree>
+      <p:nvGrpSpPr>
+        <p:cNvPr id="1" name=""/>
+        <p:cNvGrpSpPr/>
+        <p:nvPr/>
+      </p:nvGrpSpPr>
+      <p:grpSpPr/>
+      <p:sp>
+        <p:nvSpPr>
+          <p:cNvPr id="2" name="TextBox 1"/>
+          <p:cNvSpPr txBox="1"/>
+          <p:nvPr/>
+        </p:nvSpPr>
+        <p:spPr>
+          <a:xfrm>
+            <a:off x="548640" y="320040"/>
+            <a:ext cx="11094415" cy="274320"/>
+          </a:xfrm>
+          <a:prstGeom prst="rect">
+            <a:avLst/>
+          </a:prstGeom>
+          <a:noFill/>
+        </p:spPr>
+        <p:txBody>
+          <a:bodyPr wrap="square" anchor="t" lIns="0" rIns="0" tIns="0" bIns="0"/>
+          <a:lstStyle/>
+          <a:p>
+            <a:pPr algn="l"/>
+            <a:r>
+              <a:rPr sz="1100" b="1" i="0">
+                <a:solidFill>
+                  <a:srgbClr val="54595D"/>
+                </a:solidFill>
+                <a:latin typeface="Calibri"/>
+              </a:rPr>
+              <a:t>CORE COMPONENT  ·  Core Paper 1</a:t>
+            </a:r>
+          </a:p>
+        </p:txBody>
+      </p:sp>
+      <p:sp>
+        <p:nvSpPr>
+          <p:cNvPr id="3" name="TextBox 2"/>
+          <p:cNvSpPr txBox="1"/>
+          <p:nvPr/>
+        </p:nvSpPr>
+        <p:spPr>
+          <a:xfrm>
+            <a:off x="548640" y="566928"/>
+            <a:ext cx="11094415" cy="822960"/>
+          </a:xfrm>
+          <a:prstGeom prst="rect">
+            <a:avLst/>
+          </a:prstGeom>
+          <a:noFill/>
+        </p:spPr>
+        <p:txBody>
+          <a:bodyPr wrap="square" anchor="ctr" lIns="0" rIns="0" tIns="0" bIns="0"/>
+          <a:lstStyle/>
+          <a:p>
+            <a:pPr algn="l"/>
+            <a:r>
+              <a:rPr sz="3200" b="1" i="0">
+                <a:solidFill>
+                  <a:srgbClr val="03306E"/>
+                </a:solidFill>
+                <a:latin typeface="Cambria"/>
+              </a:rPr>
+              <a:t>Three ways to express an algorithm</a:t>
+            </a:r>
+          </a:p>
+        </p:txBody>
+      </p:sp>
+      <p:sp>
+        <p:nvSpPr>
+          <p:cNvPr id="4" name="TextBox 3"/>
+          <p:cNvSpPr txBox="1"/>
+          <p:nvPr/>
+        </p:nvSpPr>
+        <p:spPr>
+          <a:xfrm>
+            <a:off x="548640" y="6446520"/>
+            <a:ext cx="8229600" cy="274320"/>
+          </a:xfrm>
+          <a:prstGeom prst="rect">
+            <a:avLst/>
+          </a:prstGeom>
+          <a:noFill/>
+        </p:spPr>
+        <p:txBody>
+          <a:bodyPr wrap="square" anchor="t" lIns="0" rIns="0" tIns="0" bIns="0"/>
+          <a:lstStyle/>
+          <a:p>
+            <a:pPr algn="l"/>
+            <a:r>
+              <a:rPr sz="1000" b="0" i="0">
+                <a:solidFill>
+                  <a:srgbClr val="54595D"/>
+                </a:solidFill>
+                <a:latin typeface="Calibri"/>
+              </a:rPr>
+              <a:t>Digital Software Development T Level  ·  Computational Thinking and Algorithms</a:t>
+            </a:r>
+          </a:p>
+        </p:txBody>
+      </p:sp>
+      <p:sp>
+        <p:nvSpPr>
+          <p:cNvPr id="5" name="TextBox 4"/>
+          <p:cNvSpPr txBox="1"/>
+          <p:nvPr/>
+        </p:nvSpPr>
+        <p:spPr>
+          <a:xfrm>
+            <a:off x="10728655" y="6446520"/>
+            <a:ext cx="914400" cy="274320"/>
+          </a:xfrm>
+          <a:prstGeom prst="rect">
+            <a:avLst/>
+          </a:prstGeom>
+          <a:noFill/>
+        </p:spPr>
+        <p:txBody>
+          <a:bodyPr wrap="square" anchor="t" lIns="0" rIns="0" tIns="0" bIns="0"/>
+          <a:lstStyle/>
+          <a:p>
+            <a:pPr algn="r"/>
+            <a:r>
+              <a:rPr sz="1000" b="0" i="0">
+                <a:solidFill>
+                  <a:srgbClr val="54595D"/>
+                </a:solidFill>
+                <a:latin typeface="Calibri"/>
+              </a:rPr>
+              <a:t>8</a:t>
             </a:r>
           </a:p>
         </p:txBody>
@@ -7965,1735 +13804,6 @@
 </p:sld>
 </file>
 
-<file path=ppt/slides/slide6.xml><?xml version="1.0" encoding="utf-8"?>
-<p:sld xmlns:a="http://schemas.openxmlformats.org/drawingml/2006/main" xmlns:p="http://schemas.openxmlformats.org/presentationml/2006/main" xmlns:r="http://schemas.openxmlformats.org/officeDocument/2006/relationships">
-  <p:cSld>
-    <p:bg>
-      <p:bgPr>
-        <a:solidFill>
-          <a:srgbClr val="FFFFFF"/>
-        </a:solidFill>
-        <a:effectLst/>
-      </p:bgPr>
-    </p:bg>
-    <p:spTree>
-      <p:nvGrpSpPr>
-        <p:cNvPr id="1" name=""/>
-        <p:cNvGrpSpPr/>
-        <p:nvPr/>
-      </p:nvGrpSpPr>
-      <p:grpSpPr/>
-      <p:sp>
-        <p:nvSpPr>
-          <p:cNvPr id="2" name="TextBox 1"/>
-          <p:cNvSpPr txBox="1"/>
-          <p:nvPr/>
-        </p:nvSpPr>
-        <p:spPr>
-          <a:xfrm>
-            <a:off x="548640" y="320040"/>
-            <a:ext cx="11094415" cy="274320"/>
-          </a:xfrm>
-          <a:prstGeom prst="rect">
-            <a:avLst/>
-          </a:prstGeom>
-          <a:noFill/>
-        </p:spPr>
-        <p:txBody>
-          <a:bodyPr wrap="square" anchor="t" lIns="0" rIns="0" tIns="0" bIns="0"/>
-          <a:lstStyle/>
-          <a:p>
-            <a:pPr algn="l"/>
-            <a:r>
-              <a:rPr sz="1100" b="1" i="0">
-                <a:solidFill>
-                  <a:srgbClr val="54595D"/>
-                </a:solidFill>
-                <a:latin typeface="Calibri"/>
-              </a:rPr>
-              <a:t>CORE COMPONENT  ·  Core Paper 1</a:t>
-            </a:r>
-          </a:p>
-        </p:txBody>
-      </p:sp>
-      <p:sp>
-        <p:nvSpPr>
-          <p:cNvPr id="3" name="TextBox 2"/>
-          <p:cNvSpPr txBox="1"/>
-          <p:nvPr/>
-        </p:nvSpPr>
-        <p:spPr>
-          <a:xfrm>
-            <a:off x="548640" y="566928"/>
-            <a:ext cx="11094415" cy="822960"/>
-          </a:xfrm>
-          <a:prstGeom prst="rect">
-            <a:avLst/>
-          </a:prstGeom>
-          <a:noFill/>
-        </p:spPr>
-        <p:txBody>
-          <a:bodyPr wrap="square" anchor="ctr" lIns="0" rIns="0" tIns="0" bIns="0"/>
-          <a:lstStyle/>
-          <a:p>
-            <a:pPr algn="l"/>
-            <a:r>
-              <a:rPr sz="3200" b="1" i="0">
-                <a:solidFill>
-                  <a:srgbClr val="03306E"/>
-                </a:solidFill>
-                <a:latin typeface="Cambria"/>
-              </a:rPr>
-              <a:t>Actions that control the order of steps</a:t>
-            </a:r>
-          </a:p>
-        </p:txBody>
-      </p:sp>
-      <p:sp>
-        <p:nvSpPr>
-          <p:cNvPr id="4" name="TextBox 3"/>
-          <p:cNvSpPr txBox="1"/>
-          <p:nvPr/>
-        </p:nvSpPr>
-        <p:spPr>
-          <a:xfrm>
-            <a:off x="548640" y="6446520"/>
-            <a:ext cx="8229600" cy="274320"/>
-          </a:xfrm>
-          <a:prstGeom prst="rect">
-            <a:avLst/>
-          </a:prstGeom>
-          <a:noFill/>
-        </p:spPr>
-        <p:txBody>
-          <a:bodyPr wrap="square" anchor="t" lIns="0" rIns="0" tIns="0" bIns="0"/>
-          <a:lstStyle/>
-          <a:p>
-            <a:pPr algn="l"/>
-            <a:r>
-              <a:rPr sz="1000" b="0" i="0">
-                <a:solidFill>
-                  <a:srgbClr val="54595D"/>
-                </a:solidFill>
-                <a:latin typeface="Calibri"/>
-              </a:rPr>
-              <a:t>Digital Software Development T Level  ·  Computational Thinking and Algorithms</a:t>
-            </a:r>
-          </a:p>
-        </p:txBody>
-      </p:sp>
-      <p:sp>
-        <p:nvSpPr>
-          <p:cNvPr id="5" name="TextBox 4"/>
-          <p:cNvSpPr txBox="1"/>
-          <p:nvPr/>
-        </p:nvSpPr>
-        <p:spPr>
-          <a:xfrm>
-            <a:off x="10728655" y="6446520"/>
-            <a:ext cx="914400" cy="274320"/>
-          </a:xfrm>
-          <a:prstGeom prst="rect">
-            <a:avLst/>
-          </a:prstGeom>
-          <a:noFill/>
-        </p:spPr>
-        <p:txBody>
-          <a:bodyPr wrap="square" anchor="t" lIns="0" rIns="0" tIns="0" bIns="0"/>
-          <a:lstStyle/>
-          <a:p>
-            <a:pPr algn="r"/>
-            <a:r>
-              <a:rPr sz="1000" b="0" i="0">
-                <a:solidFill>
-                  <a:srgbClr val="54595D"/>
-                </a:solidFill>
-                <a:latin typeface="Calibri"/>
-              </a:rPr>
-              <a:t>6</a:t>
-            </a:r>
-          </a:p>
-        </p:txBody>
-      </p:sp>
-      <p:sp>
-        <p:nvSpPr>
-          <p:cNvPr id="6" name="Rounded Rectangle 5"/>
-          <p:cNvSpPr/>
-          <p:nvPr/>
-        </p:nvSpPr>
-        <p:spPr>
-          <a:xfrm>
-            <a:off x="548640" y="1600200"/>
-            <a:ext cx="3515258" cy="4572000"/>
-          </a:xfrm>
-          <a:prstGeom prst="roundRect">
-            <a:avLst>
-              <a:gd name="adj" fmla="val 6000"/>
-            </a:avLst>
-          </a:prstGeom>
-          <a:solidFill>
-            <a:srgbClr val="EAF3FF"/>
-          </a:solidFill>
-          <a:ln>
-            <a:noFill/>
-          </a:ln>
-          <a:effectLst/>
-        </p:spPr>
-        <p:style>
-          <a:lnRef idx="1">
-            <a:schemeClr val="accent1"/>
-          </a:lnRef>
-          <a:fillRef idx="3">
-            <a:schemeClr val="accent1"/>
-          </a:fillRef>
-          <a:effectRef idx="2">
-            <a:schemeClr val="accent1"/>
-          </a:effectRef>
-          <a:fontRef idx="minor">
-            <a:schemeClr val="lt1"/>
-          </a:fontRef>
-        </p:style>
-        <p:txBody>
-          <a:bodyPr rtlCol="0" anchor="ctr"/>
-          <a:lstStyle/>
-          <a:p/>
-        </p:txBody>
-      </p:sp>
-      <p:sp>
-        <p:nvSpPr>
-          <p:cNvPr id="7" name="Oval 6"/>
-          <p:cNvSpPr/>
-          <p:nvPr/>
-        </p:nvSpPr>
-        <p:spPr>
-          <a:xfrm>
-            <a:off x="777240" y="1828800"/>
-            <a:ext cx="457200" cy="457200"/>
-          </a:xfrm>
-          <a:prstGeom prst="ellipse">
-            <a:avLst/>
-          </a:prstGeom>
-          <a:solidFill>
-            <a:srgbClr val="F2B705"/>
-          </a:solidFill>
-          <a:ln>
-            <a:noFill/>
-          </a:ln>
-          <a:effectLst/>
-        </p:spPr>
-        <p:style>
-          <a:lnRef idx="1">
-            <a:schemeClr val="accent1"/>
-          </a:lnRef>
-          <a:fillRef idx="3">
-            <a:schemeClr val="accent1"/>
-          </a:fillRef>
-          <a:effectRef idx="2">
-            <a:schemeClr val="accent1"/>
-          </a:effectRef>
-          <a:fontRef idx="minor">
-            <a:schemeClr val="lt1"/>
-          </a:fontRef>
-        </p:style>
-        <p:txBody>
-          <a:bodyPr rtlCol="0" anchor="ctr" lIns="0" rIns="0" tIns="0" bIns="0"/>
-          <a:lstStyle/>
-          <a:p>
-            <a:pPr algn="ctr"/>
-            <a:r>
-              <a:rPr sz="1500" b="1">
-                <a:solidFill>
-                  <a:srgbClr val="202122"/>
-                </a:solidFill>
-                <a:latin typeface="Calibri"/>
-              </a:rPr>
-              <a:t>1</a:t>
-            </a:r>
-          </a:p>
-        </p:txBody>
-      </p:sp>
-      <p:sp>
-        <p:nvSpPr>
-          <p:cNvPr id="8" name="TextBox 7"/>
-          <p:cNvSpPr txBox="1"/>
-          <p:nvPr/>
-        </p:nvSpPr>
-        <p:spPr>
-          <a:xfrm>
-            <a:off x="1371600" y="1801368"/>
-            <a:ext cx="2509418" cy="512064"/>
-          </a:xfrm>
-          <a:prstGeom prst="rect">
-            <a:avLst/>
-          </a:prstGeom>
-          <a:noFill/>
-        </p:spPr>
-        <p:txBody>
-          <a:bodyPr wrap="square" anchor="ctr" lIns="0" rIns="0" tIns="0" bIns="0"/>
-          <a:lstStyle/>
-          <a:p>
-            <a:pPr algn="l"/>
-            <a:r>
-              <a:rPr sz="1900" b="1" i="0">
-                <a:solidFill>
-                  <a:srgbClr val="03306E"/>
-                </a:solidFill>
-                <a:latin typeface="Calibri"/>
-              </a:rPr>
-              <a:t>Sequence</a:t>
-            </a:r>
-          </a:p>
-        </p:txBody>
-      </p:sp>
-      <p:sp>
-        <p:nvSpPr>
-          <p:cNvPr id="9" name="TextBox 8"/>
-          <p:cNvSpPr txBox="1"/>
-          <p:nvPr/>
-        </p:nvSpPr>
-        <p:spPr>
-          <a:xfrm>
-            <a:off x="777240" y="2468880"/>
-            <a:ext cx="3058058" cy="3566160"/>
-          </a:xfrm>
-          <a:prstGeom prst="rect">
-            <a:avLst/>
-          </a:prstGeom>
-          <a:noFill/>
-        </p:spPr>
-        <p:txBody>
-          <a:bodyPr wrap="square" anchor="t" lIns="0" rIns="0" tIns="0" bIns="0"/>
-          <a:lstStyle/>
-          <a:p>
-            <a:pPr algn="l"/>
-            <a:r>
-              <a:rPr sz="2000" b="0" i="0">
-                <a:solidFill>
-                  <a:srgbClr val="202122"/>
-                </a:solidFill>
-                <a:latin typeface="Calibri"/>
-              </a:rPr>
-              <a:t>Steps run one after another, in order.</a:t>
-            </a:r>
-          </a:p>
-        </p:txBody>
-      </p:sp>
-      <p:sp>
-        <p:nvSpPr>
-          <p:cNvPr id="10" name="Rounded Rectangle 9"/>
-          <p:cNvSpPr/>
-          <p:nvPr/>
-        </p:nvSpPr>
-        <p:spPr>
-          <a:xfrm>
-            <a:off x="4338218" y="1600200"/>
-            <a:ext cx="3515258" cy="4572000"/>
-          </a:xfrm>
-          <a:prstGeom prst="roundRect">
-            <a:avLst>
-              <a:gd name="adj" fmla="val 6000"/>
-            </a:avLst>
-          </a:prstGeom>
-          <a:solidFill>
-            <a:srgbClr val="EAF3FF"/>
-          </a:solidFill>
-          <a:ln>
-            <a:noFill/>
-          </a:ln>
-          <a:effectLst/>
-        </p:spPr>
-        <p:style>
-          <a:lnRef idx="1">
-            <a:schemeClr val="accent1"/>
-          </a:lnRef>
-          <a:fillRef idx="3">
-            <a:schemeClr val="accent1"/>
-          </a:fillRef>
-          <a:effectRef idx="2">
-            <a:schemeClr val="accent1"/>
-          </a:effectRef>
-          <a:fontRef idx="minor">
-            <a:schemeClr val="lt1"/>
-          </a:fontRef>
-        </p:style>
-        <p:txBody>
-          <a:bodyPr rtlCol="0" anchor="ctr"/>
-          <a:lstStyle/>
-          <a:p/>
-        </p:txBody>
-      </p:sp>
-      <p:sp>
-        <p:nvSpPr>
-          <p:cNvPr id="11" name="Oval 10"/>
-          <p:cNvSpPr/>
-          <p:nvPr/>
-        </p:nvSpPr>
-        <p:spPr>
-          <a:xfrm>
-            <a:off x="4566818" y="1828800"/>
-            <a:ext cx="457200" cy="457200"/>
-          </a:xfrm>
-          <a:prstGeom prst="ellipse">
-            <a:avLst/>
-          </a:prstGeom>
-          <a:solidFill>
-            <a:srgbClr val="F2B705"/>
-          </a:solidFill>
-          <a:ln>
-            <a:noFill/>
-          </a:ln>
-          <a:effectLst/>
-        </p:spPr>
-        <p:style>
-          <a:lnRef idx="1">
-            <a:schemeClr val="accent1"/>
-          </a:lnRef>
-          <a:fillRef idx="3">
-            <a:schemeClr val="accent1"/>
-          </a:fillRef>
-          <a:effectRef idx="2">
-            <a:schemeClr val="accent1"/>
-          </a:effectRef>
-          <a:fontRef idx="minor">
-            <a:schemeClr val="lt1"/>
-          </a:fontRef>
-        </p:style>
-        <p:txBody>
-          <a:bodyPr rtlCol="0" anchor="ctr" lIns="0" rIns="0" tIns="0" bIns="0"/>
-          <a:lstStyle/>
-          <a:p>
-            <a:pPr algn="ctr"/>
-            <a:r>
-              <a:rPr sz="1500" b="1">
-                <a:solidFill>
-                  <a:srgbClr val="202122"/>
-                </a:solidFill>
-                <a:latin typeface="Calibri"/>
-              </a:rPr>
-              <a:t>2</a:t>
-            </a:r>
-          </a:p>
-        </p:txBody>
-      </p:sp>
-      <p:sp>
-        <p:nvSpPr>
-          <p:cNvPr id="12" name="TextBox 11"/>
-          <p:cNvSpPr txBox="1"/>
-          <p:nvPr/>
-        </p:nvSpPr>
-        <p:spPr>
-          <a:xfrm>
-            <a:off x="5161178" y="1801368"/>
-            <a:ext cx="2509418" cy="512064"/>
-          </a:xfrm>
-          <a:prstGeom prst="rect">
-            <a:avLst/>
-          </a:prstGeom>
-          <a:noFill/>
-        </p:spPr>
-        <p:txBody>
-          <a:bodyPr wrap="square" anchor="ctr" lIns="0" rIns="0" tIns="0" bIns="0"/>
-          <a:lstStyle/>
-          <a:p>
-            <a:pPr algn="l"/>
-            <a:r>
-              <a:rPr sz="1900" b="1" i="0">
-                <a:solidFill>
-                  <a:srgbClr val="03306E"/>
-                </a:solidFill>
-                <a:latin typeface="Calibri"/>
-              </a:rPr>
-              <a:t>Selection</a:t>
-            </a:r>
-          </a:p>
-        </p:txBody>
-      </p:sp>
-      <p:sp>
-        <p:nvSpPr>
-          <p:cNvPr id="13" name="TextBox 12"/>
-          <p:cNvSpPr txBox="1"/>
-          <p:nvPr/>
-        </p:nvSpPr>
-        <p:spPr>
-          <a:xfrm>
-            <a:off x="4566818" y="2468880"/>
-            <a:ext cx="3058058" cy="3566160"/>
-          </a:xfrm>
-          <a:prstGeom prst="rect">
-            <a:avLst/>
-          </a:prstGeom>
-          <a:noFill/>
-        </p:spPr>
-        <p:txBody>
-          <a:bodyPr wrap="square" anchor="t" lIns="0" rIns="0" tIns="0" bIns="0"/>
-          <a:lstStyle/>
-          <a:p>
-            <a:pPr algn="l"/>
-            <a:r>
-              <a:rPr sz="2000" b="0" i="0">
-                <a:solidFill>
-                  <a:srgbClr val="202122"/>
-                </a:solidFill>
-                <a:latin typeface="Calibri"/>
-              </a:rPr>
-              <a:t>A condition chooses which path to take: if, elif, else, match case.</a:t>
-            </a:r>
-          </a:p>
-        </p:txBody>
-      </p:sp>
-      <p:sp>
-        <p:nvSpPr>
-          <p:cNvPr id="14" name="Rounded Rectangle 13"/>
-          <p:cNvSpPr/>
-          <p:nvPr/>
-        </p:nvSpPr>
-        <p:spPr>
-          <a:xfrm>
-            <a:off x="8127796" y="1600200"/>
-            <a:ext cx="3515258" cy="4572000"/>
-          </a:xfrm>
-          <a:prstGeom prst="roundRect">
-            <a:avLst>
-              <a:gd name="adj" fmla="val 6000"/>
-            </a:avLst>
-          </a:prstGeom>
-          <a:solidFill>
-            <a:srgbClr val="EAF3FF"/>
-          </a:solidFill>
-          <a:ln>
-            <a:noFill/>
-          </a:ln>
-          <a:effectLst/>
-        </p:spPr>
-        <p:style>
-          <a:lnRef idx="1">
-            <a:schemeClr val="accent1"/>
-          </a:lnRef>
-          <a:fillRef idx="3">
-            <a:schemeClr val="accent1"/>
-          </a:fillRef>
-          <a:effectRef idx="2">
-            <a:schemeClr val="accent1"/>
-          </a:effectRef>
-          <a:fontRef idx="minor">
-            <a:schemeClr val="lt1"/>
-          </a:fontRef>
-        </p:style>
-        <p:txBody>
-          <a:bodyPr rtlCol="0" anchor="ctr"/>
-          <a:lstStyle/>
-          <a:p/>
-        </p:txBody>
-      </p:sp>
-      <p:sp>
-        <p:nvSpPr>
-          <p:cNvPr id="15" name="Oval 14"/>
-          <p:cNvSpPr/>
-          <p:nvPr/>
-        </p:nvSpPr>
-        <p:spPr>
-          <a:xfrm>
-            <a:off x="8356396" y="1828800"/>
-            <a:ext cx="457200" cy="457200"/>
-          </a:xfrm>
-          <a:prstGeom prst="ellipse">
-            <a:avLst/>
-          </a:prstGeom>
-          <a:solidFill>
-            <a:srgbClr val="F2B705"/>
-          </a:solidFill>
-          <a:ln>
-            <a:noFill/>
-          </a:ln>
-          <a:effectLst/>
-        </p:spPr>
-        <p:style>
-          <a:lnRef idx="1">
-            <a:schemeClr val="accent1"/>
-          </a:lnRef>
-          <a:fillRef idx="3">
-            <a:schemeClr val="accent1"/>
-          </a:fillRef>
-          <a:effectRef idx="2">
-            <a:schemeClr val="accent1"/>
-          </a:effectRef>
-          <a:fontRef idx="minor">
-            <a:schemeClr val="lt1"/>
-          </a:fontRef>
-        </p:style>
-        <p:txBody>
-          <a:bodyPr rtlCol="0" anchor="ctr" lIns="0" rIns="0" tIns="0" bIns="0"/>
-          <a:lstStyle/>
-          <a:p>
-            <a:pPr algn="ctr"/>
-            <a:r>
-              <a:rPr sz="1500" b="1">
-                <a:solidFill>
-                  <a:srgbClr val="202122"/>
-                </a:solidFill>
-                <a:latin typeface="Calibri"/>
-              </a:rPr>
-              <a:t>3</a:t>
-            </a:r>
-          </a:p>
-        </p:txBody>
-      </p:sp>
-      <p:sp>
-        <p:nvSpPr>
-          <p:cNvPr id="16" name="TextBox 15"/>
-          <p:cNvSpPr txBox="1"/>
-          <p:nvPr/>
-        </p:nvSpPr>
-        <p:spPr>
-          <a:xfrm>
-            <a:off x="8950756" y="1801368"/>
-            <a:ext cx="2509418" cy="512064"/>
-          </a:xfrm>
-          <a:prstGeom prst="rect">
-            <a:avLst/>
-          </a:prstGeom>
-          <a:noFill/>
-        </p:spPr>
-        <p:txBody>
-          <a:bodyPr wrap="square" anchor="ctr" lIns="0" rIns="0" tIns="0" bIns="0"/>
-          <a:lstStyle/>
-          <a:p>
-            <a:pPr algn="l"/>
-            <a:r>
-              <a:rPr sz="1900" b="1" i="0">
-                <a:solidFill>
-                  <a:srgbClr val="03306E"/>
-                </a:solidFill>
-                <a:latin typeface="Calibri"/>
-              </a:rPr>
-              <a:t>Iteration</a:t>
-            </a:r>
-          </a:p>
-        </p:txBody>
-      </p:sp>
-      <p:sp>
-        <p:nvSpPr>
-          <p:cNvPr id="17" name="TextBox 16"/>
-          <p:cNvSpPr txBox="1"/>
-          <p:nvPr/>
-        </p:nvSpPr>
-        <p:spPr>
-          <a:xfrm>
-            <a:off x="8356396" y="2468880"/>
-            <a:ext cx="3058058" cy="3566160"/>
-          </a:xfrm>
-          <a:prstGeom prst="rect">
-            <a:avLst/>
-          </a:prstGeom>
-          <a:noFill/>
-        </p:spPr>
-        <p:txBody>
-          <a:bodyPr wrap="square" anchor="t" lIns="0" rIns="0" tIns="0" bIns="0"/>
-          <a:lstStyle/>
-          <a:p>
-            <a:pPr algn="l"/>
-            <a:r>
-              <a:rPr sz="2000" b="0" i="0">
-                <a:solidFill>
-                  <a:srgbClr val="202122"/>
-                </a:solidFill>
-                <a:latin typeface="Calibri"/>
-              </a:rPr>
-              <a:t>Steps repeat: a for loop a set number of times, a while loop until a condition changes.</a:t>
-            </a:r>
-          </a:p>
-        </p:txBody>
-      </p:sp>
-    </p:spTree>
-  </p:cSld>
-  <p:clrMapOvr>
-    <a:masterClrMapping/>
-  </p:clrMapOvr>
-</p:sld>
-</file>
-
-<file path=ppt/slides/slide7.xml><?xml version="1.0" encoding="utf-8"?>
-<p:sld xmlns:a="http://schemas.openxmlformats.org/drawingml/2006/main" xmlns:p="http://schemas.openxmlformats.org/presentationml/2006/main" xmlns:r="http://schemas.openxmlformats.org/officeDocument/2006/relationships">
-  <p:cSld>
-    <p:bg>
-      <p:bgPr>
-        <a:solidFill>
-          <a:srgbClr val="FFFFFF"/>
-        </a:solidFill>
-        <a:effectLst/>
-      </p:bgPr>
-    </p:bg>
-    <p:spTree>
-      <p:nvGrpSpPr>
-        <p:cNvPr id="1" name=""/>
-        <p:cNvGrpSpPr/>
-        <p:nvPr/>
-      </p:nvGrpSpPr>
-      <p:grpSpPr/>
-      <p:sp>
-        <p:nvSpPr>
-          <p:cNvPr id="2" name="TextBox 1"/>
-          <p:cNvSpPr txBox="1"/>
-          <p:nvPr/>
-        </p:nvSpPr>
-        <p:spPr>
-          <a:xfrm>
-            <a:off x="548640" y="320040"/>
-            <a:ext cx="11094415" cy="274320"/>
-          </a:xfrm>
-          <a:prstGeom prst="rect">
-            <a:avLst/>
-          </a:prstGeom>
-          <a:noFill/>
-        </p:spPr>
-        <p:txBody>
-          <a:bodyPr wrap="square" anchor="t" lIns="0" rIns="0" tIns="0" bIns="0"/>
-          <a:lstStyle/>
-          <a:p>
-            <a:pPr algn="l"/>
-            <a:r>
-              <a:rPr sz="1100" b="1" i="0">
-                <a:solidFill>
-                  <a:srgbClr val="54595D"/>
-                </a:solidFill>
-                <a:latin typeface="Calibri"/>
-              </a:rPr>
-              <a:t>CORE COMPONENT  ·  Core Paper 1</a:t>
-            </a:r>
-          </a:p>
-        </p:txBody>
-      </p:sp>
-      <p:sp>
-        <p:nvSpPr>
-          <p:cNvPr id="3" name="TextBox 2"/>
-          <p:cNvSpPr txBox="1"/>
-          <p:nvPr/>
-        </p:nvSpPr>
-        <p:spPr>
-          <a:xfrm>
-            <a:off x="548640" y="566928"/>
-            <a:ext cx="11094415" cy="822960"/>
-          </a:xfrm>
-          <a:prstGeom prst="rect">
-            <a:avLst/>
-          </a:prstGeom>
-          <a:noFill/>
-        </p:spPr>
-        <p:txBody>
-          <a:bodyPr wrap="square" anchor="ctr" lIns="0" rIns="0" tIns="0" bIns="0"/>
-          <a:lstStyle/>
-          <a:p>
-            <a:pPr algn="l"/>
-            <a:r>
-              <a:rPr sz="3200" b="1" i="0">
-                <a:solidFill>
-                  <a:srgbClr val="03306E"/>
-                </a:solidFill>
-                <a:latin typeface="Cambria"/>
-              </a:rPr>
-              <a:t>Working with algorithms</a:t>
-            </a:r>
-          </a:p>
-        </p:txBody>
-      </p:sp>
-      <p:sp>
-        <p:nvSpPr>
-          <p:cNvPr id="4" name="TextBox 3"/>
-          <p:cNvSpPr txBox="1"/>
-          <p:nvPr/>
-        </p:nvSpPr>
-        <p:spPr>
-          <a:xfrm>
-            <a:off x="548640" y="6446520"/>
-            <a:ext cx="8229600" cy="274320"/>
-          </a:xfrm>
-          <a:prstGeom prst="rect">
-            <a:avLst/>
-          </a:prstGeom>
-          <a:noFill/>
-        </p:spPr>
-        <p:txBody>
-          <a:bodyPr wrap="square" anchor="t" lIns="0" rIns="0" tIns="0" bIns="0"/>
-          <a:lstStyle/>
-          <a:p>
-            <a:pPr algn="l"/>
-            <a:r>
-              <a:rPr sz="1000" b="0" i="0">
-                <a:solidFill>
-                  <a:srgbClr val="54595D"/>
-                </a:solidFill>
-                <a:latin typeface="Calibri"/>
-              </a:rPr>
-              <a:t>Digital Software Development T Level  ·  Computational Thinking and Algorithms</a:t>
-            </a:r>
-          </a:p>
-        </p:txBody>
-      </p:sp>
-      <p:sp>
-        <p:nvSpPr>
-          <p:cNvPr id="5" name="TextBox 4"/>
-          <p:cNvSpPr txBox="1"/>
-          <p:nvPr/>
-        </p:nvSpPr>
-        <p:spPr>
-          <a:xfrm>
-            <a:off x="10728655" y="6446520"/>
-            <a:ext cx="914400" cy="274320"/>
-          </a:xfrm>
-          <a:prstGeom prst="rect">
-            <a:avLst/>
-          </a:prstGeom>
-          <a:noFill/>
-        </p:spPr>
-        <p:txBody>
-          <a:bodyPr wrap="square" anchor="t" lIns="0" rIns="0" tIns="0" bIns="0"/>
-          <a:lstStyle/>
-          <a:p>
-            <a:pPr algn="r"/>
-            <a:r>
-              <a:rPr sz="1000" b="0" i="0">
-                <a:solidFill>
-                  <a:srgbClr val="54595D"/>
-                </a:solidFill>
-                <a:latin typeface="Calibri"/>
-              </a:rPr>
-              <a:t>7</a:t>
-            </a:r>
-          </a:p>
-        </p:txBody>
-      </p:sp>
-      <p:sp>
-        <p:nvSpPr>
-          <p:cNvPr id="6" name="TextBox 5"/>
-          <p:cNvSpPr txBox="1"/>
-          <p:nvPr/>
-        </p:nvSpPr>
-        <p:spPr>
-          <a:xfrm>
-            <a:off x="548640" y="1600200"/>
-            <a:ext cx="6675120" cy="4572000"/>
-          </a:xfrm>
-          <a:prstGeom prst="rect">
-            <a:avLst/>
-          </a:prstGeom>
-          <a:noFill/>
-        </p:spPr>
-        <p:txBody>
-          <a:bodyPr wrap="square" lIns="0" rIns="0" tIns="0" bIns="0">
-            <a:spAutoFit/>
-          </a:bodyPr>
-          <a:lstStyle/>
-          <a:p>
-            <a:pPr marL="274320" indent="-274320">
-              <a:spcAft>
-                <a:spcPts val="990"/>
-              </a:spcAft>
-              <a:buClr>
-                <a:srgbClr val="0645AD"/>
-              </a:buClr>
-              <a:buFont typeface="Arial"/>
-              <a:buChar char="•"/>
-            </a:pPr>
-            <a:r>
-              <a:rPr sz="2200" b="1">
-                <a:solidFill>
-                  <a:srgbClr val="202122"/>
-                </a:solidFill>
-                <a:latin typeface="Calibri"/>
-              </a:rPr>
-              <a:t>Purpose:</a:t>
-            </a:r>
-            <a:r>
-              <a:rPr sz="2200" b="0">
-                <a:solidFill>
-                  <a:srgbClr val="202122"/>
-                </a:solidFill>
-                <a:latin typeface="Calibri"/>
-              </a:rPr>
-              <a:t> work out what an algorithm is for by tracing it with sample inputs.</a:t>
-            </a:r>
-          </a:p>
-          <a:p>
-            <a:pPr marL="274320" indent="-274320">
-              <a:spcAft>
-                <a:spcPts val="990"/>
-              </a:spcAft>
-              <a:buClr>
-                <a:srgbClr val="0645AD"/>
-              </a:buClr>
-              <a:buFont typeface="Arial"/>
-              <a:buChar char="•"/>
-            </a:pPr>
-            <a:r>
-              <a:rPr sz="2200" b="1">
-                <a:solidFill>
-                  <a:srgbClr val="202122"/>
-                </a:solidFill>
-                <a:latin typeface="Calibri"/>
-              </a:rPr>
-              <a:t>Output:</a:t>
-            </a:r>
-            <a:r>
-              <a:rPr sz="2200" b="0">
-                <a:solidFill>
-                  <a:srgbClr val="202122"/>
-                </a:solidFill>
-                <a:latin typeface="Calibri"/>
-              </a:rPr>
-              <a:t> predict exactly what it will output for a given input.</a:t>
-            </a:r>
-          </a:p>
-          <a:p>
-            <a:pPr marL="274320" indent="-274320">
-              <a:spcAft>
-                <a:spcPts val="990"/>
-              </a:spcAft>
-              <a:buClr>
-                <a:srgbClr val="0645AD"/>
-              </a:buClr>
-              <a:buFont typeface="Arial"/>
-              <a:buChar char="•"/>
-            </a:pPr>
-            <a:r>
-              <a:rPr sz="2200" b="1">
-                <a:solidFill>
-                  <a:srgbClr val="202122"/>
-                </a:solidFill>
-                <a:latin typeface="Calibri"/>
-              </a:rPr>
-              <a:t>Errors:</a:t>
-            </a:r>
-            <a:r>
-              <a:rPr sz="2200" b="0">
-                <a:solidFill>
-                  <a:srgbClr val="202122"/>
-                </a:solidFill>
-                <a:latin typeface="Calibri"/>
-              </a:rPr>
-              <a:t> find and correct logic errors, e.g. a wrong comparison or a loop that never ends.</a:t>
-            </a:r>
-          </a:p>
-          <a:p>
-            <a:pPr marL="274320" indent="-274320">
-              <a:spcAft>
-                <a:spcPts val="990"/>
-              </a:spcAft>
-              <a:buClr>
-                <a:srgbClr val="0645AD"/>
-              </a:buClr>
-              <a:buFont typeface="Arial"/>
-              <a:buChar char="•"/>
-            </a:pPr>
-            <a:r>
-              <a:rPr sz="2200" b="1">
-                <a:solidFill>
-                  <a:srgbClr val="202122"/>
-                </a:solidFill>
-                <a:latin typeface="Calibri"/>
-              </a:rPr>
-              <a:t>Translate:</a:t>
-            </a:r>
-            <a:r>
-              <a:rPr sz="2200" b="0">
-                <a:solidFill>
-                  <a:srgbClr val="202122"/>
-                </a:solidFill>
-                <a:latin typeface="Calibri"/>
-              </a:rPr>
-              <a:t> turn a flowchart into code, or code into a written description.</a:t>
-            </a:r>
-          </a:p>
-          <a:p>
-            <a:pPr marL="274320" indent="-274320">
-              <a:spcAft>
-                <a:spcPts val="990"/>
-              </a:spcAft>
-              <a:buClr>
-                <a:srgbClr val="0645AD"/>
-              </a:buClr>
-              <a:buFont typeface="Arial"/>
-              <a:buChar char="•"/>
-            </a:pPr>
-            <a:r>
-              <a:rPr sz="2200" b="1">
-                <a:solidFill>
-                  <a:srgbClr val="202122"/>
-                </a:solidFill>
-                <a:latin typeface="Calibri"/>
-              </a:rPr>
-              <a:t>Design:</a:t>
-            </a:r>
-            <a:r>
-              <a:rPr sz="2200" b="0">
-                <a:solidFill>
-                  <a:srgbClr val="202122"/>
-                </a:solidFill>
-                <a:latin typeface="Calibri"/>
-              </a:rPr>
-              <a:t> build your own algorithm using sequence, selection and iteration.</a:t>
-            </a:r>
-          </a:p>
-        </p:txBody>
-      </p:sp>
-      <p:sp>
-        <p:nvSpPr>
-          <p:cNvPr id="7" name="Rounded Rectangle 6"/>
-          <p:cNvSpPr/>
-          <p:nvPr/>
-        </p:nvSpPr>
-        <p:spPr>
-          <a:xfrm>
-            <a:off x="7772400" y="1600200"/>
-            <a:ext cx="3867912" cy="4434840"/>
-          </a:xfrm>
-          <a:prstGeom prst="roundRect">
-            <a:avLst>
-              <a:gd name="adj" fmla="val 8000"/>
-            </a:avLst>
-          </a:prstGeom>
-          <a:solidFill>
-            <a:srgbClr val="03306E"/>
-          </a:solidFill>
-          <a:ln>
-            <a:noFill/>
-          </a:ln>
-          <a:effectLst/>
-        </p:spPr>
-        <p:style>
-          <a:lnRef idx="1">
-            <a:schemeClr val="accent1"/>
-          </a:lnRef>
-          <a:fillRef idx="3">
-            <a:schemeClr val="accent1"/>
-          </a:fillRef>
-          <a:effectRef idx="2">
-            <a:schemeClr val="accent1"/>
-          </a:effectRef>
-          <a:fontRef idx="minor">
-            <a:schemeClr val="lt1"/>
-          </a:fontRef>
-        </p:style>
-        <p:txBody>
-          <a:bodyPr rtlCol="0" anchor="ctr"/>
-          <a:lstStyle/>
-          <a:p/>
-        </p:txBody>
-      </p:sp>
-      <p:sp>
-        <p:nvSpPr>
-          <p:cNvPr id="8" name="Oval 7"/>
-          <p:cNvSpPr/>
-          <p:nvPr/>
-        </p:nvSpPr>
-        <p:spPr>
-          <a:xfrm>
-            <a:off x="8046720" y="1874519"/>
-            <a:ext cx="548640" cy="548640"/>
-          </a:xfrm>
-          <a:prstGeom prst="ellipse">
-            <a:avLst/>
-          </a:prstGeom>
-          <a:solidFill>
-            <a:srgbClr val="F2B705"/>
-          </a:solidFill>
-          <a:ln>
-            <a:noFill/>
-          </a:ln>
-          <a:effectLst/>
-        </p:spPr>
-        <p:style>
-          <a:lnRef idx="1">
-            <a:schemeClr val="accent1"/>
-          </a:lnRef>
-          <a:fillRef idx="3">
-            <a:schemeClr val="accent1"/>
-          </a:fillRef>
-          <a:effectRef idx="2">
-            <a:schemeClr val="accent1"/>
-          </a:effectRef>
-          <a:fontRef idx="minor">
-            <a:schemeClr val="lt1"/>
-          </a:fontRef>
-        </p:style>
-        <p:txBody>
-          <a:bodyPr rtlCol="0" anchor="ctr" lIns="0" rIns="0" tIns="0" bIns="0"/>
-          <a:lstStyle/>
-          <a:p>
-            <a:pPr algn="ctr"/>
-            <a:r>
-              <a:rPr sz="2000" b="1">
-                <a:solidFill>
-                  <a:srgbClr val="202122"/>
-                </a:solidFill>
-                <a:latin typeface="Calibri"/>
-              </a:rPr>
-              <a:t>!</a:t>
-            </a:r>
-          </a:p>
-        </p:txBody>
-      </p:sp>
-      <p:sp>
-        <p:nvSpPr>
-          <p:cNvPr id="9" name="TextBox 8"/>
-          <p:cNvSpPr txBox="1"/>
-          <p:nvPr/>
-        </p:nvSpPr>
-        <p:spPr>
-          <a:xfrm>
-            <a:off x="8046720" y="2606040"/>
-            <a:ext cx="3291840" cy="365760"/>
-          </a:xfrm>
-          <a:prstGeom prst="rect">
-            <a:avLst/>
-          </a:prstGeom>
-          <a:noFill/>
-        </p:spPr>
-        <p:txBody>
-          <a:bodyPr wrap="square" anchor="t" lIns="0" rIns="0" tIns="0" bIns="0"/>
-          <a:lstStyle/>
-          <a:p>
-            <a:pPr algn="l"/>
-            <a:r>
-              <a:rPr sz="1300" b="1" i="0">
-                <a:solidFill>
-                  <a:srgbClr val="A9C8F0"/>
-                </a:solidFill>
-                <a:latin typeface="Calibri"/>
-              </a:rPr>
-              <a:t>KEY IDEA</a:t>
-            </a:r>
-          </a:p>
-        </p:txBody>
-      </p:sp>
-      <p:sp>
-        <p:nvSpPr>
-          <p:cNvPr id="10" name="TextBox 9"/>
-          <p:cNvSpPr txBox="1"/>
-          <p:nvPr/>
-        </p:nvSpPr>
-        <p:spPr>
-          <a:xfrm>
-            <a:off x="8046720" y="3017520"/>
-            <a:ext cx="3291840" cy="2926080"/>
-          </a:xfrm>
-          <a:prstGeom prst="rect">
-            <a:avLst/>
-          </a:prstGeom>
-          <a:noFill/>
-        </p:spPr>
-        <p:txBody>
-          <a:bodyPr wrap="square" anchor="t" lIns="0" rIns="0" tIns="0" bIns="0"/>
-          <a:lstStyle/>
-          <a:p>
-            <a:pPr algn="l"/>
-            <a:r>
-              <a:rPr sz="2200" b="0" i="0">
-                <a:solidFill>
-                  <a:srgbClr val="FFFFFF"/>
-                </a:solidFill>
-                <a:latin typeface="Cambria"/>
-              </a:rPr>
-              <a:t>Use a trace table: one column per variable, one row per step. It shows exactly where an algorithm goes wrong.</a:t>
-            </a:r>
-          </a:p>
-        </p:txBody>
-      </p:sp>
-    </p:spTree>
-  </p:cSld>
-  <p:clrMapOvr>
-    <a:masterClrMapping/>
-  </p:clrMapOvr>
-</p:sld>
-</file>
-
-<file path=ppt/slides/slide8.xml><?xml version="1.0" encoding="utf-8"?>
-<p:sld xmlns:a="http://schemas.openxmlformats.org/drawingml/2006/main" xmlns:p="http://schemas.openxmlformats.org/presentationml/2006/main" xmlns:r="http://schemas.openxmlformats.org/officeDocument/2006/relationships">
-  <p:cSld>
-    <p:bg>
-      <p:bgPr>
-        <a:solidFill>
-          <a:srgbClr val="FFFFFF"/>
-        </a:solidFill>
-        <a:effectLst/>
-      </p:bgPr>
-    </p:bg>
-    <p:spTree>
-      <p:nvGrpSpPr>
-        <p:cNvPr id="1" name=""/>
-        <p:cNvGrpSpPr/>
-        <p:nvPr/>
-      </p:nvGrpSpPr>
-      <p:grpSpPr/>
-      <p:sp>
-        <p:nvSpPr>
-          <p:cNvPr id="2" name="TextBox 1"/>
-          <p:cNvSpPr txBox="1"/>
-          <p:nvPr/>
-        </p:nvSpPr>
-        <p:spPr>
-          <a:xfrm>
-            <a:off x="548640" y="320040"/>
-            <a:ext cx="11094415" cy="274320"/>
-          </a:xfrm>
-          <a:prstGeom prst="rect">
-            <a:avLst/>
-          </a:prstGeom>
-          <a:noFill/>
-        </p:spPr>
-        <p:txBody>
-          <a:bodyPr wrap="square" anchor="t" lIns="0" rIns="0" tIns="0" bIns="0"/>
-          <a:lstStyle/>
-          <a:p>
-            <a:pPr algn="l"/>
-            <a:r>
-              <a:rPr sz="1100" b="1" i="0">
-                <a:solidFill>
-                  <a:srgbClr val="54595D"/>
-                </a:solidFill>
-                <a:latin typeface="Calibri"/>
-              </a:rPr>
-              <a:t>CORE COMPONENT  ·  Core Paper 1</a:t>
-            </a:r>
-          </a:p>
-        </p:txBody>
-      </p:sp>
-      <p:sp>
-        <p:nvSpPr>
-          <p:cNvPr id="3" name="TextBox 2"/>
-          <p:cNvSpPr txBox="1"/>
-          <p:nvPr/>
-        </p:nvSpPr>
-        <p:spPr>
-          <a:xfrm>
-            <a:off x="548640" y="566928"/>
-            <a:ext cx="11094415" cy="822960"/>
-          </a:xfrm>
-          <a:prstGeom prst="rect">
-            <a:avLst/>
-          </a:prstGeom>
-          <a:noFill/>
-        </p:spPr>
-        <p:txBody>
-          <a:bodyPr wrap="square" anchor="ctr" lIns="0" rIns="0" tIns="0" bIns="0"/>
-          <a:lstStyle/>
-          <a:p>
-            <a:pPr algn="l"/>
-            <a:r>
-              <a:rPr sz="3200" b="1" i="0">
-                <a:solidFill>
-                  <a:srgbClr val="03306E"/>
-                </a:solidFill>
-                <a:latin typeface="Cambria"/>
-              </a:rPr>
-              <a:t>Check your understanding</a:t>
-            </a:r>
-          </a:p>
-        </p:txBody>
-      </p:sp>
-      <p:sp>
-        <p:nvSpPr>
-          <p:cNvPr id="4" name="TextBox 3"/>
-          <p:cNvSpPr txBox="1"/>
-          <p:nvPr/>
-        </p:nvSpPr>
-        <p:spPr>
-          <a:xfrm>
-            <a:off x="548640" y="6446520"/>
-            <a:ext cx="8229600" cy="274320"/>
-          </a:xfrm>
-          <a:prstGeom prst="rect">
-            <a:avLst/>
-          </a:prstGeom>
-          <a:noFill/>
-        </p:spPr>
-        <p:txBody>
-          <a:bodyPr wrap="square" anchor="t" lIns="0" rIns="0" tIns="0" bIns="0"/>
-          <a:lstStyle/>
-          <a:p>
-            <a:pPr algn="l"/>
-            <a:r>
-              <a:rPr sz="1000" b="0" i="0">
-                <a:solidFill>
-                  <a:srgbClr val="54595D"/>
-                </a:solidFill>
-                <a:latin typeface="Calibri"/>
-              </a:rPr>
-              <a:t>Digital Software Development T Level  ·  Computational Thinking and Algorithms</a:t>
-            </a:r>
-          </a:p>
-        </p:txBody>
-      </p:sp>
-      <p:sp>
-        <p:nvSpPr>
-          <p:cNvPr id="5" name="TextBox 4"/>
-          <p:cNvSpPr txBox="1"/>
-          <p:nvPr/>
-        </p:nvSpPr>
-        <p:spPr>
-          <a:xfrm>
-            <a:off x="10728655" y="6446520"/>
-            <a:ext cx="914400" cy="274320"/>
-          </a:xfrm>
-          <a:prstGeom prst="rect">
-            <a:avLst/>
-          </a:prstGeom>
-          <a:noFill/>
-        </p:spPr>
-        <p:txBody>
-          <a:bodyPr wrap="square" anchor="t" lIns="0" rIns="0" tIns="0" bIns="0"/>
-          <a:lstStyle/>
-          <a:p>
-            <a:pPr algn="r"/>
-            <a:r>
-              <a:rPr sz="1000" b="0" i="0">
-                <a:solidFill>
-                  <a:srgbClr val="54595D"/>
-                </a:solidFill>
-                <a:latin typeface="Calibri"/>
-              </a:rPr>
-              <a:t>8</a:t>
-            </a:r>
-          </a:p>
-        </p:txBody>
-      </p:sp>
-      <p:sp>
-        <p:nvSpPr>
-          <p:cNvPr id="6" name="Oval 5"/>
-          <p:cNvSpPr/>
-          <p:nvPr/>
-        </p:nvSpPr>
-        <p:spPr>
-          <a:xfrm>
-            <a:off x="548640" y="1618488"/>
-            <a:ext cx="411480" cy="411480"/>
-          </a:xfrm>
-          <a:prstGeom prst="ellipse">
-            <a:avLst/>
-          </a:prstGeom>
-          <a:solidFill>
-            <a:srgbClr val="F2B705"/>
-          </a:solidFill>
-          <a:ln>
-            <a:noFill/>
-          </a:ln>
-          <a:effectLst/>
-        </p:spPr>
-        <p:style>
-          <a:lnRef idx="1">
-            <a:schemeClr val="accent1"/>
-          </a:lnRef>
-          <a:fillRef idx="3">
-            <a:schemeClr val="accent1"/>
-          </a:fillRef>
-          <a:effectRef idx="2">
-            <a:schemeClr val="accent1"/>
-          </a:effectRef>
-          <a:fontRef idx="minor">
-            <a:schemeClr val="lt1"/>
-          </a:fontRef>
-        </p:style>
-        <p:txBody>
-          <a:bodyPr rtlCol="0" anchor="ctr" lIns="0" rIns="0" tIns="0" bIns="0"/>
-          <a:lstStyle/>
-          <a:p>
-            <a:pPr algn="ctr"/>
-            <a:r>
-              <a:rPr sz="1400" b="1">
-                <a:solidFill>
-                  <a:srgbClr val="202122"/>
-                </a:solidFill>
-                <a:latin typeface="Calibri"/>
-              </a:rPr>
-              <a:t>1</a:t>
-            </a:r>
-          </a:p>
-        </p:txBody>
-      </p:sp>
-      <p:sp>
-        <p:nvSpPr>
-          <p:cNvPr id="7" name="TextBox 6"/>
-          <p:cNvSpPr txBox="1"/>
-          <p:nvPr/>
-        </p:nvSpPr>
-        <p:spPr>
-          <a:xfrm>
-            <a:off x="1234440" y="1600200"/>
-            <a:ext cx="10408615" cy="791870"/>
-          </a:xfrm>
-          <a:prstGeom prst="rect">
-            <a:avLst/>
-          </a:prstGeom>
-          <a:noFill/>
-        </p:spPr>
-        <p:txBody>
-          <a:bodyPr wrap="square" anchor="t" lIns="0" rIns="0" tIns="0" bIns="0"/>
-          <a:lstStyle/>
-          <a:p>
-            <a:pPr algn="l"/>
-            <a:r>
-              <a:rPr sz="2200" b="0" i="0">
-                <a:solidFill>
-                  <a:srgbClr val="202122"/>
-                </a:solidFill>
-                <a:latin typeface="Calibri"/>
-              </a:rPr>
-              <a:t>Name the four components of computational thinking.</a:t>
-            </a:r>
-          </a:p>
-        </p:txBody>
-      </p:sp>
-      <p:sp>
-        <p:nvSpPr>
-          <p:cNvPr id="8" name="Oval 7"/>
-          <p:cNvSpPr/>
-          <p:nvPr/>
-        </p:nvSpPr>
-        <p:spPr>
-          <a:xfrm>
-            <a:off x="548640" y="2574950"/>
-            <a:ext cx="411480" cy="411480"/>
-          </a:xfrm>
-          <a:prstGeom prst="ellipse">
-            <a:avLst/>
-          </a:prstGeom>
-          <a:solidFill>
-            <a:srgbClr val="F2B705"/>
-          </a:solidFill>
-          <a:ln>
-            <a:noFill/>
-          </a:ln>
-          <a:effectLst/>
-        </p:spPr>
-        <p:style>
-          <a:lnRef idx="1">
-            <a:schemeClr val="accent1"/>
-          </a:lnRef>
-          <a:fillRef idx="3">
-            <a:schemeClr val="accent1"/>
-          </a:fillRef>
-          <a:effectRef idx="2">
-            <a:schemeClr val="accent1"/>
-          </a:effectRef>
-          <a:fontRef idx="minor">
-            <a:schemeClr val="lt1"/>
-          </a:fontRef>
-        </p:style>
-        <p:txBody>
-          <a:bodyPr rtlCol="0" anchor="ctr" lIns="0" rIns="0" tIns="0" bIns="0"/>
-          <a:lstStyle/>
-          <a:p>
-            <a:pPr algn="ctr"/>
-            <a:r>
-              <a:rPr sz="1400" b="1">
-                <a:solidFill>
-                  <a:srgbClr val="202122"/>
-                </a:solidFill>
-                <a:latin typeface="Calibri"/>
-              </a:rPr>
-              <a:t>2</a:t>
-            </a:r>
-          </a:p>
-        </p:txBody>
-      </p:sp>
-      <p:sp>
-        <p:nvSpPr>
-          <p:cNvPr id="9" name="TextBox 8"/>
-          <p:cNvSpPr txBox="1"/>
-          <p:nvPr/>
-        </p:nvSpPr>
-        <p:spPr>
-          <a:xfrm>
-            <a:off x="1234440" y="2556662"/>
-            <a:ext cx="10408615" cy="791870"/>
-          </a:xfrm>
-          <a:prstGeom prst="rect">
-            <a:avLst/>
-          </a:prstGeom>
-          <a:noFill/>
-        </p:spPr>
-        <p:txBody>
-          <a:bodyPr wrap="square" anchor="t" lIns="0" rIns="0" tIns="0" bIns="0"/>
-          <a:lstStyle/>
-          <a:p>
-            <a:pPr algn="l"/>
-            <a:r>
-              <a:rPr sz="2200" b="0" i="0">
-                <a:solidFill>
-                  <a:srgbClr val="202122"/>
-                </a:solidFill>
-                <a:latin typeface="Calibri"/>
-              </a:rPr>
-              <a:t>Which flowchart symbol shows a decision?</a:t>
-            </a:r>
-          </a:p>
-        </p:txBody>
-      </p:sp>
-      <p:sp>
-        <p:nvSpPr>
-          <p:cNvPr id="10" name="Oval 9"/>
-          <p:cNvSpPr/>
-          <p:nvPr/>
-        </p:nvSpPr>
-        <p:spPr>
-          <a:xfrm>
-            <a:off x="548640" y="3531412"/>
-            <a:ext cx="411480" cy="411480"/>
-          </a:xfrm>
-          <a:prstGeom prst="ellipse">
-            <a:avLst/>
-          </a:prstGeom>
-          <a:solidFill>
-            <a:srgbClr val="F2B705"/>
-          </a:solidFill>
-          <a:ln>
-            <a:noFill/>
-          </a:ln>
-          <a:effectLst/>
-        </p:spPr>
-        <p:style>
-          <a:lnRef idx="1">
-            <a:schemeClr val="accent1"/>
-          </a:lnRef>
-          <a:fillRef idx="3">
-            <a:schemeClr val="accent1"/>
-          </a:fillRef>
-          <a:effectRef idx="2">
-            <a:schemeClr val="accent1"/>
-          </a:effectRef>
-          <a:fontRef idx="minor">
-            <a:schemeClr val="lt1"/>
-          </a:fontRef>
-        </p:style>
-        <p:txBody>
-          <a:bodyPr rtlCol="0" anchor="ctr" lIns="0" rIns="0" tIns="0" bIns="0"/>
-          <a:lstStyle/>
-          <a:p>
-            <a:pPr algn="ctr"/>
-            <a:r>
-              <a:rPr sz="1400" b="1">
-                <a:solidFill>
-                  <a:srgbClr val="202122"/>
-                </a:solidFill>
-                <a:latin typeface="Calibri"/>
-              </a:rPr>
-              <a:t>3</a:t>
-            </a:r>
-          </a:p>
-        </p:txBody>
-      </p:sp>
-      <p:sp>
-        <p:nvSpPr>
-          <p:cNvPr id="11" name="TextBox 10"/>
-          <p:cNvSpPr txBox="1"/>
-          <p:nvPr/>
-        </p:nvSpPr>
-        <p:spPr>
-          <a:xfrm>
-            <a:off x="1234440" y="3513124"/>
-            <a:ext cx="10408615" cy="791870"/>
-          </a:xfrm>
-          <a:prstGeom prst="rect">
-            <a:avLst/>
-          </a:prstGeom>
-          <a:noFill/>
-        </p:spPr>
-        <p:txBody>
-          <a:bodyPr wrap="square" anchor="t" lIns="0" rIns="0" tIns="0" bIns="0"/>
-          <a:lstStyle/>
-          <a:p>
-            <a:pPr algn="l"/>
-            <a:r>
-              <a:rPr sz="2200" b="0" i="0">
-                <a:solidFill>
-                  <a:srgbClr val="202122"/>
-                </a:solidFill>
-                <a:latin typeface="Calibri"/>
-              </a:rPr>
-              <a:t>Which Python keyword gives condition-controlled iteration?</a:t>
-            </a:r>
-          </a:p>
-        </p:txBody>
-      </p:sp>
-      <p:sp>
-        <p:nvSpPr>
-          <p:cNvPr id="12" name="Oval 11"/>
-          <p:cNvSpPr/>
-          <p:nvPr/>
-        </p:nvSpPr>
-        <p:spPr>
-          <a:xfrm>
-            <a:off x="548640" y="4487875"/>
-            <a:ext cx="411480" cy="411480"/>
-          </a:xfrm>
-          <a:prstGeom prst="ellipse">
-            <a:avLst/>
-          </a:prstGeom>
-          <a:solidFill>
-            <a:srgbClr val="F2B705"/>
-          </a:solidFill>
-          <a:ln>
-            <a:noFill/>
-          </a:ln>
-          <a:effectLst/>
-        </p:spPr>
-        <p:style>
-          <a:lnRef idx="1">
-            <a:schemeClr val="accent1"/>
-          </a:lnRef>
-          <a:fillRef idx="3">
-            <a:schemeClr val="accent1"/>
-          </a:fillRef>
-          <a:effectRef idx="2">
-            <a:schemeClr val="accent1"/>
-          </a:effectRef>
-          <a:fontRef idx="minor">
-            <a:schemeClr val="lt1"/>
-          </a:fontRef>
-        </p:style>
-        <p:txBody>
-          <a:bodyPr rtlCol="0" anchor="ctr" lIns="0" rIns="0" tIns="0" bIns="0"/>
-          <a:lstStyle/>
-          <a:p>
-            <a:pPr algn="ctr"/>
-            <a:r>
-              <a:rPr sz="1400" b="1">
-                <a:solidFill>
-                  <a:srgbClr val="202122"/>
-                </a:solidFill>
-                <a:latin typeface="Calibri"/>
-              </a:rPr>
-              <a:t>4</a:t>
-            </a:r>
-          </a:p>
-        </p:txBody>
-      </p:sp>
-      <p:sp>
-        <p:nvSpPr>
-          <p:cNvPr id="13" name="TextBox 12"/>
-          <p:cNvSpPr txBox="1"/>
-          <p:nvPr/>
-        </p:nvSpPr>
-        <p:spPr>
-          <a:xfrm>
-            <a:off x="1234440" y="4469587"/>
-            <a:ext cx="10408615" cy="791870"/>
-          </a:xfrm>
-          <a:prstGeom prst="rect">
-            <a:avLst/>
-          </a:prstGeom>
-          <a:noFill/>
-        </p:spPr>
-        <p:txBody>
-          <a:bodyPr wrap="square" anchor="t" lIns="0" rIns="0" tIns="0" bIns="0"/>
-          <a:lstStyle/>
-          <a:p>
-            <a:pPr algn="l"/>
-            <a:r>
-              <a:rPr sz="2200" b="0" i="0">
-                <a:solidFill>
-                  <a:srgbClr val="202122"/>
-                </a:solidFill>
-                <a:latin typeface="Calibri"/>
-              </a:rPr>
-              <a:t>Give one benefit of expressing an algorithm as code.</a:t>
-            </a:r>
-          </a:p>
-        </p:txBody>
-      </p:sp>
-      <p:sp>
-        <p:nvSpPr>
-          <p:cNvPr id="14" name="Oval 13"/>
-          <p:cNvSpPr/>
-          <p:nvPr/>
-        </p:nvSpPr>
-        <p:spPr>
-          <a:xfrm>
-            <a:off x="548640" y="5444337"/>
-            <a:ext cx="411480" cy="411480"/>
-          </a:xfrm>
-          <a:prstGeom prst="ellipse">
-            <a:avLst/>
-          </a:prstGeom>
-          <a:solidFill>
-            <a:srgbClr val="F2B705"/>
-          </a:solidFill>
-          <a:ln>
-            <a:noFill/>
-          </a:ln>
-          <a:effectLst/>
-        </p:spPr>
-        <p:style>
-          <a:lnRef idx="1">
-            <a:schemeClr val="accent1"/>
-          </a:lnRef>
-          <a:fillRef idx="3">
-            <a:schemeClr val="accent1"/>
-          </a:fillRef>
-          <a:effectRef idx="2">
-            <a:schemeClr val="accent1"/>
-          </a:effectRef>
-          <a:fontRef idx="minor">
-            <a:schemeClr val="lt1"/>
-          </a:fontRef>
-        </p:style>
-        <p:txBody>
-          <a:bodyPr rtlCol="0" anchor="ctr" lIns="0" rIns="0" tIns="0" bIns="0"/>
-          <a:lstStyle/>
-          <a:p>
-            <a:pPr algn="ctr"/>
-            <a:r>
-              <a:rPr sz="1400" b="1">
-                <a:solidFill>
-                  <a:srgbClr val="202122"/>
-                </a:solidFill>
-                <a:latin typeface="Calibri"/>
-              </a:rPr>
-              <a:t>5</a:t>
-            </a:r>
-          </a:p>
-        </p:txBody>
-      </p:sp>
-      <p:sp>
-        <p:nvSpPr>
-          <p:cNvPr id="15" name="TextBox 14"/>
-          <p:cNvSpPr txBox="1"/>
-          <p:nvPr/>
-        </p:nvSpPr>
-        <p:spPr>
-          <a:xfrm>
-            <a:off x="1234440" y="5426049"/>
-            <a:ext cx="10408615" cy="791870"/>
-          </a:xfrm>
-          <a:prstGeom prst="rect">
-            <a:avLst/>
-          </a:prstGeom>
-          <a:noFill/>
-        </p:spPr>
-        <p:txBody>
-          <a:bodyPr wrap="square" anchor="t" lIns="0" rIns="0" tIns="0" bIns="0"/>
-          <a:lstStyle/>
-          <a:p>
-            <a:pPr algn="l"/>
-            <a:r>
-              <a:rPr sz="2200" b="0" i="0">
-                <a:solidFill>
-                  <a:srgbClr val="202122"/>
-                </a:solidFill>
-                <a:latin typeface="Calibri"/>
-              </a:rPr>
-              <a:t>What is a trace table used for?</a:t>
-            </a:r>
-          </a:p>
-        </p:txBody>
-      </p:sp>
-    </p:spTree>
-  </p:cSld>
-  <p:clrMapOvr>
-    <a:masterClrMapping/>
-  </p:clrMapOvr>
-</p:sld>
-</file>
-
 <file path=ppt/slides/slide9.xml><?xml version="1.0" encoding="utf-8"?>
 <p:sld xmlns:a="http://schemas.openxmlformats.org/drawingml/2006/main" xmlns:p="http://schemas.openxmlformats.org/presentationml/2006/main" xmlns:r="http://schemas.openxmlformats.org/officeDocument/2006/relationships">
   <p:cSld>
@@ -9773,7 +13883,7 @@
                 </a:solidFill>
                 <a:latin typeface="Cambria"/>
               </a:rPr>
-              <a:t>Answers</a:t>
+              <a:t>Quick check: Three ways to express an algorithm</a:t>
             </a:r>
           </a:p>
         </p:txBody>
@@ -9852,8 +13962,8 @@
         </p:nvSpPr>
         <p:spPr>
           <a:xfrm>
-            <a:off x="548640" y="1618488"/>
-            <a:ext cx="411480" cy="411480"/>
+            <a:off x="548640" y="1691640"/>
+            <a:ext cx="502920" cy="502920"/>
           </a:xfrm>
           <a:prstGeom prst="ellipse">
             <a:avLst/>
@@ -9886,7 +13996,7 @@
           <a:p>
             <a:pPr algn="ctr"/>
             <a:r>
-              <a:rPr sz="1400" b="1">
+              <a:rPr sz="1600" b="1">
                 <a:solidFill>
                   <a:srgbClr val="202122"/>
                 </a:solidFill>
@@ -9905,8 +14015,8 @@
         </p:nvSpPr>
         <p:spPr>
           <a:xfrm>
-            <a:off x="1234440" y="1600200"/>
-            <a:ext cx="10408615" cy="791870"/>
+            <a:off x="1371600" y="1645920"/>
+            <a:ext cx="10271455" cy="1188720"/>
           </a:xfrm>
           <a:prstGeom prst="rect">
             <a:avLst/>
@@ -9919,24 +14029,13 @@
           <a:p>
             <a:pPr algn="l"/>
             <a:r>
-              <a:rPr sz="1800" b="0" i="0">
-                <a:solidFill>
-                  <a:srgbClr val="54595D"/>
-                </a:solidFill>
-                <a:latin typeface="Calibri"/>
-              </a:rPr>
-              <a:t>Name the four components of computational thinking.</a:t>
-            </a:r>
-          </a:p>
-          <a:p>
-            <a:r>
-              <a:rPr sz="1800" b="1">
-                <a:solidFill>
-                  <a:srgbClr val="03306E"/>
-                </a:solidFill>
-                <a:latin typeface="Calibri"/>
-              </a:rPr>
-              <a:t>Decomposition, pattern recognition, abstraction, algorithmic design.</a:t>
+              <a:rPr sz="2400" b="0" i="0">
+                <a:solidFill>
+                  <a:srgbClr val="202122"/>
+                </a:solidFill>
+                <a:latin typeface="Calibri"/>
+              </a:rPr>
+              <a:t>Which flowchart symbol is used for input or output?</a:t>
             </a:r>
           </a:p>
         </p:txBody>
@@ -9949,8 +14048,8 @@
         </p:nvSpPr>
         <p:spPr>
           <a:xfrm>
-            <a:off x="548640" y="2574950"/>
-            <a:ext cx="411480" cy="411480"/>
+            <a:off x="548640" y="3108960"/>
+            <a:ext cx="502920" cy="502920"/>
           </a:xfrm>
           <a:prstGeom prst="ellipse">
             <a:avLst/>
@@ -9983,7 +14082,7 @@
           <a:p>
             <a:pPr algn="ctr"/>
             <a:r>
-              <a:rPr sz="1400" b="1">
+              <a:rPr sz="1600" b="1">
                 <a:solidFill>
                   <a:srgbClr val="202122"/>
                 </a:solidFill>
@@ -10002,8 +14101,8 @@
         </p:nvSpPr>
         <p:spPr>
           <a:xfrm>
-            <a:off x="1234440" y="2556662"/>
-            <a:ext cx="10408615" cy="791870"/>
+            <a:off x="1371600" y="3063240"/>
+            <a:ext cx="10271455" cy="1188720"/>
           </a:xfrm>
           <a:prstGeom prst="rect">
             <a:avLst/>
@@ -10016,24 +14115,13 @@
           <a:p>
             <a:pPr algn="l"/>
             <a:r>
-              <a:rPr sz="1800" b="0" i="0">
-                <a:solidFill>
-                  <a:srgbClr val="54595D"/>
-                </a:solidFill>
-                <a:latin typeface="Calibri"/>
-              </a:rPr>
-              <a:t>Which flowchart symbol shows a decision?</a:t>
-            </a:r>
-          </a:p>
-          <a:p>
-            <a:r>
-              <a:rPr sz="1800" b="1">
-                <a:solidFill>
-                  <a:srgbClr val="03306E"/>
-                </a:solidFill>
-                <a:latin typeface="Calibri"/>
-              </a:rPr>
-              <a:t>A diamond.</a:t>
+              <a:rPr sz="2400" b="0" i="0">
+                <a:solidFill>
+                  <a:srgbClr val="202122"/>
+                </a:solidFill>
+                <a:latin typeface="Calibri"/>
+              </a:rPr>
+              <a:t>Give one drawback of a written description.</a:t>
             </a:r>
           </a:p>
         </p:txBody>
@@ -10046,8 +14134,8 @@
         </p:nvSpPr>
         <p:spPr>
           <a:xfrm>
-            <a:off x="548640" y="3531412"/>
-            <a:ext cx="411480" cy="411480"/>
+            <a:off x="548640" y="4526280"/>
+            <a:ext cx="502920" cy="502920"/>
           </a:xfrm>
           <a:prstGeom prst="ellipse">
             <a:avLst/>
@@ -10080,7 +14168,7 @@
           <a:p>
             <a:pPr algn="ctr"/>
             <a:r>
-              <a:rPr sz="1400" b="1">
+              <a:rPr sz="1600" b="1">
                 <a:solidFill>
                   <a:srgbClr val="202122"/>
                 </a:solidFill>
@@ -10099,8 +14187,8 @@
         </p:nvSpPr>
         <p:spPr>
           <a:xfrm>
-            <a:off x="1234440" y="3513124"/>
-            <a:ext cx="10408615" cy="791870"/>
+            <a:off x="1371600" y="4480560"/>
+            <a:ext cx="10271455" cy="1188720"/>
           </a:xfrm>
           <a:prstGeom prst="rect">
             <a:avLst/>
@@ -10113,218 +14201,46 @@
           <a:p>
             <a:pPr algn="l"/>
             <a:r>
-              <a:rPr sz="1800" b="0" i="0">
+              <a:rPr sz="2400" b="0" i="0">
+                <a:solidFill>
+                  <a:srgbClr val="202122"/>
+                </a:solidFill>
+                <a:latin typeface="Calibri"/>
+              </a:rPr>
+              <a:t>Why can code be tested when a flowchart can't?</a:t>
+            </a:r>
+          </a:p>
+        </p:txBody>
+      </p:sp>
+      <p:sp>
+        <p:nvSpPr>
+          <p:cNvPr id="12" name="TextBox 11"/>
+          <p:cNvSpPr txBox="1"/>
+          <p:nvPr/>
+        </p:nvSpPr>
+        <p:spPr>
+          <a:xfrm>
+            <a:off x="548640" y="5852160"/>
+            <a:ext cx="11094415" cy="365760"/>
+          </a:xfrm>
+          <a:prstGeom prst="rect">
+            <a:avLst/>
+          </a:prstGeom>
+          <a:noFill/>
+        </p:spPr>
+        <p:txBody>
+          <a:bodyPr wrap="square" anchor="t" lIns="0" rIns="0" tIns="0" bIns="0"/>
+          <a:lstStyle/>
+          <a:p>
+            <a:pPr algn="l"/>
+            <a:r>
+              <a:rPr sz="1300" b="0" i="1">
                 <a:solidFill>
                   <a:srgbClr val="54595D"/>
                 </a:solidFill>
                 <a:latin typeface="Calibri"/>
               </a:rPr>
-              <a:t>Which Python keyword gives condition-controlled iteration?</a:t>
-            </a:r>
-          </a:p>
-          <a:p>
-            <a:r>
-              <a:rPr sz="1800" b="1">
-                <a:solidFill>
-                  <a:srgbClr val="03306E"/>
-                </a:solidFill>
-                <a:latin typeface="Calibri"/>
-              </a:rPr>
-              <a:t>while.</a:t>
-            </a:r>
-          </a:p>
-        </p:txBody>
-      </p:sp>
-      <p:sp>
-        <p:nvSpPr>
-          <p:cNvPr id="12" name="Oval 11"/>
-          <p:cNvSpPr/>
-          <p:nvPr/>
-        </p:nvSpPr>
-        <p:spPr>
-          <a:xfrm>
-            <a:off x="548640" y="4487875"/>
-            <a:ext cx="411480" cy="411480"/>
-          </a:xfrm>
-          <a:prstGeom prst="ellipse">
-            <a:avLst/>
-          </a:prstGeom>
-          <a:solidFill>
-            <a:srgbClr val="F2B705"/>
-          </a:solidFill>
-          <a:ln>
-            <a:noFill/>
-          </a:ln>
-          <a:effectLst/>
-        </p:spPr>
-        <p:style>
-          <a:lnRef idx="1">
-            <a:schemeClr val="accent1"/>
-          </a:lnRef>
-          <a:fillRef idx="3">
-            <a:schemeClr val="accent1"/>
-          </a:fillRef>
-          <a:effectRef idx="2">
-            <a:schemeClr val="accent1"/>
-          </a:effectRef>
-          <a:fontRef idx="minor">
-            <a:schemeClr val="lt1"/>
-          </a:fontRef>
-        </p:style>
-        <p:txBody>
-          <a:bodyPr rtlCol="0" anchor="ctr" lIns="0" rIns="0" tIns="0" bIns="0"/>
-          <a:lstStyle/>
-          <a:p>
-            <a:pPr algn="ctr"/>
-            <a:r>
-              <a:rPr sz="1400" b="1">
-                <a:solidFill>
-                  <a:srgbClr val="202122"/>
-                </a:solidFill>
-                <a:latin typeface="Calibri"/>
-              </a:rPr>
-              <a:t>4</a:t>
-            </a:r>
-          </a:p>
-        </p:txBody>
-      </p:sp>
-      <p:sp>
-        <p:nvSpPr>
-          <p:cNvPr id="13" name="TextBox 12"/>
-          <p:cNvSpPr txBox="1"/>
-          <p:nvPr/>
-        </p:nvSpPr>
-        <p:spPr>
-          <a:xfrm>
-            <a:off x="1234440" y="4469587"/>
-            <a:ext cx="10408615" cy="791870"/>
-          </a:xfrm>
-          <a:prstGeom prst="rect">
-            <a:avLst/>
-          </a:prstGeom>
-          <a:noFill/>
-        </p:spPr>
-        <p:txBody>
-          <a:bodyPr wrap="square" anchor="t" lIns="0" rIns="0" tIns="0" bIns="0"/>
-          <a:lstStyle/>
-          <a:p>
-            <a:pPr algn="l"/>
-            <a:r>
-              <a:rPr sz="1800" b="0" i="0">
-                <a:solidFill>
-                  <a:srgbClr val="54595D"/>
-                </a:solidFill>
-                <a:latin typeface="Calibri"/>
-              </a:rPr>
-              <a:t>Give one benefit of expressing an algorithm as code.</a:t>
-            </a:r>
-          </a:p>
-          <a:p>
-            <a:r>
-              <a:rPr sz="1800" b="1">
-                <a:solidFill>
-                  <a:srgbClr val="03306E"/>
-                </a:solidFill>
-                <a:latin typeface="Calibri"/>
-              </a:rPr>
-              <a:t>It is precise and can be run and tested.</a:t>
-            </a:r>
-          </a:p>
-        </p:txBody>
-      </p:sp>
-      <p:sp>
-        <p:nvSpPr>
-          <p:cNvPr id="14" name="Oval 13"/>
-          <p:cNvSpPr/>
-          <p:nvPr/>
-        </p:nvSpPr>
-        <p:spPr>
-          <a:xfrm>
-            <a:off x="548640" y="5444337"/>
-            <a:ext cx="411480" cy="411480"/>
-          </a:xfrm>
-          <a:prstGeom prst="ellipse">
-            <a:avLst/>
-          </a:prstGeom>
-          <a:solidFill>
-            <a:srgbClr val="F2B705"/>
-          </a:solidFill>
-          <a:ln>
-            <a:noFill/>
-          </a:ln>
-          <a:effectLst/>
-        </p:spPr>
-        <p:style>
-          <a:lnRef idx="1">
-            <a:schemeClr val="accent1"/>
-          </a:lnRef>
-          <a:fillRef idx="3">
-            <a:schemeClr val="accent1"/>
-          </a:fillRef>
-          <a:effectRef idx="2">
-            <a:schemeClr val="accent1"/>
-          </a:effectRef>
-          <a:fontRef idx="minor">
-            <a:schemeClr val="lt1"/>
-          </a:fontRef>
-        </p:style>
-        <p:txBody>
-          <a:bodyPr rtlCol="0" anchor="ctr" lIns="0" rIns="0" tIns="0" bIns="0"/>
-          <a:lstStyle/>
-          <a:p>
-            <a:pPr algn="ctr"/>
-            <a:r>
-              <a:rPr sz="1400" b="1">
-                <a:solidFill>
-                  <a:srgbClr val="202122"/>
-                </a:solidFill>
-                <a:latin typeface="Calibri"/>
-              </a:rPr>
-              <a:t>5</a:t>
-            </a:r>
-          </a:p>
-        </p:txBody>
-      </p:sp>
-      <p:sp>
-        <p:nvSpPr>
-          <p:cNvPr id="15" name="TextBox 14"/>
-          <p:cNvSpPr txBox="1"/>
-          <p:nvPr/>
-        </p:nvSpPr>
-        <p:spPr>
-          <a:xfrm>
-            <a:off x="1234440" y="5426049"/>
-            <a:ext cx="10408615" cy="791870"/>
-          </a:xfrm>
-          <a:prstGeom prst="rect">
-            <a:avLst/>
-          </a:prstGeom>
-          <a:noFill/>
-        </p:spPr>
-        <p:txBody>
-          <a:bodyPr wrap="square" anchor="t" lIns="0" rIns="0" tIns="0" bIns="0"/>
-          <a:lstStyle/>
-          <a:p>
-            <a:pPr algn="l"/>
-            <a:r>
-              <a:rPr sz="1800" b="0" i="0">
-                <a:solidFill>
-                  <a:srgbClr val="54595D"/>
-                </a:solidFill>
-                <a:latin typeface="Calibri"/>
-              </a:rPr>
-              <a:t>What is a trace table used for?</a:t>
-            </a:r>
-          </a:p>
-          <a:p>
-            <a:r>
-              <a:rPr sz="1800" b="1">
-                <a:solidFill>
-                  <a:srgbClr val="03306E"/>
-                </a:solidFill>
-                <a:latin typeface="Calibri"/>
-              </a:rPr>
-              <a:t>Recording variable values step by step to check or debug an algorithm.</a:t>
+              <a:t>Answer on mini whiteboards or in your book. Answers are in the speaker notes.</a:t>
             </a:r>
           </a:p>
         </p:txBody>
